--- a/docs/大创申报-2026-10/大创申报PPT.pptx
+++ b/docs/大创申报-2026-10/大创申报PPT.pptx
@@ -6530,7 +6530,7 @@
                 <a:latin typeface="Microsoft YaHei"/>
                 <a:ea typeface="Microsoft YaHei"/>
               </a:rPr>
-              <a:t>35,667</a:t>
+              <a:t>37,872</a:t>
             </a:r>
             <a:endParaRPr/>
           </a:p>
@@ -6646,7 +6646,7 @@
                 <a:latin typeface="Microsoft YaHei"/>
                 <a:ea typeface="Microsoft YaHei"/>
               </a:rPr>
-              <a:t>36,973</a:t>
+              <a:t>40,169</a:t>
             </a:r>
             <a:endParaRPr/>
           </a:p>
@@ -6762,7 +6762,7 @@
                 <a:latin typeface="Microsoft YaHei"/>
                 <a:ea typeface="Microsoft YaHei"/>
               </a:rPr>
-              <a:t>1,940</a:t>
+              <a:t>2,847</a:t>
             </a:r>
             <a:endParaRPr/>
           </a:p>
@@ -6807,7 +6807,7 @@
                 <a:latin typeface="Microsoft YaHei"/>
                 <a:ea typeface="Microsoft YaHei"/>
               </a:rPr>
-              <a:t xml:space="preserve">102 </a:t>
+              <a:t xml:space="preserve">149 </a:t>
             </a:r>
             <a:r>
               <a:rPr lang="zh-CN" sz="975">
@@ -6878,7 +6878,7 @@
                 <a:latin typeface="Microsoft YaHei"/>
                 <a:ea typeface="Microsoft YaHei"/>
               </a:rPr>
-              <a:t>24</a:t>
+              <a:t>27</a:t>
             </a:r>
             <a:endParaRPr/>
           </a:p>
@@ -7221,7 +7221,7 @@
                           <a:latin typeface="Microsoft YaHei"/>
                           <a:ea typeface="Microsoft YaHei"/>
                         </a:rPr>
-                        <a:t>753 + 289 行</a:t>
+                        <a:t>1187 行</a:t>
                       </a:r>
                       <a:endParaRPr/>
                     </a:p>
@@ -7351,7 +7351,7 @@
                           <a:latin typeface="Microsoft YaHei"/>
                           <a:ea typeface="Microsoft YaHei"/>
                         </a:rPr>
-                        <a:t>848 行 + 141 个测试</a:t>
+                        <a:t>1559 行 + 99 个测试</a:t>
                       </a:r>
                       <a:endParaRPr/>
                     </a:p>
@@ -8957,7 +8957,7 @@
                           <a:latin typeface="Microsoft YaHei"/>
                           <a:ea typeface="Microsoft YaHei"/>
                         </a:rPr>
-                        <a:t>本机 RTX 5060 实测，端到端 p50 ≈ 50 ms</a:t>
+                        <a:t>本机 RTX 5060 实测，端到端 p50 ≈ 300 ms</a:t>
                       </a:r>
                       <a:endParaRPr/>
                     </a:p>
@@ -18159,8 +18159,8 @@
         </p:nvSpPr>
         <p:spPr>
           <a:xfrm rot="0" flipH="0" flipV="0">
-            <a:off x="361950" y="914400"/>
-            <a:ext cx="11582400" cy="2103120"/>
+            <a:off x="361950" y="877824"/>
+            <a:ext cx="11582400" cy="2212848"/>
           </a:xfrm>
           <a:prstGeom prst="roundRect">
             <a:avLst>
@@ -18185,8 +18185,8 @@
         </p:nvSpPr>
         <p:spPr>
           <a:xfrm rot="0" flipH="0" flipV="0">
-            <a:off x="361950" y="914400"/>
-            <a:ext cx="11582400" cy="2103120"/>
+            <a:off x="361950" y="877824"/>
+            <a:ext cx="11582400" cy="2212848"/>
           </a:xfrm>
           <a:custGeom>
             <a:pathLst>
@@ -18242,7 +18242,7 @@
         </p:nvSpPr>
         <p:spPr>
           <a:xfrm rot="0" flipH="0" flipV="0">
-            <a:off x="590550" y="1097280"/>
+            <a:off x="590550" y="1024128"/>
             <a:ext cx="11068050" cy="219075"/>
           </a:xfrm>
           <a:prstGeom prst="rect"/>
@@ -18277,8 +18277,8 @@
         </p:nvSpPr>
         <p:spPr>
           <a:xfrm rot="0" flipH="0" flipV="0">
-            <a:off x="590550" y="1417320"/>
-            <a:ext cx="11068050" cy="1508760"/>
+            <a:off x="590550" y="1298448"/>
+            <a:ext cx="11068050" cy="1664208"/>
           </a:xfrm>
           <a:prstGeom prst="rect"/>
         </p:spPr>
@@ -18293,30 +18293,34 @@
               </a:lnSpc>
             </a:pPr>
             <a:r>
-              <a:rPr b="1">
+              <a:rPr b="1" sz="1600">
                 <a:solidFill>
                   <a:srgbClr val="0E3F8C"/>
                 </a:solidFill>
               </a:rPr>
-              <a:t>给谁用：</a:t>
-            </a:r>
-            <a:r>
-              <a:rPr b="0"/>
-              <a:t>教师、师范生、播音主持、客服等</a:t>
-            </a:r>
-            <a:r>
-              <a:rPr b="1"/>
-              <a:t>职业用嗓人群</a:t>
-            </a:r>
-            <a:r>
-              <a:rPr b="0"/>
-              <a:t>，他们面临不可逆的嗓音损失风险。</a:t>
+              <a:t>看谁的问题：</a:t>
+            </a:r>
+            <a:r>
+              <a:rPr b="0" sz="1600"/>
+              <a:t>声音克隆当前多服务于创作与娱乐，而职业用嗓人群面临的是不可逆的嗓音损失风险——他们需要的不是“像不像”，而是</a:t>
+            </a:r>
+            <a:r>
+              <a:rPr b="1" sz="1600">
+                <a:solidFill>
+                  <a:srgbClr val="D9534F"/>
+                </a:solidFill>
+              </a:rPr>
+              <a:t>在负担得起的前提下把声音保存下来</a:t>
+            </a:r>
+            <a:r>
+              <a:rPr b="0" sz="1600"/>
+              <a:t>。</a:t>
             </a:r>
             <a:endParaRPr/>
           </a:p>
           <a:p>
             <a:r>
-              <a:rPr b="1">
+              <a:rPr b="1" sz="1600">
                 <a:solidFill>
                   <a:srgbClr val="0E3F8C"/>
                 </a:solidFill>
@@ -18324,66 +18328,32 @@
               <a:t>做什么：</a:t>
             </a:r>
             <a:r>
-              <a:rPr b="0"/>
-              <a:t>研究</a:t>
-            </a:r>
-            <a:r>
-              <a:rPr b="1"/>
+              <a:rPr b="0" sz="1600"/>
+              <a:t>把“声音保存”从玩具重新定位为</a:t>
+            </a:r>
+            <a:r>
+              <a:rPr b="1" sz="1600"/>
+              <a:t>面向该人群的实用工具</a:t>
+            </a:r>
+            <a:r>
+              <a:rPr b="0" sz="1600"/>
+              <a:t>，研究</a:t>
+            </a:r>
+            <a:r>
+              <a:rPr b="1" sz="1600"/>
               <a:t>本地离线、秒级参考音</a:t>
             </a:r>
             <a:r>
-              <a:rPr b="0"/>
-              <a:t>条件下的</a:t>
-            </a:r>
-            <a:r>
-              <a:rPr b="1"/>
-              <a:t>声音保存与复现质量边界</a:t>
-            </a:r>
-            <a:r>
-              <a:rPr b="0"/>
-              <a:t>——即“</a:t>
-            </a:r>
-            <a:r>
-              <a:rPr b="1">
-                <a:solidFill>
-                  <a:srgbClr val="D9534F"/>
-                </a:solidFill>
-              </a:rPr>
-              <a:t>给克隆系统多少秒参考音，才能复现出可接受的声音</a:t>
-            </a:r>
-            <a:r>
-              <a:rPr b="0"/>
-              <a:t>”。</a:t>
-            </a:r>
-          </a:p>
-          <a:p>
-            <a:r>
-              <a:rPr b="1">
-                <a:solidFill>
-                  <a:srgbClr val="0E3F8C"/>
-                </a:solidFill>
-              </a:rPr>
-              <a:t>怎么做：</a:t>
-            </a:r>
-            <a:r>
-              <a:rPr b="0"/>
-              <a:t>把已有成熟模型工程化为</a:t>
-            </a:r>
-            <a:r>
-              <a:rPr b="1"/>
-              <a:t>可控、可复现的实验平台</a:t>
-            </a:r>
-            <a:r>
-              <a:rPr b="0"/>
-              <a:t>，用严格协议测量「质量—代价」的真实关系，并反哺为</a:t>
-            </a:r>
-            <a:r>
-              <a:rPr b="1"/>
+              <a:rPr b="0" sz="1600"/>
+              <a:t>下的复现质量边界，并反哺为</a:t>
+            </a:r>
+            <a:r>
+              <a:rPr b="1" sz="1600"/>
               <a:t>自动质量门禁</a:t>
             </a:r>
             <a:r>
-              <a:rPr b="0"/>
-              <a:t>。</a:t>
+              <a:rPr b="0" sz="1600"/>
+              <a:t>——让用户知道“录多久就够”。</a:t>
             </a:r>
           </a:p>
         </p:txBody>
@@ -18396,8 +18366,8 @@
         </p:nvSpPr>
         <p:spPr>
           <a:xfrm rot="0" flipH="0" flipV="0">
-            <a:off x="304800" y="3154680"/>
-            <a:ext cx="5705475" cy="1920240"/>
+            <a:off x="304800" y="3218688"/>
+            <a:ext cx="5705475" cy="1883664"/>
           </a:xfrm>
           <a:prstGeom prst="roundRect">
             <a:avLst>
@@ -18427,7 +18397,7 @@
         </p:nvSpPr>
         <p:spPr>
           <a:xfrm rot="0" flipH="0" flipV="0">
-            <a:off x="495300" y="3364992"/>
+            <a:off x="495300" y="3401568"/>
             <a:ext cx="5324475" cy="219075"/>
           </a:xfrm>
           <a:prstGeom prst="rect"/>
@@ -18448,7 +18418,7 @@
                 <a:latin typeface="Microsoft YaHei"/>
                 <a:ea typeface="Microsoft YaHei"/>
               </a:rPr>
-              <a:t xml:space="preserve">现有方案，都不适用</a:t>
+              <a:t xml:space="preserve">现有方案的盲区</a:t>
             </a:r>
             <a:endParaRPr/>
           </a:p>
@@ -18462,8 +18432,8 @@
         </p:nvSpPr>
         <p:spPr>
           <a:xfrm rot="0" flipH="0" flipV="0">
-            <a:off x="495300" y="3675887"/>
-            <a:ext cx="5324475" cy="1417320"/>
+            <a:off x="495300" y="3694176"/>
+            <a:ext cx="5324475" cy="1371600"/>
           </a:xfrm>
           <a:prstGeom prst="rect"/>
         </p:spPr>
@@ -18481,7 +18451,7 @@
                   <a:srgbClr val="1A2230"/>
                 </a:solidFill>
               </a:rPr>
-              <a:t>传统声音银行</a:t>
+              <a:t>面向创作/娱乐</a:t>
             </a:r>
             <a:r>
               <a:rPr b="0">
@@ -18489,7 +18459,7 @@
                   <a:srgbClr val="4A5568"/>
                 </a:solidFill>
               </a:rPr>
-              <a:t>　需录 50–200 句，难坚持</a:t>
+              <a:t>　追求音色相似度，忽略使用成本</a:t>
             </a:r>
             <a:endParaRPr/>
           </a:p>
@@ -18500,7 +18470,7 @@
                   <a:srgbClr val="1A2230"/>
                 </a:solidFill>
               </a:rPr>
-              <a:t>Apple Personal Voice</a:t>
+              <a:t>传统声音银行</a:t>
             </a:r>
             <a:r>
               <a:rPr b="0">
@@ -18508,7 +18478,7 @@
                   <a:srgbClr val="4A5568"/>
                 </a:solidFill>
               </a:rPr>
-              <a:t>　仅限 Apple 设备</a:t>
+              <a:t>　50–200 句录制门槛，负担重</a:t>
             </a:r>
           </a:p>
           <a:p>
@@ -18518,7 +18488,7 @@
                   <a:srgbClr val="1A2230"/>
                 </a:solidFill>
               </a:rPr>
-              <a:t>云端 AI 克隆</a:t>
+              <a:t>Apple 等厂商功能</a:t>
             </a:r>
             <a:r>
               <a:rPr b="0">
@@ -18526,7 +18496,25 @@
                   <a:srgbClr val="4A5568"/>
                 </a:solidFill>
               </a:rPr>
-              <a:t>　必须联网，无网环境用不了</a:t>
+              <a:t>　仅限 Apple 设备，不通用</a:t>
+            </a:r>
+          </a:p>
+          <a:p>
+            <a:r>
+              <a:rPr b="1">
+                <a:solidFill>
+                  <a:srgbClr val="1A2230"/>
+                </a:solidFill>
+              </a:rPr>
+              <a:t>云端克隆</a:t>
+            </a:r>
+            <a:r>
+              <a:rPr b="0">
+                <a:solidFill>
+                  <a:srgbClr val="4A5568"/>
+                </a:solidFill>
+              </a:rPr>
+              <a:t>　必须联网，隐私与费用双重顾虑</a:t>
             </a:r>
           </a:p>
         </p:txBody>
@@ -18539,8 +18527,8 @@
         </p:nvSpPr>
         <p:spPr>
           <a:xfrm rot="0" flipH="0" flipV="0">
-            <a:off x="6181725" y="3154680"/>
-            <a:ext cx="5705475" cy="1920240"/>
+            <a:off x="6181725" y="3218688"/>
+            <a:ext cx="5705475" cy="1883664"/>
           </a:xfrm>
           <a:prstGeom prst="roundRect">
             <a:avLst>
@@ -18570,7 +18558,7 @@
         </p:nvSpPr>
         <p:spPr>
           <a:xfrm rot="0" flipH="0" flipV="0">
-            <a:off x="6372225" y="3364992"/>
+            <a:off x="6372225" y="3401568"/>
             <a:ext cx="5324475" cy="219075"/>
           </a:xfrm>
           <a:prstGeom prst="rect"/>
@@ -18591,7 +18579,7 @@
                 <a:latin typeface="Microsoft YaHei"/>
                 <a:ea typeface="Microsoft YaHei"/>
               </a:rPr>
-              <a:t xml:space="preserve">本项目的位置</a:t>
+              <a:t xml:space="preserve">我们的切入点</a:t>
             </a:r>
             <a:endParaRPr/>
           </a:p>
@@ -18605,8 +18593,8 @@
         </p:nvSpPr>
         <p:spPr>
           <a:xfrm rot="0" flipH="0" flipV="0">
-            <a:off x="6372225" y="3675887"/>
-            <a:ext cx="5324475" cy="1417320"/>
+            <a:off x="6372225" y="3694176"/>
+            <a:ext cx="5324475" cy="1371600"/>
           </a:xfrm>
           <a:prstGeom prst="rect"/>
         </p:spPr>
@@ -18624,11 +18612,11 @@
                   <a:srgbClr val="1A2230"/>
                 </a:solidFill>
               </a:rPr>
-              <a:t>本地离线</a:t>
+              <a:t>换人群</a:t>
             </a:r>
             <a:r>
               <a:rPr b="0"/>
-              <a:t>：数据全程不出设备</a:t>
+              <a:t>：以职业用嗓者的真实负担为设计起点</a:t>
             </a:r>
             <a:endParaRPr/>
           </a:p>
@@ -18639,11 +18627,11 @@
                   <a:srgbClr val="1A2230"/>
                 </a:solidFill>
               </a:rPr>
-              <a:t>秒级参考音</a:t>
+              <a:t>减负担</a:t>
             </a:r>
             <a:r>
               <a:rPr b="0"/>
-              <a:t>：65 秒即可覆盖全档</a:t>
+              <a:t>：65 秒覆盖全档，不给用户增加压力</a:t>
             </a:r>
           </a:p>
           <a:p>
@@ -18653,11 +18641,25 @@
                   <a:srgbClr val="1A2230"/>
                 </a:solidFill>
               </a:rPr>
-              <a:t>用数据回答</a:t>
+              <a:t>护隐私</a:t>
             </a:r>
             <a:r>
               <a:rPr b="0"/>
-              <a:t>：「录多久就够」</a:t>
+              <a:t>：全程本地，数据不出设备</a:t>
+            </a:r>
+          </a:p>
+          <a:p>
+            <a:r>
+              <a:rPr b="1">
+                <a:solidFill>
+                  <a:srgbClr val="1A2230"/>
+                </a:solidFill>
+              </a:rPr>
+              <a:t>给答案</a:t>
+            </a:r>
+            <a:r>
+              <a:rPr b="0"/>
+              <a:t>：用数据回答“录多久就够”</a:t>
             </a:r>
           </a:p>
         </p:txBody>
@@ -18670,8 +18672,8 @@
         </p:nvSpPr>
         <p:spPr>
           <a:xfrm rot="0" flipH="0" flipV="0">
-            <a:off x="304800" y="5230368"/>
-            <a:ext cx="11582400" cy="640080"/>
+            <a:off x="304800" y="5285232"/>
+            <a:ext cx="11582400" cy="658368"/>
           </a:xfrm>
           <a:prstGeom prst="roundRect">
             <a:avLst>
@@ -18696,7 +18698,7 @@
         </p:nvSpPr>
         <p:spPr>
           <a:xfrm rot="0" flipH="0" flipV="0">
-            <a:off x="476250" y="5394960"/>
+            <a:off x="476250" y="5431536"/>
             <a:ext cx="11239500" cy="333375"/>
           </a:xfrm>
           <a:prstGeom prst="rect"/>
@@ -18717,107 +18719,7 @@
                 <a:latin typeface="Microsoft YaHei"/>
                 <a:ea typeface="Microsoft YaHei"/>
               </a:rPr>
-              <a:t>核心价值：把</a:t>
-            </a:r>
-            <a:r>
-              <a:rPr lang="en-US" sz="1275">
-                <a:solidFill>
-                  <a:srgbClr val="FFFFFF"/>
-                </a:solidFill>
-                <a:latin typeface="Microsoft YaHei"/>
-                <a:ea typeface="Microsoft YaHei"/>
-              </a:rPr>
-              <a:t>"</a:t>
-            </a:r>
-            <a:r>
-              <a:rPr lang="zh-CN" sz="1275">
-                <a:solidFill>
-                  <a:srgbClr val="FFFFFF"/>
-                </a:solidFill>
-                <a:latin typeface="Microsoft YaHei"/>
-                <a:ea typeface="Microsoft YaHei"/>
-              </a:rPr>
-              <a:t>能不能用</a:t>
-            </a:r>
-            <a:r>
-              <a:rPr lang="en-US" sz="1275">
-                <a:solidFill>
-                  <a:srgbClr val="FFFFFF"/>
-                </a:solidFill>
-                <a:latin typeface="Microsoft YaHei"/>
-                <a:ea typeface="Microsoft YaHei"/>
-              </a:rPr>
-              <a:t>"</a:t>
-            </a:r>
-            <a:r>
-              <a:rPr lang="zh-CN" sz="1275">
-                <a:solidFill>
-                  <a:srgbClr val="FFFFFF"/>
-                </a:solidFill>
-                <a:latin typeface="Microsoft YaHei"/>
-                <a:ea typeface="Microsoft YaHei"/>
-              </a:rPr>
-              <a:t>（凭感觉）转化为</a:t>
-            </a:r>
-            <a:r>
-              <a:rPr lang="en-US" sz="1275">
-                <a:solidFill>
-                  <a:srgbClr val="FFFFFF"/>
-                </a:solidFill>
-                <a:latin typeface="Microsoft YaHei"/>
-                <a:ea typeface="Microsoft YaHei"/>
-              </a:rPr>
-              <a:t xml:space="preserve"> "</a:t>
-            </a:r>
-            <a:r>
-              <a:rPr lang="zh-CN" sz="1275">
-                <a:solidFill>
-                  <a:srgbClr val="FFFFFF"/>
-                </a:solidFill>
-                <a:latin typeface="Microsoft YaHei"/>
-                <a:ea typeface="Microsoft YaHei"/>
-              </a:rPr>
-              <a:t>在什么条件下、以什么代价可用</a:t>
-            </a:r>
-            <a:r>
-              <a:rPr lang="en-US" sz="1275">
-                <a:solidFill>
-                  <a:srgbClr val="FFFFFF"/>
-                </a:solidFill>
-                <a:latin typeface="Microsoft YaHei"/>
-                <a:ea typeface="Microsoft YaHei"/>
-              </a:rPr>
-              <a:t>"</a:t>
-            </a:r>
-            <a:r>
-              <a:rPr lang="zh-CN" sz="1275">
-                <a:solidFill>
-                  <a:srgbClr val="FFFFFF"/>
-                </a:solidFill>
-                <a:latin typeface="Microsoft YaHei"/>
-                <a:ea typeface="Microsoft YaHei"/>
-              </a:rPr>
-              <a:t>（</a:t>
-            </a:r>
-            <a:r>
-              <a:rPr lang="zh-CN" sz="1275">
-                <a:solidFill>
-                  <a:srgbClr val="FFFFFF"/>
-                </a:solidFill>
-                <a:latin typeface="Microsoft YaHei"/>
-                <a:ea typeface="Microsoft YaHei"/>
-              </a:rPr>
-              <a:t>用数据回答</a:t>
-            </a:r>
-            <a:r>
-              <a:rPr lang="zh-CN" sz="1275">
-                <a:solidFill>
-                  <a:srgbClr val="FFFFFF"/>
-                </a:solidFill>
-                <a:latin typeface="Microsoft YaHei"/>
-                <a:ea typeface="Microsoft YaHei"/>
-              </a:rPr>
-              <a:t>）。</a:t>
+              <a:t>核心价值：把注意力从“技术能做什么”转向“谁需要它、用起来的代价是什么”——关注对象与研究视角的转变，本身就是本项目的创新所在。</a:t>
             </a:r>
             <a:endParaRPr/>
           </a:p>
@@ -18885,39 +18787,6 @@
               <a:t>04 / 18</a:t>
             </a:r>
             <a:endParaRPr/>
-          </a:p>
-        </p:txBody>
-      </p:sp>
-      <p:sp>
-        <p:nvSpPr>
-          <p:cNvPr id="223" name="TextBox 222"/>
-          <p:cNvSpPr txBox="1"/>
-          <p:nvPr/>
-        </p:nvSpPr>
-        <p:spPr>
-          <a:xfrm>
-            <a:off x="476250" y="5961888"/>
-            <a:ext cx="11239500" cy="201168"/>
-          </a:xfrm>
-          <a:prstGeom prst="rect">
-            <a:avLst/>
-          </a:prstGeom>
-          <a:noFill/>
-        </p:spPr>
-        <p:txBody>
-          <a:bodyPr wrap="square">
-            <a:spAutoFit/>
-          </a:bodyPr>
-          <a:lstStyle/>
-          <a:p>
-            <a:r>
-              <a:rPr sz="1250">
-                <a:solidFill>
-                  <a:srgbClr val="8B97A8"/>
-                </a:solidFill>
-              </a:rPr>
-              <a:t>边界说明：本项目定位为研究训练与系统集成，不发明新的语音合成模型；不涉及任何医疗或诊断宣称。</a:t>
-            </a:r>
           </a:p>
         </p:txBody>
       </p:sp>
@@ -20817,7 +20686,7 @@
                 <a:latin typeface="Microsoft YaHei"/>
                 <a:ea typeface="Microsoft YaHei"/>
               </a:rPr>
-              <a:t xml:space="preserve"> 35,667 </a:t>
+              <a:t xml:space="preserve"> 37,872 </a:t>
             </a:r>
             <a:r>
               <a:rPr lang="zh-CN" sz="1050">
@@ -20857,7 +20726,7 @@
                 <a:latin typeface="Microsoft YaHei"/>
                 <a:ea typeface="Microsoft YaHei"/>
               </a:rPr>
-              <a:t xml:space="preserve"> 36,973 </a:t>
+              <a:t xml:space="preserve"> 40,169 </a:t>
             </a:r>
             <a:r>
               <a:rPr lang="zh-CN" sz="1050">
@@ -20877,7 +20746,7 @@
                 <a:latin typeface="Microsoft YaHei"/>
                 <a:ea typeface="Microsoft YaHei"/>
               </a:rPr>
-              <a:t xml:space="preserve"> / 24 </a:t>
+              <a:t xml:space="preserve"> / 27 </a:t>
             </a:r>
             <a:r>
               <a:rPr lang="zh-CN" sz="1050">
@@ -20897,7 +20766,7 @@
                 <a:latin typeface="Microsoft YaHei"/>
                 <a:ea typeface="Microsoft YaHei"/>
               </a:rPr>
-              <a:t xml:space="preserve"> / 1,940 </a:t>
+              <a:t xml:space="preserve"> / 2,847 </a:t>
             </a:r>
             <a:r>
               <a:rPr lang="zh-CN" sz="1050">
@@ -21073,7 +20942,7 @@
                 <a:latin typeface="Microsoft YaHei"/>
                 <a:ea typeface="Microsoft YaHei"/>
               </a:rPr>
-              <a:t xml:space="preserve">848 </a:t>
+              <a:t xml:space="preserve">1559 </a:t>
             </a:r>
             <a:r>
               <a:rPr lang="zh-CN" sz="1050">
@@ -21093,7 +20962,7 @@
                 <a:latin typeface="Microsoft YaHei"/>
                 <a:ea typeface="Microsoft YaHei"/>
               </a:rPr>
-              <a:t xml:space="preserve"> + 141 </a:t>
+              <a:t xml:space="preserve"> + 99 </a:t>
             </a:r>
             <a:r>
               <a:rPr lang="zh-CN" sz="1050">
@@ -22491,78 +22360,7 @@
                 <a:latin typeface="Microsoft YaHei"/>
                 <a:ea typeface="Microsoft YaHei"/>
               </a:rPr>
-              <a:t>建立一套可复现的测量方法，回答</a:t>
-            </a:r>
-            <a:r>
-              <a:rPr lang="en-US" sz="1125">
-                <a:solidFill>
-                  <a:srgbClr val="1A2230"/>
-                </a:solidFill>
-                <a:latin typeface="Microsoft YaHei"/>
-                <a:ea typeface="Microsoft YaHei"/>
-              </a:rPr>
-              <a:t>"</a:t>
-            </a:r>
-            <a:r>
-              <a:rPr lang="zh-CN" sz="1125">
-                <a:solidFill>
-                  <a:srgbClr val="1A2230"/>
-                </a:solidFill>
-                <a:latin typeface="Microsoft YaHei"/>
-                <a:ea typeface="Microsoft YaHei"/>
-              </a:rPr>
-              <a:t>本地离线、秒级参考音条件下的声音复现质量边界</a:t>
-            </a:r>
-            <a:r>
-              <a:rPr lang="en-US" sz="1125">
-                <a:solidFill>
-                  <a:srgbClr val="1A2230"/>
-                </a:solidFill>
-                <a:latin typeface="Microsoft YaHei"/>
-                <a:ea typeface="Microsoft YaHei"/>
-              </a:rPr>
-              <a:t>"</a:t>
-            </a:r>
-            <a:r>
-              <a:rPr lang="zh-CN" sz="1125">
-                <a:solidFill>
-                  <a:srgbClr val="1A2230"/>
-                </a:solidFill>
-                <a:latin typeface="Microsoft YaHei"/>
-                <a:ea typeface="Microsoft YaHei"/>
-              </a:rPr>
-              <a:t>，并给出面向普通用户的可操作结论。</a:t>
-            </a:r>
-            <a:r>
-              <a:rPr lang="zh-CN" sz="1125">
-                <a:solidFill>
-                  <a:srgbClr val="1A2230"/>
-                </a:solidFill>
-                <a:latin typeface="Microsoft YaHei"/>
-                <a:ea typeface="Microsoft YaHei"/>
-              </a:rPr>
-              <a:t>（要保存声音，最少录多久？）</a:t>
-            </a:r>
-            <a:r>
-              <a:rPr sz="1125">
-                <a:solidFill>
-                  <a:srgbClr val="1A2230"/>
-                </a:solidFill>
-                <a:latin typeface="Microsoft YaHei"/>
-                <a:ea typeface="Microsoft YaHei"/>
-              </a:rPr>
-              <a:t xml:space="preserve">
-</a:t>
-            </a:r>
-            <a:r>
-              <a:rPr lang="zh-CN" sz="1125">
-                <a:solidFill>
-                  <a:srgbClr val="1A2230"/>
-                </a:solidFill>
-                <a:latin typeface="Microsoft YaHei"/>
-                <a:ea typeface="Microsoft YaHei"/>
-              </a:rPr>
-              <a:t>意义</a:t>
+              <a:t>把声音保存的关注对象从创作与娱乐场景，转向职业用嗓人群的真实负担，回答“本地离线、秒级参考音条件下的复现质量边界”，并给出面向普通用户的可操作结论。（要保存声音，最少录多久？）</a:t>
             </a:r>
             <a:endParaRPr/>
           </a:p>
@@ -22790,7 +22588,7 @@
                 <a:latin typeface="Microsoft YaHei"/>
                 <a:ea typeface="Microsoft YaHei"/>
               </a:rPr>
-              <a:t>50ms</a:t>
+              <a:t>≈300ms</a:t>
             </a:r>
             <a:endParaRPr/>
           </a:p>
@@ -22825,7 +22623,7 @@
                 <a:latin typeface="Microsoft YaHei"/>
                 <a:ea typeface="Microsoft YaHei"/>
               </a:rPr>
-              <a:t>端到端延迟</a:t>
+              <a:t>端到端延迟 p50（三段之和）</a:t>
             </a:r>
             <a:r>
               <a:rPr lang="en-US" sz="975">
@@ -23366,7 +23164,7 @@
                           <a:latin typeface="Microsoft YaHei"/>
                           <a:ea typeface="Microsoft YaHei"/>
                         </a:rPr>
-                        <a:t>消费级 GPU 端到端 p50 ≈ 50 ms</a:t>
+                        <a:t>消费级 GPU 端到端 p50 ≈ 300 ms（p95 ≈ 360 ms）</a:t>
                       </a:r>
                       <a:endParaRPr/>
                     </a:p>
@@ -23718,7 +23516,7 @@
                           <a:latin typeface="Microsoft YaHei"/>
                           <a:ea typeface="Microsoft YaHei"/>
                         </a:rPr>
-                        <a:t>后端 35,667 行 · 前端 36,973 行 · 24 插件 · 1,940 测试</a:t>
+                        <a:t>后端 37,872 行 · 前端 40,169 行 · 27 插件 · 2,847 测试</a:t>
                       </a:r>
                       <a:endParaRPr/>
                     </a:p>

--- a/docs/大创申报-2026-10/大创申报PPT.pptx
+++ b/docs/大创申报-2026-10/大创申报PPT.pptx
@@ -23839,124 +23839,8 @@
               </a:lnSpc>
             </a:pPr>
             <a:r>
-              <a:rPr lang="en-US" sz="1125">
-                <a:solidFill>
-                  <a:srgbClr val="FFC107"/>
-                </a:solidFill>
-                <a:latin typeface="Microsoft YaHei"/>
-                <a:ea typeface="Microsoft YaHei"/>
-              </a:rPr>
-              <a:t xml:space="preserve">★ </a:t>
-            </a:r>
-            <a:r>
-              <a:rPr lang="zh-CN" sz="1125">
-                <a:solidFill>
-                  <a:srgbClr val="FFC107"/>
-                </a:solidFill>
-                <a:latin typeface="Microsoft YaHei"/>
-                <a:ea typeface="Microsoft YaHei"/>
-              </a:rPr>
-              <a:t>官方明列子项</a:t>
-            </a:r>
-            <a:r>
-              <a:rPr lang="en-US" sz="1125">
-                <a:solidFill>
-                  <a:srgbClr val="FFC107"/>
-                </a:solidFill>
-                <a:latin typeface="Microsoft YaHei"/>
-                <a:ea typeface="Microsoft YaHei"/>
-              </a:rPr>
-              <a:t xml:space="preserve"> · </a:t>
-            </a:r>
-            <a:r>
-              <a:rPr lang="zh-CN" sz="1125">
-                <a:solidFill>
-                  <a:srgbClr val="FFC107"/>
-                </a:solidFill>
-                <a:latin typeface="Microsoft YaHei"/>
-                <a:ea typeface="Microsoft YaHei"/>
-              </a:rPr>
-              <a:t>讲</a:t>
-            </a:r>
-            <a:r>
-              <a:rPr lang="en-US" sz="1125">
-                <a:solidFill>
-                  <a:srgbClr val="FFC107"/>
-                </a:solidFill>
-                <a:latin typeface="Microsoft YaHei"/>
-                <a:ea typeface="Microsoft YaHei"/>
-              </a:rPr>
-              <a:t>"</a:t>
-            </a:r>
-            <a:r>
-              <a:rPr lang="zh-CN" sz="1125">
-                <a:solidFill>
-                  <a:srgbClr val="FFC107"/>
-                </a:solidFill>
-                <a:latin typeface="Microsoft YaHei"/>
-                <a:ea typeface="Microsoft YaHei"/>
-              </a:rPr>
-              <a:t>怎么想</a:t>
-            </a:r>
-            <a:r>
-              <a:rPr lang="en-US" sz="1125">
-                <a:solidFill>
-                  <a:srgbClr val="FFC107"/>
-                </a:solidFill>
-                <a:latin typeface="Microsoft YaHei"/>
-                <a:ea typeface="Microsoft YaHei"/>
-              </a:rPr>
-              <a:t>"</a:t>
-            </a:r>
-            <a:r>
-              <a:rPr lang="zh-CN" sz="1125">
-                <a:solidFill>
-                  <a:srgbClr val="FFC107"/>
-                </a:solidFill>
-                <a:latin typeface="Microsoft YaHei"/>
-                <a:ea typeface="Microsoft YaHei"/>
-              </a:rPr>
-              <a:t>的，不是</a:t>
-            </a:r>
-            <a:r>
-              <a:rPr lang="en-US" sz="1125">
-                <a:solidFill>
-                  <a:srgbClr val="FFC107"/>
-                </a:solidFill>
-                <a:latin typeface="Microsoft YaHei"/>
-                <a:ea typeface="Microsoft YaHei"/>
-              </a:rPr>
-              <a:t>"</a:t>
-            </a:r>
-            <a:r>
-              <a:rPr lang="zh-CN" sz="1125">
-                <a:solidFill>
-                  <a:srgbClr val="FFC107"/>
-                </a:solidFill>
-                <a:latin typeface="Microsoft YaHei"/>
-                <a:ea typeface="Microsoft YaHei"/>
-              </a:rPr>
-              <a:t>怎么做</a:t>
-            </a:r>
-            <a:r>
-              <a:rPr lang="en-US" sz="1125">
-                <a:solidFill>
-                  <a:srgbClr val="FFC107"/>
-                </a:solidFill>
-                <a:latin typeface="Microsoft YaHei"/>
-                <a:ea typeface="Microsoft YaHei"/>
-              </a:rPr>
-              <a:t>"</a:t>
-            </a:r>
-            <a:r>
-              <a:rPr lang="zh-CN" sz="1125">
-                <a:solidFill>
-                  <a:srgbClr val="FFC107"/>
-                </a:solidFill>
-                <a:latin typeface="Microsoft YaHei"/>
-                <a:ea typeface="Microsoft YaHei"/>
-              </a:rPr>
-              <a:t>的</a:t>
+              <a:rPr b="0"/>
+              <a:t>★ 官方明列子项 · 从"人"出发，不是从"模型"出发</a:t>
             </a:r>
             <a:endParaRPr/>
           </a:p>
@@ -24010,54 +23894,12 @@
               </a:lnSpc>
             </a:pPr>
             <a:r>
-              <a:rPr lang="zh-CN" sz="1500" b="1">
-                <a:solidFill>
-                  <a:srgbClr val="FFC107"/>
-                </a:solidFill>
-                <a:latin typeface="Microsoft YaHei"/>
-                <a:ea typeface="Microsoft YaHei"/>
-              </a:rPr>
-              <a:t>一句话思路：不发明新模型，而是把已有成熟模型工程化成可控实验平台，用它把</a:t>
-            </a:r>
-            <a:r>
-              <a:rPr lang="en-US" sz="1500" b="1">
-                <a:solidFill>
-                  <a:srgbClr val="FFC107"/>
-                </a:solidFill>
-                <a:latin typeface="Microsoft YaHei"/>
-                <a:ea typeface="Microsoft YaHei"/>
-              </a:rPr>
-              <a:t>"</a:t>
-            </a:r>
-            <a:r>
-              <a:rPr lang="zh-CN" sz="1500" b="1">
-                <a:solidFill>
-                  <a:srgbClr val="FFC107"/>
-                </a:solidFill>
-                <a:latin typeface="Microsoft YaHei"/>
-                <a:ea typeface="Microsoft YaHei"/>
-              </a:rPr>
-              <a:t>质量边界</a:t>
-            </a:r>
-            <a:r>
-              <a:rPr lang="en-US" sz="1500" b="1">
-                <a:solidFill>
-                  <a:srgbClr val="FFC107"/>
-                </a:solidFill>
-                <a:latin typeface="Microsoft YaHei"/>
-                <a:ea typeface="Microsoft YaHei"/>
-              </a:rPr>
-              <a:t>"</a:t>
-            </a:r>
-            <a:r>
-              <a:rPr lang="zh-CN" sz="1500" b="1">
-                <a:solidFill>
-                  <a:srgbClr val="FFC107"/>
-                </a:solidFill>
-                <a:latin typeface="Microsoft YaHei"/>
-                <a:ea typeface="Microsoft YaHei"/>
-              </a:rPr>
-              <a:t>这个尚未被系统回答的问题回答掉。</a:t>
+              <a:rPr b="0" sz="1900"/>
+              <a:t>一句话思路：老师的嗓子会坏，但现有方案门槛太高、用不上——</a:t>
+            </a:r>
+            <a:r>
+              <a:rPr b="1" sz="1900"/>
+              <a:t>能不能让 ta 录一分钟就够？</a:t>
             </a:r>
             <a:endParaRPr/>
           </a:p>
@@ -24172,54 +24014,24 @@
               </a:lnSpc>
             </a:pPr>
             <a:r>
-              <a:rPr lang="zh-CN" sz="1125">
-                <a:solidFill>
-                  <a:srgbClr val="1A2230"/>
-                </a:solidFill>
-                <a:latin typeface="Microsoft YaHei"/>
-                <a:ea typeface="Microsoft YaHei"/>
-              </a:rPr>
-              <a:t>已有成熟模型表现已经够好（</a:t>
-            </a:r>
-            <a:r>
-              <a:rPr lang="zh-CN" sz="1125">
-                <a:solidFill>
-                  <a:srgbClr val="1A2230"/>
-                </a:solidFill>
-                <a:latin typeface="Microsoft YaHei"/>
-                <a:ea typeface="Microsoft YaHei"/>
-              </a:rPr>
-              <a:t>秒级参考音即可生成可懂语音</a:t>
-            </a:r>
-            <a:r>
-              <a:rPr lang="zh-CN" sz="1125">
-                <a:solidFill>
-                  <a:srgbClr val="1A2230"/>
-                </a:solidFill>
-                <a:latin typeface="Microsoft YaHei"/>
-                <a:ea typeface="Microsoft YaHei"/>
-              </a:rPr>
-              <a:t>）→</a:t>
-            </a:r>
-            <a:r>
-              <a:rPr lang="en-US" sz="1125">
-                <a:solidFill>
-                  <a:srgbClr val="1A2230"/>
-                </a:solidFill>
-                <a:latin typeface="Microsoft YaHei"/>
-                <a:ea typeface="Microsoft YaHei"/>
-              </a:rPr>
-              <a:t xml:space="preserve"> </a:t>
-            </a:r>
-            <a:r>
-              <a:rPr lang="zh-CN" sz="1125">
-                <a:solidFill>
-                  <a:srgbClr val="1A2230"/>
-                </a:solidFill>
-                <a:latin typeface="Microsoft YaHei"/>
-                <a:ea typeface="Microsoft YaHei"/>
-              </a:rPr>
-              <a:t>那就不需要自己训模型</a:t>
+              <a:rPr b="0"/>
+              <a:t>起点是</a:t>
+            </a:r>
+            <a:r>
+              <a:rPr b="1">
+                <a:solidFill>
+                  <a:srgbClr val="0E3F8C"/>
+                </a:solidFill>
+              </a:rPr>
+              <a:t>人的困境</a:t>
+            </a:r>
+            <a:r>
+              <a:rPr b="0"/>
+              <a:t>：职业用嗓人群的嗓音损伤真实且高发，而声音一旦失去</a:t>
+            </a:r>
+            <a:r>
+              <a:rPr b="1"/>
+              <a:t>不可逆</a:t>
             </a:r>
             <a:endParaRPr/>
           </a:p>
@@ -24339,44 +24151,24 @@
               </a:lnSpc>
             </a:pPr>
             <a:r>
-              <a:rPr lang="zh-CN" sz="1125">
-                <a:solidFill>
-                  <a:srgbClr val="1A2230"/>
-                </a:solidFill>
-                <a:latin typeface="Microsoft YaHei"/>
-                <a:ea typeface="Microsoft YaHei"/>
-              </a:rPr>
-              <a:t>问题于是变成：</a:t>
-            </a:r>
-            <a:r>
-              <a:rPr lang="zh-CN" sz="1125">
-                <a:solidFill>
-                  <a:srgbClr val="1A2230"/>
-                </a:solidFill>
-                <a:latin typeface="Microsoft YaHei"/>
-                <a:ea typeface="Microsoft YaHei"/>
-              </a:rPr>
-              <a:t>「到底给它多少参考音才够？」</a:t>
-            </a:r>
-            <a:r>
-              <a:rPr lang="en-US" sz="1125">
-                <a:solidFill>
-                  <a:srgbClr val="1A2230"/>
-                </a:solidFill>
-                <a:latin typeface="Microsoft YaHei"/>
-                <a:ea typeface="Microsoft YaHei"/>
-              </a:rPr>
-              <a:t xml:space="preserve">← </a:t>
-            </a:r>
-            <a:r>
-              <a:rPr lang="zh-CN" sz="1125">
-                <a:solidFill>
-                  <a:srgbClr val="1A2230"/>
-                </a:solidFill>
-                <a:latin typeface="Microsoft YaHei"/>
-                <a:ea typeface="Microsoft YaHei"/>
-              </a:rPr>
-              <a:t>这才是缺系统答案的地方</a:t>
+              <a:rPr b="0"/>
+              <a:t>但现有方案的</a:t>
+            </a:r>
+            <a:r>
+              <a:rPr b="1">
+                <a:solidFill>
+                  <a:srgbClr val="D9534F"/>
+                </a:solidFill>
+              </a:rPr>
+              <a:t>门槛高到用不上</a:t>
+            </a:r>
+            <a:r>
+              <a:rPr b="0"/>
+              <a:t>：要录 50–200 句 / 只支持 Apple 设备 / 必须联网——</a:t>
+            </a:r>
+            <a:r>
+              <a:rPr b="1"/>
+              <a:t>普通人根本没机会保存</a:t>
             </a:r>
             <a:endParaRPr/>
           </a:p>
@@ -24491,34 +24283,28 @@
               </a:lnSpc>
             </a:pPr>
             <a:r>
-              <a:rPr lang="zh-CN" sz="1125">
-                <a:solidFill>
-                  <a:srgbClr val="1A2230"/>
-                </a:solidFill>
-                <a:latin typeface="Microsoft YaHei"/>
-                <a:ea typeface="Microsoft YaHei"/>
-              </a:rPr>
-              <a:t>要回答它，必须排除混淆因素</a:t>
-            </a:r>
-            <a:r>
-              <a:rPr lang="en-US" sz="1125">
-                <a:solidFill>
-                  <a:srgbClr val="1A2230"/>
-                </a:solidFill>
-                <a:latin typeface="Microsoft YaHei"/>
-                <a:ea typeface="Microsoft YaHei"/>
-              </a:rPr>
-              <a:t xml:space="preserve"> → </a:t>
-            </a:r>
-            <a:r>
-              <a:rPr lang="zh-CN" sz="1125">
-                <a:solidFill>
-                  <a:srgbClr val="1A2230"/>
-                </a:solidFill>
-                <a:latin typeface="Microsoft YaHei"/>
-                <a:ea typeface="Microsoft YaHei"/>
-              </a:rPr>
-              <a:t>控制变量：同一说话人、同一麦克风、同一房间，只改变参考音时长</a:t>
+              <a:rPr b="0"/>
+              <a:t>所以要把门槛</a:t>
+            </a:r>
+            <a:r>
+              <a:rPr b="1">
+                <a:solidFill>
+                  <a:srgbClr val="0E3F8C"/>
+                </a:solidFill>
+              </a:rPr>
+              <a:t>降到"负担得起"</a:t>
+            </a:r>
+            <a:r>
+              <a:rPr b="0"/>
+              <a:t>：离线、不挑设备、</a:t>
+            </a:r>
+            <a:r>
+              <a:rPr b="1"/>
+              <a:t>尽量少录</a:t>
+            </a:r>
+            <a:r>
+              <a:rPr b="0"/>
+              <a:t>——而"最少能录多少"没人系统回答过</a:t>
             </a:r>
             <a:endParaRPr/>
           </a:p>
@@ -24633,144 +24419,16 @@
               </a:lnSpc>
             </a:pPr>
             <a:r>
-              <a:rPr lang="zh-CN" sz="1125">
-                <a:solidFill>
-                  <a:srgbClr val="1A2230"/>
-                </a:solidFill>
-                <a:latin typeface="Microsoft YaHei"/>
-                <a:ea typeface="Microsoft YaHei"/>
-              </a:rPr>
-              <a:t>所以要做的是</a:t>
-            </a:r>
-            <a:r>
-              <a:rPr lang="en-US" sz="1125">
-                <a:solidFill>
-                  <a:srgbClr val="1A2230"/>
-                </a:solidFill>
-                <a:latin typeface="Microsoft YaHei"/>
-                <a:ea typeface="Microsoft YaHei"/>
-              </a:rPr>
-              <a:t>"</a:t>
-            </a:r>
-            <a:r>
-              <a:rPr lang="zh-CN" sz="1125">
-                <a:solidFill>
-                  <a:srgbClr val="1A2230"/>
-                </a:solidFill>
-                <a:latin typeface="Microsoft YaHei"/>
-                <a:ea typeface="Microsoft YaHei"/>
-              </a:rPr>
-              <a:t>测量平台</a:t>
-            </a:r>
-            <a:r>
-              <a:rPr lang="en-US" sz="1125">
-                <a:solidFill>
-                  <a:srgbClr val="1A2230"/>
-                </a:solidFill>
-                <a:latin typeface="Microsoft YaHei"/>
-                <a:ea typeface="Microsoft YaHei"/>
-              </a:rPr>
-              <a:t xml:space="preserve"> + </a:t>
-            </a:r>
-            <a:r>
-              <a:rPr lang="zh-CN" sz="1125">
-                <a:solidFill>
-                  <a:srgbClr val="1A2230"/>
-                </a:solidFill>
-                <a:latin typeface="Microsoft YaHei"/>
-                <a:ea typeface="Microsoft YaHei"/>
-              </a:rPr>
-              <a:t>严格协议</a:t>
-            </a:r>
-            <a:r>
-              <a:rPr lang="en-US" sz="1125">
-                <a:solidFill>
-                  <a:srgbClr val="1A2230"/>
-                </a:solidFill>
-                <a:latin typeface="Microsoft YaHei"/>
-                <a:ea typeface="Microsoft YaHei"/>
-              </a:rPr>
-              <a:t>"</a:t>
-            </a:r>
-            <a:r>
-              <a:rPr lang="zh-CN" sz="1125">
-                <a:solidFill>
-                  <a:srgbClr val="1A2230"/>
-                </a:solidFill>
-                <a:latin typeface="Microsoft YaHei"/>
-                <a:ea typeface="Microsoft YaHei"/>
-              </a:rPr>
-              <a:t>，而不是</a:t>
-            </a:r>
-            <a:r>
-              <a:rPr lang="en-US" sz="1125">
-                <a:solidFill>
-                  <a:srgbClr val="1A2230"/>
-                </a:solidFill>
-                <a:latin typeface="Microsoft YaHei"/>
-                <a:ea typeface="Microsoft YaHei"/>
-              </a:rPr>
-              <a:t>"</a:t>
-            </a:r>
-            <a:r>
-              <a:rPr lang="zh-CN" sz="1125">
-                <a:solidFill>
-                  <a:srgbClr val="1A2230"/>
-                </a:solidFill>
-                <a:latin typeface="Microsoft YaHei"/>
-                <a:ea typeface="Microsoft YaHei"/>
-              </a:rPr>
-              <a:t>更大的模型</a:t>
-            </a:r>
-            <a:r>
-              <a:rPr lang="en-US" sz="1125">
-                <a:solidFill>
-                  <a:srgbClr val="1A2230"/>
-                </a:solidFill>
-                <a:latin typeface="Microsoft YaHei"/>
-                <a:ea typeface="Microsoft YaHei"/>
-              </a:rPr>
-              <a:t>"</a:t>
-            </a:r>
-            <a:r>
-              <a:rPr lang="zh-CN" sz="1125">
-                <a:solidFill>
-                  <a:srgbClr val="1A2230"/>
-                </a:solidFill>
-                <a:latin typeface="Microsoft YaHei"/>
-                <a:ea typeface="Microsoft YaHei"/>
-              </a:rPr>
-              <a:t>或</a:t>
-            </a:r>
-            <a:r>
-              <a:rPr lang="en-US" sz="1125">
-                <a:solidFill>
-                  <a:srgbClr val="1A2230"/>
-                </a:solidFill>
-                <a:latin typeface="Microsoft YaHei"/>
-                <a:ea typeface="Microsoft YaHei"/>
-              </a:rPr>
-              <a:t>"</a:t>
-            </a:r>
-            <a:r>
-              <a:rPr lang="zh-CN" sz="1125">
-                <a:solidFill>
-                  <a:srgbClr val="1A2230"/>
-                </a:solidFill>
-                <a:latin typeface="Microsoft YaHei"/>
-                <a:ea typeface="Microsoft YaHei"/>
-              </a:rPr>
-              <a:t>更炫的界面</a:t>
-            </a:r>
-            <a:r>
-              <a:rPr lang="en-US" sz="1125">
-                <a:solidFill>
-                  <a:srgbClr val="1A2230"/>
-                </a:solidFill>
-                <a:latin typeface="Microsoft YaHei"/>
-                <a:ea typeface="Microsoft YaHei"/>
-              </a:rPr>
-              <a:t>"</a:t>
+              <a:rPr b="0"/>
+              <a:t>回答它必须排除混淆因素 → </a:t>
+            </a:r>
+            <a:r>
+              <a:rPr b="1">
+                <a:solidFill>
+                  <a:srgbClr val="0E3F8C"/>
+                </a:solidFill>
+              </a:rPr>
+              <a:t>控制变量：同一说话人、同一麦克风、同一房间，只改变参考音时长</a:t>
             </a:r>
             <a:endParaRPr/>
           </a:p>
@@ -24885,54 +24543,24 @@
               </a:lnSpc>
             </a:pPr>
             <a:r>
-              <a:rPr lang="zh-CN" sz="1125">
-                <a:solidFill>
-                  <a:srgbClr val="1A2230"/>
-                </a:solidFill>
-                <a:latin typeface="Microsoft YaHei"/>
-                <a:ea typeface="Microsoft YaHei"/>
-              </a:rPr>
-              <a:t>输出一个诚实的答案：</a:t>
-            </a:r>
-            <a:r>
-              <a:rPr lang="zh-CN" sz="1125">
-                <a:solidFill>
-                  <a:srgbClr val="1A2230"/>
-                </a:solidFill>
-                <a:latin typeface="Microsoft YaHei"/>
-                <a:ea typeface="Microsoft YaHei"/>
-              </a:rPr>
-              <a:t>录多久就够</a:t>
-            </a:r>
-            <a:r>
-              <a:rPr lang="zh-CN" sz="1125">
-                <a:solidFill>
-                  <a:srgbClr val="1A2230"/>
-                </a:solidFill>
-                <a:latin typeface="Microsoft YaHei"/>
-                <a:ea typeface="Microsoft YaHei"/>
-              </a:rPr>
-              <a:t>；并把它固化为</a:t>
-            </a:r>
-            <a:r>
-              <a:rPr lang="zh-CN" sz="1125">
-                <a:solidFill>
-                  <a:srgbClr val="1A2230"/>
-                </a:solidFill>
-                <a:latin typeface="Microsoft YaHei"/>
-                <a:ea typeface="Microsoft YaHei"/>
-              </a:rPr>
-              <a:t>自动质量门禁</a:t>
-            </a:r>
-            <a:r>
-              <a:rPr lang="zh-CN" sz="1125">
-                <a:solidFill>
-                  <a:srgbClr val="1A2230"/>
-                </a:solidFill>
-                <a:latin typeface="Microsoft YaHei"/>
-                <a:ea typeface="Microsoft YaHei"/>
-              </a:rPr>
-              <a:t>，反哺产品</a:t>
+              <a:rPr b="0"/>
+              <a:t>把答案</a:t>
+            </a:r>
+            <a:r>
+              <a:rPr b="1"/>
+              <a:t>固化进产品</a:t>
+            </a:r>
+            <a:r>
+              <a:rPr b="0"/>
+              <a:t>：录音时自动判断</a:t>
+            </a:r>
+            <a:r>
+              <a:rPr b="1"/>
+              <a:t>"够不够"</a:t>
+            </a:r>
+            <a:r>
+              <a:rPr b="0"/>
+              <a:t>——让用户花得起、敢用、知道什么时候可以停</a:t>
             </a:r>
             <a:endParaRPr/>
           </a:p>
@@ -25043,124 +24671,24 @@
               </a:lnSpc>
             </a:pPr>
             <a:r>
-              <a:rPr lang="zh-CN" sz="1125">
-                <a:solidFill>
-                  <a:srgbClr val="1A2230"/>
-                </a:solidFill>
-                <a:latin typeface="Microsoft YaHei"/>
-                <a:ea typeface="Microsoft YaHei"/>
-              </a:rPr>
-              <a:t>这个思路的价值在于</a:t>
-            </a:r>
-            <a:r>
-              <a:rPr lang="zh-CN" sz="1125">
-                <a:solidFill>
-                  <a:srgbClr val="1A2230"/>
-                </a:solidFill>
-                <a:latin typeface="Microsoft YaHei"/>
-                <a:ea typeface="Microsoft YaHei"/>
-              </a:rPr>
-              <a:t>：把</a:t>
-            </a:r>
-            <a:r>
-              <a:rPr lang="en-US" sz="1125">
-                <a:solidFill>
-                  <a:srgbClr val="1A2230"/>
-                </a:solidFill>
-                <a:latin typeface="Microsoft YaHei"/>
-                <a:ea typeface="Microsoft YaHei"/>
-              </a:rPr>
-              <a:t>"</a:t>
-            </a:r>
-            <a:r>
-              <a:rPr lang="zh-CN" sz="1125">
-                <a:solidFill>
-                  <a:srgbClr val="1A2230"/>
-                </a:solidFill>
-                <a:latin typeface="Microsoft YaHei"/>
-                <a:ea typeface="Microsoft YaHei"/>
-              </a:rPr>
-              <a:t>能不能用</a:t>
-            </a:r>
-            <a:r>
-              <a:rPr lang="en-US" sz="1125">
-                <a:solidFill>
-                  <a:srgbClr val="1A2230"/>
-                </a:solidFill>
-                <a:latin typeface="Microsoft YaHei"/>
-                <a:ea typeface="Microsoft YaHei"/>
-              </a:rPr>
-              <a:t>"</a:t>
-            </a:r>
-            <a:r>
-              <a:rPr lang="zh-CN" sz="1125">
-                <a:solidFill>
-                  <a:srgbClr val="1A2230"/>
-                </a:solidFill>
-                <a:latin typeface="Microsoft YaHei"/>
-                <a:ea typeface="Microsoft YaHei"/>
-              </a:rPr>
-              <a:t>（凭感觉）转化为</a:t>
-            </a:r>
-            <a:r>
-              <a:rPr lang="en-US" sz="1125">
-                <a:solidFill>
-                  <a:srgbClr val="1A2230"/>
-                </a:solidFill>
-                <a:latin typeface="Microsoft YaHei"/>
-                <a:ea typeface="Microsoft YaHei"/>
-              </a:rPr>
-              <a:t>"</a:t>
-            </a:r>
-            <a:r>
-              <a:rPr lang="zh-CN" sz="1125">
-                <a:solidFill>
-                  <a:srgbClr val="1A2230"/>
-                </a:solidFill>
-                <a:latin typeface="Microsoft YaHei"/>
-                <a:ea typeface="Microsoft YaHei"/>
-              </a:rPr>
-              <a:t>在什么条件下、以什么代价可用</a:t>
-            </a:r>
-            <a:r>
-              <a:rPr lang="en-US" sz="1125">
-                <a:solidFill>
-                  <a:srgbClr val="1A2230"/>
-                </a:solidFill>
-                <a:latin typeface="Microsoft YaHei"/>
-                <a:ea typeface="Microsoft YaHei"/>
-              </a:rPr>
-              <a:t>"</a:t>
-            </a:r>
-            <a:r>
-              <a:rPr lang="zh-CN" sz="1125">
-                <a:solidFill>
-                  <a:srgbClr val="1A2230"/>
-                </a:solidFill>
-                <a:latin typeface="Microsoft YaHei"/>
-                <a:ea typeface="Microsoft YaHei"/>
-              </a:rPr>
-              <a:t>（可以用数据回答）——后者的结论是</a:t>
-            </a:r>
-            <a:r>
-              <a:rPr lang="zh-CN" sz="1125">
-                <a:solidFill>
-                  <a:srgbClr val="1A2230"/>
-                </a:solidFill>
-                <a:latin typeface="Microsoft YaHei"/>
-                <a:ea typeface="Microsoft YaHei"/>
-              </a:rPr>
-              <a:t>可复现、可验证、可被他人使用</a:t>
-            </a:r>
-            <a:r>
-              <a:rPr lang="zh-CN" sz="1125">
-                <a:solidFill>
-                  <a:srgbClr val="1A2230"/>
-                </a:solidFill>
-                <a:latin typeface="Microsoft YaHei"/>
-                <a:ea typeface="Microsoft YaHei"/>
-              </a:rPr>
-              <a:t>的。</a:t>
+              <a:rPr b="1">
+                <a:solidFill>
+                  <a:srgbClr val="0E3F8C"/>
+                </a:solidFill>
+              </a:rPr>
+              <a:t>思路的落点</a:t>
+            </a:r>
+            <a:r>
+              <a:rPr b="0"/>
+              <a:t>：交付的不是"一个更像的克隆模型"，而是</a:t>
+            </a:r>
+            <a:r>
+              <a:rPr b="1"/>
+              <a:t>一个普通人负担得起、且知道自己什么时候录够了的保存流程</a:t>
+            </a:r>
+            <a:r>
+              <a:rPr b="0"/>
+              <a:t>。</a:t>
             </a:r>
             <a:endParaRPr/>
           </a:p>

--- a/docs/大创申报-2026-10/大创申报PPT.pptx
+++ b/docs/大创申报-2026-10/大创申报PPT.pptx
@@ -562,7 +562,7 @@
   <p:cSld>
     <p:spTree>
       <p:nvGrpSpPr>
-        <p:cNvPr id="1" name="" descr="&lt;Slide style={{ padding: 0, background: '#FFFFFF' }}&gt;&#10;  &lt;Box style={{ height: 150, background: '#0E3F8C', justifyContent: 'center', paddingLeft: 64 }}&gt;&#10;    &lt;Text style={{ fontSize: 28, color: '#FFFFFF', fontWeight: 'bold' }}&gt;韩山师范学院&lt;/Text&gt;&#10;    &lt;Text style={{ fontSize: 17, color: '#C9D8F0', marginTop: 6 }}&gt;2026 年校级大学生创新创业训练项目 · 创新训练类&lt;/Text&gt;&#10;  &lt;/Box&gt;&#10;  &lt;Box style={{ height: 420, justifyContent: 'center', paddingLeft: 64, paddingRight: 64 }}&gt;&#10;    &lt;Text style={{ fontSize: 17, color: '#1E4FA8', fontWeight: 'bold', letterSpacing: 2 }}&gt;LOCAL VOICE PRESERVATION · FEW-SHOT REPRODUCTION QUALITY BOUNDARY&lt;/Text&gt;&#10;    &lt;Text style={{ fontSize: 42, color: '#0E3F8C', fontWeight: 'bold', marginTop: 16, lineHeight: 1.3 }}&gt;面向职业用嗓人群的本地声音保存&lt;br /&gt;与少样本复现质量边界研究&lt;/Text&gt;&#10;    &lt;Box style={{ width: 90, height: 5, background: '#FFC107', marginTop: 22 }} /&gt;&#10;  &lt;/Box&gt;&#10;  &lt;Box style={{ height: 150, paddingLeft: 64, paddingRight: 64, justifyContent: 'center', borderTop: '1px solid #E5E7EB' }}&gt;&#10;    &lt;Box style={{ flexDirection: 'row', gap: 40, marginBottom: 12 }}&gt;&#10;      &lt;Text style={{ fontSize: 16, color: '#1A2230' }}&gt;项目负责人：&lt;Text style={{ fontWeight: 'bold', color: '#0E3F8C' }}&gt;牟旭&lt;/Text&gt;&lt;/Text&gt;&#10;      &lt;Text style={{ fontSize: 16, color: '#1A2230' }}&gt;团队成员：&lt;Text style={{ fontWeight: 'bold', color: '#0E3F8C' }}&gt;李河璋　罗文钎　陈宏杰&lt;/Text&gt;&lt;/Text&gt;&#10;    &lt;/Box&gt;&#10;    &lt;Box style={{ flexDirection: 'row', gap: 40 }}&gt;&#10;      &lt;Text style={{ fontSize: 16, color: '#1A2230' }}&gt;指导教师：&lt;Text style={{ color: '#8B97A8' }}&gt;＿＿＿＿＿＿&lt;/Text&gt;&lt;/Text&gt;&#10;      &lt;Text style={{ fontSize: 16, color: '#1A2230' }}&gt;所在学院：&lt;Text style={{ color: '#8B97A8' }}&gt;＿＿＿＿＿＿&lt;/Text&gt;&lt;/Text&gt;&#10;      &lt;Text style={{ fontSize: 16, color: '#1A2230' }}&gt;申报日期：2026.10&lt;/Text&gt;&#10;    &lt;/Box&gt;&#10;  &lt;/Box&gt;&#10;&lt;/Slide&gt;&#10;"/>
+        <p:cNvPr id="1" name="" descr="&lt;Slide style={{ padding: 0, background: '#FFFFFF' }}&gt;&#10;  &lt;Box style={{ height: 150, background: '#0E3F8C', justifyContent: 'center', paddingLeft: 64 }}&gt;&#10;    &lt;Text style={{ fontSize: 28, color: '#FFFFFF', fontWeight: 'bold' }}&gt;韩山师范学院&lt;/Text&gt;&#10;    &lt;Text style={{ fontSize: 17, color: '#C9D8F0', marginTop: 6 }}&gt;2026 年校级大学生创新创业训练项目 · 创新训练类&lt;/Text&gt;&#10;  &lt;/Box&gt;&#10;  &lt;Box style={{ height: 420, justifyContent: 'center', paddingLeft: 64, paddingRight: 64 }}&gt;&#10;    &lt;Text style={{ fontSize: 17, color: '#1E4FA8', fontWeight: 'bold', letterSpacing: 2 }}&gt;VOICE BURDEN REDUCTION · LOCAL REPRODUCTION QUALITY BOUNDARY&lt;/Text&gt;&#10;    &lt;Text style={{ fontSize: 42, color: '#0E3F8C', fontWeight: 'bold', marginTop: 16, lineHeight: 1.3 }}&gt;面向录课人群用嗓减负的本地声音复现&lt;br /&gt;与质量边界研究&lt;/Text&gt;&#10;    &lt;Box style={{ width: 90, height: 5, background: '#FFC107', marginTop: 22 }} /&gt;&#10;  &lt;/Box&gt;&#10;  &lt;Box style={{ height: 150, paddingLeft: 64, paddingRight: 64, justifyContent: 'center', borderTop: '1px solid #E5E7EB' }}&gt;&#10;    &lt;Box style={{ flexDirection: 'row', gap: 40, marginBottom: 12 }}&gt;&#10;      &lt;Text style={{ fontSize: 16, color: '#1A2230' }}&gt;项目负责人：&lt;Text style={{ fontWeight: 'bold', color: '#0E3F8C' }}&gt;牟旭&lt;/Text&gt;&lt;/Text&gt;&#10;      &lt;Text style={{ fontSize: 16, color: '#1A2230' }}&gt;团队成员：&lt;Text style={{ fontWeight: 'bold', color: '#0E3F8C' }}&gt;李河璋　罗文钎　陈宏杰&lt;/Text&gt;&lt;/Text&gt;&#10;    &lt;/Box&gt;&#10;    &lt;Box style={{ flexDirection: 'row', gap: 40 }}&gt;&#10;      &lt;Text style={{ fontSize: 16, color: '#1A2230' }}&gt;指导教师：&lt;Text style={{ color: '#8B97A8' }}&gt;＿＿＿＿＿＿&lt;/Text&gt;&lt;/Text&gt;&#10;      &lt;Text style={{ fontSize: 16, color: '#1A2230' }}&gt;所在学院：&lt;Text style={{ color: '#8B97A8' }}&gt;＿＿＿＿＿＿&lt;/Text&gt;&lt;/Text&gt;&#10;      &lt;Text style={{ fontSize: 16, color: '#1A2230' }}&gt;申报日期：2026.10&lt;/Text&gt;&#10;    &lt;/Box&gt;&#10;  &lt;/Box&gt;&#10;&lt;/Slide&gt;&#10;"/>
         <p:cNvGrpSpPr/>
         <p:nvPr/>
       </p:nvGrpSpPr>
@@ -751,7 +751,7 @@
                 <a:latin typeface="Microsoft YaHei"/>
                 <a:ea typeface="Microsoft YaHei"/>
               </a:rPr>
-              <a:t>LOCAL VOICE PRESERVATION · FEW-SHOT REPRODUCTION QUALITY BOUNDARY</a:t>
+              <a:t>VOICE BURDEN REDUCTION · LOCAL REPRODUCTION QUALITY BOUNDARY</a:t>
             </a:r>
             <a:endParaRPr/>
           </a:p>
@@ -786,7 +786,7 @@
                 <a:latin typeface="Microsoft YaHei"/>
                 <a:ea typeface="Microsoft YaHei"/>
               </a:rPr>
-              <a:t>面向职业用嗓人群的本地声音保存</a:t>
+              <a:t>面向录课人群用嗓减负的本地声音复现</a:t>
             </a:r>
             <a:endParaRPr/>
           </a:p>
@@ -804,7 +804,7 @@
                 <a:latin typeface="Microsoft YaHei"/>
                 <a:ea typeface="Microsoft YaHei"/>
               </a:rPr>
-              <a:t>与少样本复现质量边界研究</a:t>
+              <a:t>与质量边界研究</a:t>
             </a:r>
             <a:endParaRPr/>
           </a:p>
@@ -2798,7 +2798,7 @@
   <p:cSld>
     <p:spTree>
       <p:nvGrpSpPr>
-        <p:cNvPr id="34" name="" descr="&lt;Slide style={{ padding: 0, background: '#FFFFFF' }}&gt;&#10;  &lt;Box style={{ height: 80, background: '#0E3F8C', justifyContent: 'center', paddingLeft: 40, flexDirection: 'row', alignItems: 'center', gap: 16 }}&gt;&#10;    &lt;Text style={{ fontSize: 28, color: '#FFFFFF', fontWeight: 'bold' }}&gt;二、适用范围或推广前景&lt;/Text&gt;&#10;    &lt;Text style={{ fontSize: 15, color: '#FFC107' }}&gt;★ 官方明列子项&lt;/Text&gt;&#10;  &lt;/Box&gt;&#10;  &lt;Box style={{ height: 580, padding: 20, gap: 10 }}&gt;&#10;    &lt;Box style={{ flexDirection: 'row', gap: 12, flex: 1 }}&gt;&#10;      &lt;Box style={{ flex: 1, background: '#F0F5FC', borderRadius: 12, padding: 16, borderTop: '5px solid #1E4FA8' }}&gt;&#10;        &lt;Text style={{ fontSize: 19, color: '#1E4FA8', fontWeight: 'bold' }}&gt;适用范围&lt;/Text&gt;&#10;        &lt;Text style={{ fontSize: 14, color: '#1A2230', marginTop: 10, lineHeight: 1.8 }}&gt;&#10;          &lt;Text style={{ fontWeight: 'bold', color: '#0E3F8C' }}&gt;① 职业用嗓人群&lt;/Text&gt;{&quot;\n&quot;}教师、师范生、播音主持、客服等的{&quot;\n&quot;}嗓音档案保存 —— 本项目主要研究对象{&quot;\n\n&quot;}&#10;          &lt;Text style={{ fontWeight: 'bold', color: '#0E3F8C' }}&gt;② 嗓音障碍人群&lt;/Text&gt;{&quot;\n&quot;}因疾病或手术可能失去嗓音者的{&quot;\n&quot;}声音保存与辅助沟通{&quot;\n&quot;}&#10;          &lt;Text style={{ fontSize: 12, color: '#D9534F' }}&gt;（属辅助沟通范畴，不涉及任何医疗用途声称）&lt;/Text&gt;{&quot;\n\n&quot;}&#10;          &lt;Text style={{ fontWeight: 'bold', color: '#0E3F8C' }}&gt;③ 教育教学场景&lt;/Text&gt;{&quot;\n&quot;}微课配音、课程音频的本地、离线生产{&quot;\n\n&quot;}&#10;          &lt;Text style={{ fontWeight: 'bold', color: '#0E3F8C' }}&gt;④ 研究场景&lt;/Text&gt;{&quot;\n&quot;}为同类研究提供可复现的评测协议与流水线&#10;        &lt;/Text&gt;&#10;      &lt;/Box&gt;&#10;      &lt;Box style={{ flex: 1, gap: 12 }}&gt;&#10;        &lt;Box style={{ flex: 1, background: '#E8EFF8', borderRadius: 12, padding: 16, borderTop: '5px solid #3D7BD9' }}&gt;&#10;          &lt;Text style={{ fontSize: 19, color: '#1E4FA8', fontWeight: 'bold' }}&gt;推广前景&lt;/Text&gt;&#10;          &lt;Text style={{ fontSize: 14, color: '#1A2230', marginTop: 10, lineHeight: 1.85 }}&gt;&#10;            &lt;Text style={{ fontWeight: 'bold', color: '#0E3F8C' }}&gt;① 开源与插件化&lt;/Text&gt;{&quot;\n&quot;}代码已开源并采用插件化架构，第三方可做二次开发或场景适配{&quot;\n\n&quot;}&#10;            &lt;Text style={{ fontWeight: 'bold', color: '#0E3F8C' }}&gt;② 离线是刚性需求&lt;/Text&gt;{&quot;\n&quot;}在医院、护理机构、航班等无网或弱网环境，云端方案在结构上不可用{&quot;\n\n&quot;}&#10;            &lt;Text style={{ fontWeight: 'bold', color: '#0E3F8C' }}&gt;③ 与师范培养的结合&lt;/Text&gt;{&quot;\n&quot;}师范生嗓音健康建档：学生基数大、需求真实、与专业培养相关&#10;          &lt;/Text&gt;&#10;        &lt;/Box&gt;&#10;        &lt;Box style={{ background: '#FFFFFF', border: '2px solid #D9534F', borderRadius: 12, padding: 14 }}&gt;&#10;          &lt;Text style={{ fontSize: 16, color: '#D9534F', fontWeight: 'bold' }}&gt;边界（诚实声明）&lt;/Text&gt;&#10;          &lt;Text style={{ fontSize: 13, color: '#1A2230', marginTop: 6, lineHeight: 1.75 }}&gt;&#10;            ⚠️ 不承诺任何医疗效果；系统定位为&lt;Text style={{ fontWeight: 'bold' }}&gt;声音的保存与辅助沟通&lt;/Text&gt;，而非治疗{&quot;\n&quot;}&#10;            ⚠️ 当前方案基于消费级 GPU，&lt;Text style={{ fontWeight: 'bold' }}&gt;未验证大规模并发场景&lt;/Text&gt;{&quot;\n&quot;}&#10;            ⚠️ 无障碍方向为&lt;Text style={{ fontWeight: 'bold' }}&gt;在研模块&lt;/Text&gt;，尚未完成产品化验证&#10;          &lt;/Text&gt;&#10;        &lt;/Box&gt;&#10;      &lt;/Box&gt;&#10;    &lt;/Box&gt;&#10;    &lt;Box style={{ background: '#0E3F8C', borderRadius: 10, padding: 10 }}&gt;&#10;      &lt;Text style={{ fontSize: 13, color: '#FFFFFF', lineHeight: 1.55 }}&gt;&#10;        &lt;Text style={{ fontWeight: 'bold', color: '#FFC107' }}&gt;结论的通用价值：&lt;/Text&gt;&#10;        本研究产出的&quot;参考音时长—质量&quot;数据与&quot;客观指标能否替代听测&quot;的结论，对&lt;Text style={{ fontWeight: 'bold' }}&gt;任何使用少样本克隆的下游应用都有参考价值&lt;/Text&gt;。&#10;      &lt;/Text&gt;&#10;    &lt;/Box&gt;&#10;  &lt;/Box&gt;&#10;  &lt;Box style={{ height: 60, justifyContent: 'center', paddingLeft: 40 }}&gt;&#10;    &lt;Text style={{ fontSize: 15, color: '#8B97A8' }}&gt;韩山师范学院 · 大学生创新创业训练项目　　11 / 18&lt;/Text&gt;&#10;  &lt;/Box&gt;&#10;&lt;/Slide&gt;&#10;"/>
+        <p:cNvPr id="34" name="" descr="&lt;Slide style={{ padding: 0, background: '#FFFFFF' }}&gt;&#10;  &lt;Box style={{ height: 80, background: '#0E3F8C', justifyContent: 'center', paddingLeft: 40, flexDirection: 'row', alignItems: 'center', gap: 16 }}&gt;&#10;    &lt;Text style={{ fontSize: 28, color: '#FFFFFF', fontWeight: 'bold' }}&gt;二、适用范围或推广前景&lt;/Text&gt;&#10;    &lt;Text style={{ fontSize: 15, color: '#FFC107' }}&gt;★ 官方明列子项&lt;/Text&gt;&#10;  &lt;/Box&gt;&#10;  &lt;Box style={{ height: 580, padding: 20, gap: 10 }}&gt;&#10;    &lt;Box style={{ flexDirection: 'row', gap: 12, flex: 1 }}&gt;&#10;      &lt;Box style={{ flex: 1, background: '#F0F5FC', borderRadius: 12, padding: 16, borderTop: '5px solid #1E4FA8' }}&gt;&#10;        &lt;Text style={{ fontSize: 19, color: '#1E4FA8', fontWeight: 'bold' }}&gt;适用范围&lt;/Text&gt;&#10;        &lt;Text style={{ fontSize: 14, color: '#1A2230', marginTop: 10, lineHeight: 1.8 }}&gt;&#10;          &lt;Text style={{ fontWeight: 'bold', color: '#0E3F8C' }}&gt;① 职业用嗓人群&lt;/Text&gt;{&quot;\n&quot;}教师、师范生、播音主持、客服等的{&quot;\n&quot;}嗓音档案保存 —— 研究对象与被试来源{&quot;\n\n&quot;}&#10;          &lt;Text style={{ fontWeight: 'bold', color: '#0E3F8C' }}&gt;② 嗓音障碍人群&lt;/Text&gt;{&quot;\n&quot;}因疾病或手术可能失去嗓音者的{&quot;\n&quot;}声音保存与辅助沟通{&quot;\n&quot;}&#10;          &lt;Text style={{ fontSize: 12, color: '#D9534F' }}&gt;（属辅助沟通范畴，不涉及任何医疗用途声称）&lt;/Text&gt;{&quot;\n\n&quot;}&#10;          &lt;Text style={{ fontWeight: 'bold', color: '#0E3F8C' }}&gt;③ 教育教学场景&lt;/Text&gt;{&quot;\n&quot;}微课/网课录制的用嗓减负（逐页转旁白 / 保存音色续录）；课程音频的本地、离线生产{&quot;\n\n&quot;}&#10;          &lt;Text style={{ fontWeight: 'bold', color: '#0E3F8C' }}&gt;④ 研究场景&lt;/Text&gt;{&quot;\n&quot;}为同类研究提供可复现的评测协议与流水线&#10;        &lt;/Text&gt;&#10;      &lt;/Box&gt;&#10;      &lt;Box style={{ flex: 1, gap: 12 }}&gt;&#10;        &lt;Box style={{ flex: 1, background: '#E8EFF8', borderRadius: 12, padding: 16, borderTop: '5px solid #3D7BD9' }}&gt;&#10;          &lt;Text style={{ fontSize: 19, color: '#1E4FA8', fontWeight: 'bold' }}&gt;推广前景&lt;/Text&gt;&#10;          &lt;Text style={{ fontSize: 14, color: '#1A2230', marginTop: 10, lineHeight: 1.85 }}&gt;&#10;            &lt;Text style={{ fontWeight: 'bold', color: '#0E3F8C' }}&gt;① 开源与插件化&lt;/Text&gt;{&quot;\n&quot;}代码已开源并采用插件化架构，第三方可做二次开发或场景适配{&quot;\n\n&quot;}&#10;            &lt;Text style={{ fontWeight: 'bold', color: '#0E3F8C' }}&gt;② 离线是刚性需求&lt;/Text&gt;{&quot;\n&quot;}在医院、护理机构、航班等无网或弱网环境，云端方案在结构上不可用{&quot;\n\n&quot;}&#10;            &lt;Text style={{ fontWeight: 'bold', color: '#0E3F8C' }}&gt;③ 与师范培养的结合&lt;/Text&gt;{&quot;\n&quot;}师范生嗓音健康建档与录课减负实践：学生基数大、需求真实、与专业培养相关&#10;          &lt;/Text&gt;&#10;        &lt;/Box&gt;&#10;        &lt;Box style={{ background: '#FFFFFF', border: '2px solid #D9534F', borderRadius: 12, padding: 14 }}&gt;&#10;          &lt;Text style={{ fontSize: 16, color: '#D9534F', fontWeight: 'bold' }}&gt;边界（诚实声明）&lt;/Text&gt;&#10;          &lt;Text style={{ fontSize: 13, color: '#1A2230', marginTop: 6, lineHeight: 1.75 }}&gt;&#10;            ⚠️ 不承诺任何医疗效果；系统定位为&lt;Text style={{ fontWeight: 'bold' }}&gt;声音的保存与辅助沟通&lt;/Text&gt;，而非治疗{&quot;\n&quot;}&#10;            ⚠️ 当前方案基于消费级 GPU，&lt;Text style={{ fontWeight: 'bold' }}&gt;未验证大规模并发场景&lt;/Text&gt;{&quot;\n&quot;}&#10;            ⚠️ 无障碍方向为&lt;Text style={{ fontWeight: 'bold' }}&gt;在研模块&lt;/Text&gt;，尚未完成产品化验证&#10;          &lt;/Text&gt;&#10;        &lt;/Box&gt;&#10;      &lt;/Box&gt;&#10;    &lt;/Box&gt;&#10;    &lt;Box style={{ background: '#0E3F8C', borderRadius: 10, padding: 10 }}&gt;&#10;      &lt;Text style={{ fontSize: 13, color: '#FFFFFF', lineHeight: 1.55 }}&gt;&#10;        &lt;Text style={{ fontWeight: 'bold', color: '#FFC107' }}&gt;结论的通用价值：&lt;/Text&gt;&#10;        本研究产出的&quot;参考音时长—质量&quot;数据与&quot;客观指标能否替代听测&quot;的结论，对&lt;Text style={{ fontWeight: 'bold' }}&gt;任何使用少样本克隆的下游应用都有参考价值&lt;/Text&gt;。&#10;      &lt;/Text&gt;&#10;    &lt;/Box&gt;&#10;  &lt;/Box&gt;&#10;  &lt;Box style={{ height: 60, justifyContent: 'center', paddingLeft: 40 }}&gt;&#10;    &lt;Text style={{ fontSize: 15, color: '#8B97A8' }}&gt;韩山师范学院 · 大学生创新创业训练项目　　11 / 18&lt;/Text&gt;&#10;  &lt;/Box&gt;&#10;&lt;/Slide&gt;&#10;"/>
         <p:cNvGrpSpPr/>
         <p:nvPr/>
       </p:nvGrpSpPr>
@@ -3151,7 +3151,7 @@
                 <a:latin typeface="Microsoft YaHei"/>
                 <a:ea typeface="Microsoft YaHei"/>
               </a:rPr>
-              <a:t>本项目主要研究对象</a:t>
+              <a:t>研究对象与被试来源</a:t>
             </a:r>
             <a:r>
               <a:rPr sz="1050">
@@ -3267,7 +3267,7 @@
                 <a:latin typeface="Microsoft YaHei"/>
                 <a:ea typeface="Microsoft YaHei"/>
               </a:rPr>
-              <a:t>教育教学场景</a:t>
+              <a:t>教育教学场景（主打）</a:t>
             </a:r>
             <a:endParaRPr/>
           </a:p>
@@ -3285,7 +3285,7 @@
                 <a:latin typeface="Microsoft YaHei"/>
                 <a:ea typeface="Microsoft YaHei"/>
               </a:rPr>
-              <a:t>微课配音、课程音频的本地、离线生产</a:t>
+              <a:t>微课/网课录制的用嗓减负（逐页转旁白 / 保存音色续录）；课程音频的本地、离线生产</a:t>
             </a:r>
             <a:r>
               <a:rPr sz="1050">
@@ -3613,7 +3613,7 @@
                 <a:latin typeface="Microsoft YaHei"/>
                 <a:ea typeface="Microsoft YaHei"/>
               </a:rPr>
-              <a:t>师范生嗓音健康建档：学生基数大、需求真实、与专业培养相关</a:t>
+              <a:t>师范生嗓音健康建档与录课减负实践：学生基数大、需求真实、与专业培养相关</a:t>
             </a:r>
             <a:endParaRPr/>
           </a:p>
@@ -6477,40 +6477,14 @@
       </p:sp>
       <p:sp>
         <p:nvSpPr>
-          <p:cNvPr id="78" name=""/>
-          <p:cNvSpPr/>
-          <p:nvPr/>
-        </p:nvSpPr>
-        <p:spPr>
-          <a:xfrm rot="0" flipH="0" flipV="0">
-            <a:off x="247650" y="1009650"/>
-            <a:ext cx="2828925" cy="952500"/>
-          </a:xfrm>
-          <a:prstGeom prst="roundRect">
-            <a:avLst>
-              <a:gd name="adj" fmla="val 10000"/>
-            </a:avLst>
-          </a:prstGeom>
-          <a:solidFill>
-            <a:srgbClr val="0E3F8C"/>
-          </a:solidFill>
-          <a:ln/>
-        </p:spPr>
-        <p:txBody>
-          <a:bodyPr/>
-          <a:p/>
-        </p:txBody>
-      </p:sp>
-      <p:sp>
-        <p:nvSpPr>
-          <p:cNvPr id="79" name="" descr="{&quot;isTemplate&quot;:true,&quot;type&quot;:&quot;text&quot;}"/>
+          <p:cNvPr id="95" name="" descr="{&quot;isTemplate&quot;:true,&quot;type&quot;:&quot;text&quot;}"/>
           <p:cNvSpPr txBox="1"/>
           <p:nvPr/>
         </p:nvSpPr>
         <p:spPr>
           <a:xfrm rot="0" flipH="0" flipV="0">
-            <a:off x="381000" y="1219200"/>
-            <a:ext cx="2562225" cy="342900"/>
+            <a:off x="381000" y="6510528"/>
+            <a:ext cx="11811000" cy="171450"/>
           </a:xfrm>
           <a:prstGeom prst="rect"/>
         </p:spPr>
@@ -6523,1703 +6497,956 @@
               </a:lnSpc>
             </a:pPr>
             <a:r>
-              <a:rPr lang="en-US" sz="2250" b="1">
-                <a:solidFill>
-                  <a:srgbClr val="FFC107"/>
-                </a:solidFill>
-                <a:latin typeface="Microsoft YaHei"/>
-                <a:ea typeface="Microsoft YaHei"/>
-              </a:rPr>
-              <a:t>37,872</a:t>
+              <a:rPr lang="zh-CN" sz="1000">
+                <a:solidFill>
+                  <a:srgbClr val="8B97A8"/>
+                </a:solidFill>
+                <a:latin typeface="Microsoft YaHei"/>
+                <a:ea typeface="Microsoft YaHei"/>
+              </a:rPr>
+              <a:t>韩山师范学院</a:t>
+            </a:r>
+            <a:r>
+              <a:rPr lang="en-US" sz="1000">
+                <a:solidFill>
+                  <a:srgbClr val="8B97A8"/>
+                </a:solidFill>
+                <a:latin typeface="Microsoft YaHei"/>
+                <a:ea typeface="Microsoft YaHei"/>
+              </a:rPr>
+              <a:t xml:space="preserve"> · </a:t>
+            </a:r>
+            <a:r>
+              <a:rPr lang="zh-CN" sz="1000">
+                <a:solidFill>
+                  <a:srgbClr val="8B97A8"/>
+                </a:solidFill>
+                <a:latin typeface="Microsoft YaHei"/>
+                <a:ea typeface="Microsoft YaHei"/>
+              </a:rPr>
+              <a:t>大学生创新创业训练项目　　</a:t>
+            </a:r>
+            <a:r>
+              <a:rPr lang="en-US" sz="1000">
+                <a:solidFill>
+                  <a:srgbClr val="8B97A8"/>
+                </a:solidFill>
+                <a:latin typeface="Microsoft YaHei"/>
+                <a:ea typeface="Microsoft YaHei"/>
+              </a:rPr>
+              <a:t>13 / 18</a:t>
+            </a:r>
+            <a:r>
+              <a:rPr lang="zh-CN" sz="1000">
+                <a:solidFill>
+                  <a:srgbClr val="8B97A8"/>
+                </a:solidFill>
+                <a:latin typeface="Microsoft YaHei"/>
+                <a:ea typeface="Microsoft YaHei"/>
+              </a:rPr>
+              <a:t>　│　注：均标注为本机实测数据</a:t>
             </a:r>
             <a:endParaRPr/>
           </a:p>
         </p:txBody>
       </p:sp>
-      <p:sp>
-        <p:nvSpPr>
-          <p:cNvPr id="80" name="" descr="{&quot;isTemplate&quot;:true,&quot;type&quot;:&quot;text&quot;}"/>
-          <p:cNvSpPr txBox="1"/>
-          <p:nvPr/>
-        </p:nvSpPr>
-        <p:spPr>
-          <a:xfrm rot="0" flipH="0" flipV="0">
-            <a:off x="381000" y="1600200"/>
-            <a:ext cx="2562225" cy="152400"/>
-          </a:xfrm>
-          <a:prstGeom prst="rect"/>
-        </p:spPr>
-        <p:txBody>
-          <a:bodyPr wrap="none" lIns="0" tIns="0" rIns="0" bIns="0"/>
+      <p:pic xmlns:r="http://schemas.openxmlformats.org/officeDocument/2006/relationships">
+        <p:nvPicPr>
+          <p:cNvPr id="96" name="Picture 95" descr="1-声音保存.png"/>
+          <p:cNvPicPr>
+            <a:picLocks noChangeAspect="1"/>
+          </p:cNvPicPr>
+          <p:nvPr/>
+        </p:nvPicPr>
+        <p:blipFill>
+          <a:blip r:embed="rId2"/>
+          <a:stretch>
+            <a:fillRect/>
+          </a:stretch>
+        </p:blipFill>
+        <p:spPr>
+          <a:xfrm>
+            <a:off x="384048" y="932688"/>
+            <a:ext cx="5592927" cy="1531619"/>
+          </a:xfrm>
+          <a:prstGeom prst="rect">
+            <a:avLst/>
+          </a:prstGeom>
+        </p:spPr>
+      </p:pic>
+      <p:sp>
+        <p:nvSpPr>
+          <p:cNvPr id="97" name="Rectangle 96"/>
+          <p:cNvSpPr/>
+          <p:nvPr/>
+        </p:nvSpPr>
+        <p:spPr>
+          <a:xfrm>
+            <a:off x="384048" y="932688"/>
+            <a:ext cx="5592927" cy="1531619"/>
+          </a:xfrm>
+          <a:prstGeom prst="rect">
+            <a:avLst/>
+          </a:prstGeom>
+          <a:noFill/>
+          <a:ln w="9525">
+            <a:solidFill>
+              <a:srgbClr val="D6DCE5"/>
+            </a:solidFill>
+          </a:ln>
+          <a:effectLst/>
+        </p:spPr>
+        <p:style>
+          <a:lnRef idx="1">
+            <a:schemeClr val="accent1"/>
+          </a:lnRef>
+          <a:fillRef idx="3">
+            <a:schemeClr val="accent1"/>
+          </a:fillRef>
+          <a:effectRef idx="2">
+            <a:schemeClr val="accent1"/>
+          </a:effectRef>
+          <a:fontRef idx="minor">
+            <a:schemeClr val="lt1"/>
+          </a:fontRef>
+        </p:style>
+        <p:txBody>
+          <a:bodyPr rtlCol="0" anchor="ctr"/>
+          <a:lstStyle/>
           <a:p>
-            <a:pPr>
-              <a:lnSpc>
-                <a:spcPct val="100000"/>
-              </a:lnSpc>
-            </a:pPr>
-            <a:r>
-              <a:rPr lang="zh-CN" sz="975">
-                <a:solidFill>
-                  <a:srgbClr val="C9D8F0"/>
-                </a:solidFill>
-                <a:latin typeface="Microsoft YaHei"/>
-                <a:ea typeface="Microsoft YaHei"/>
-              </a:rPr>
-              <a:t>后端</a:t>
-            </a:r>
-            <a:r>
-              <a:rPr lang="en-US" sz="975">
-                <a:solidFill>
-                  <a:srgbClr val="C9D8F0"/>
-                </a:solidFill>
-                <a:latin typeface="Microsoft YaHei"/>
-                <a:ea typeface="Microsoft YaHei"/>
-              </a:rPr>
-              <a:t xml:space="preserve"> Python </a:t>
-            </a:r>
-            <a:r>
-              <a:rPr lang="zh-CN" sz="975">
-                <a:solidFill>
-                  <a:srgbClr val="C9D8F0"/>
-                </a:solidFill>
-                <a:latin typeface="Microsoft YaHei"/>
-                <a:ea typeface="Microsoft YaHei"/>
-              </a:rPr>
-              <a:t>行数</a:t>
-            </a:r>
-            <a:endParaRPr/>
+            <a:pPr algn="ctr"/>
           </a:p>
         </p:txBody>
       </p:sp>
       <p:sp>
         <p:nvSpPr>
-          <p:cNvPr id="81" name=""/>
+          <p:cNvPr id="98" name="Rounded Rectangle 97"/>
           <p:cNvSpPr/>
           <p:nvPr/>
         </p:nvSpPr>
         <p:spPr>
-          <a:xfrm rot="0" flipH="0" flipV="0">
-            <a:off x="3209925" y="1009650"/>
-            <a:ext cx="2819400" cy="952500"/>
+          <a:xfrm>
+            <a:off x="384048" y="2464308"/>
+            <a:ext cx="5592927" cy="420624"/>
           </a:xfrm>
           <a:prstGeom prst="roundRect">
             <a:avLst>
-              <a:gd name="adj" fmla="val 10000"/>
+              <a:gd name="adj" fmla="val 6000"/>
             </a:avLst>
           </a:prstGeom>
           <a:solidFill>
-            <a:srgbClr val="1E4FA8"/>
+            <a:srgbClr val="F0F5FC"/>
           </a:solidFill>
-          <a:ln/>
-        </p:spPr>
-        <p:txBody>
-          <a:bodyPr/>
-          <a:p/>
-        </p:txBody>
-      </p:sp>
-      <p:sp>
-        <p:nvSpPr>
-          <p:cNvPr id="82" name="" descr="{&quot;isTemplate&quot;:true,&quot;type&quot;:&quot;text&quot;}"/>
+          <a:ln>
+            <a:noFill/>
+          </a:ln>
+          <a:effectLst/>
+        </p:spPr>
+        <p:style>
+          <a:lnRef idx="1">
+            <a:schemeClr val="accent1"/>
+          </a:lnRef>
+          <a:fillRef idx="3">
+            <a:schemeClr val="accent1"/>
+          </a:fillRef>
+          <a:effectRef idx="2">
+            <a:schemeClr val="accent1"/>
+          </a:effectRef>
+          <a:fontRef idx="minor">
+            <a:schemeClr val="lt1"/>
+          </a:fontRef>
+        </p:style>
+        <p:txBody>
+          <a:bodyPr rtlCol="0" anchor="ctr"/>
+          <a:lstStyle/>
+          <a:p>
+            <a:pPr algn="ctr"/>
+          </a:p>
+        </p:txBody>
+      </p:sp>
+      <p:sp>
+        <p:nvSpPr>
+          <p:cNvPr id="99" name="TextBox 98"/>
           <p:cNvSpPr txBox="1"/>
           <p:nvPr/>
         </p:nvSpPr>
         <p:spPr>
-          <a:xfrm rot="0" flipH="0" flipV="0">
-            <a:off x="3343275" y="1219200"/>
-            <a:ext cx="2552700" cy="342900"/>
-          </a:xfrm>
-          <a:prstGeom prst="rect"/>
-        </p:spPr>
-        <p:txBody>
-          <a:bodyPr wrap="none" lIns="0" tIns="0" rIns="0" bIns="0"/>
+          <a:xfrm>
+            <a:off x="493776" y="2510027"/>
+            <a:ext cx="5373471" cy="201168"/>
+          </a:xfrm>
+          <a:prstGeom prst="rect">
+            <a:avLst/>
+          </a:prstGeom>
+          <a:noFill/>
+        </p:spPr>
+        <p:txBody>
+          <a:bodyPr wrap="square" lIns="0" rIns="0" tIns="0" bIns="0">
+            <a:spAutoFit/>
+          </a:bodyPr>
+          <a:lstStyle/>
           <a:p>
-            <a:pPr>
-              <a:lnSpc>
-                <a:spcPct val="100000"/>
-              </a:lnSpc>
-            </a:pPr>
-            <a:r>
-              <a:rPr lang="en-US" sz="2250" b="1">
-                <a:solidFill>
-                  <a:srgbClr val="FFFFFF"/>
-                </a:solidFill>
-                <a:latin typeface="Microsoft YaHei"/>
-                <a:ea typeface="Microsoft YaHei"/>
-              </a:rPr>
-              <a:t>40,169</a:t>
-            </a:r>
-            <a:endParaRPr/>
+            <a:pPr algn="l"/>
+            <a:r>
+              <a:rPr sz="1150" b="1" i="0">
+                <a:solidFill>
+                  <a:srgbClr val="1E4FA8"/>
+                </a:solidFill>
+                <a:latin typeface="微软雅黑"/>
+              </a:rPr>
+              <a:t>1　声音档案 · 保存与门禁</a:t>
+            </a:r>
           </a:p>
         </p:txBody>
       </p:sp>
       <p:sp>
         <p:nvSpPr>
-          <p:cNvPr id="83" name="" descr="{&quot;isTemplate&quot;:true,&quot;type&quot;:&quot;text&quot;}"/>
+          <p:cNvPr id="100" name="TextBox 99"/>
           <p:cNvSpPr txBox="1"/>
           <p:nvPr/>
         </p:nvSpPr>
         <p:spPr>
-          <a:xfrm rot="0" flipH="0" flipV="0">
-            <a:off x="3343275" y="1600200"/>
-            <a:ext cx="2552700" cy="152400"/>
-          </a:xfrm>
-          <a:prstGeom prst="rect"/>
-        </p:spPr>
-        <p:txBody>
-          <a:bodyPr wrap="none" lIns="0" tIns="0" rIns="0" bIns="0"/>
+          <a:xfrm>
+            <a:off x="493776" y="2702052"/>
+            <a:ext cx="5373471" cy="164592"/>
+          </a:xfrm>
+          <a:prstGeom prst="rect">
+            <a:avLst/>
+          </a:prstGeom>
+          <a:noFill/>
+        </p:spPr>
+        <p:txBody>
+          <a:bodyPr wrap="square" lIns="0" rIns="0" tIns="0" bIns="0">
+            <a:spAutoFit/>
+          </a:bodyPr>
+          <a:lstStyle/>
           <a:p>
-            <a:pPr>
-              <a:lnSpc>
-                <a:spcPct val="100000"/>
-              </a:lnSpc>
-            </a:pPr>
-            <a:r>
-              <a:rPr lang="zh-CN" sz="975">
-                <a:solidFill>
-                  <a:srgbClr val="C9D8F0"/>
-                </a:solidFill>
-                <a:latin typeface="Microsoft YaHei"/>
-                <a:ea typeface="Microsoft YaHei"/>
-              </a:rPr>
-              <a:t>前端</a:t>
-            </a:r>
-            <a:r>
-              <a:rPr lang="en-US" sz="975">
-                <a:solidFill>
-                  <a:srgbClr val="C9D8F0"/>
-                </a:solidFill>
-                <a:latin typeface="Microsoft YaHei"/>
-                <a:ea typeface="Microsoft YaHei"/>
-              </a:rPr>
-              <a:t xml:space="preserve"> TS / TSX </a:t>
-            </a:r>
-            <a:r>
-              <a:rPr lang="zh-CN" sz="975">
-                <a:solidFill>
-                  <a:srgbClr val="C9D8F0"/>
-                </a:solidFill>
-                <a:latin typeface="Microsoft YaHei"/>
-                <a:ea typeface="Microsoft YaHei"/>
-              </a:rPr>
-              <a:t>行数</a:t>
-            </a:r>
-            <a:endParaRPr/>
+            <a:pPr algn="l"/>
+            <a:r>
+              <a:rPr sz="950" b="0" i="0">
+                <a:solidFill>
+                  <a:srgbClr val="1A2230"/>
+                </a:solidFill>
+                <a:latin typeface="微软雅黑"/>
+              </a:rPr>
+              <a:t>录音 → 建档 → 复现；本机存储，不联网</a:t>
+            </a:r>
           </a:p>
         </p:txBody>
       </p:sp>
-      <p:sp>
-        <p:nvSpPr>
-          <p:cNvPr id="84" name=""/>
+      <p:pic xmlns:r="http://schemas.openxmlformats.org/officeDocument/2006/relationships">
+        <p:nvPicPr>
+          <p:cNvPr id="101" name="Picture 100" descr="2-音色体检.png"/>
+          <p:cNvPicPr>
+            <a:picLocks noChangeAspect="1"/>
+          </p:cNvPicPr>
+          <p:nvPr/>
+        </p:nvPicPr>
+        <p:blipFill>
+          <a:blip r:embed="rId3"/>
+          <a:stretch>
+            <a:fillRect/>
+          </a:stretch>
+        </p:blipFill>
+        <p:spPr>
+          <a:xfrm>
+            <a:off x="6214719" y="932688"/>
+            <a:ext cx="5592927" cy="1531619"/>
+          </a:xfrm>
+          <a:prstGeom prst="rect">
+            <a:avLst/>
+          </a:prstGeom>
+        </p:spPr>
+      </p:pic>
+      <p:sp>
+        <p:nvSpPr>
+          <p:cNvPr id="102" name="Rectangle 101"/>
           <p:cNvSpPr/>
           <p:nvPr/>
         </p:nvSpPr>
         <p:spPr>
-          <a:xfrm rot="0" flipH="0" flipV="0">
-            <a:off x="6162675" y="1009650"/>
-            <a:ext cx="2828925" cy="952500"/>
+          <a:xfrm>
+            <a:off x="6214719" y="932688"/>
+            <a:ext cx="5592927" cy="1531619"/>
+          </a:xfrm>
+          <a:prstGeom prst="rect">
+            <a:avLst/>
+          </a:prstGeom>
+          <a:noFill/>
+          <a:ln w="9525">
+            <a:solidFill>
+              <a:srgbClr val="D6DCE5"/>
+            </a:solidFill>
+          </a:ln>
+          <a:effectLst/>
+        </p:spPr>
+        <p:style>
+          <a:lnRef idx="1">
+            <a:schemeClr val="accent1"/>
+          </a:lnRef>
+          <a:fillRef idx="3">
+            <a:schemeClr val="accent1"/>
+          </a:fillRef>
+          <a:effectRef idx="2">
+            <a:schemeClr val="accent1"/>
+          </a:effectRef>
+          <a:fontRef idx="minor">
+            <a:schemeClr val="lt1"/>
+          </a:fontRef>
+        </p:style>
+        <p:txBody>
+          <a:bodyPr rtlCol="0" anchor="ctr"/>
+          <a:lstStyle/>
+          <a:p>
+            <a:pPr algn="ctr"/>
+          </a:p>
+        </p:txBody>
+      </p:sp>
+      <p:sp>
+        <p:nvSpPr>
+          <p:cNvPr id="103" name="Rounded Rectangle 102"/>
+          <p:cNvSpPr/>
+          <p:nvPr/>
+        </p:nvSpPr>
+        <p:spPr>
+          <a:xfrm>
+            <a:off x="6214719" y="2464308"/>
+            <a:ext cx="5592927" cy="420624"/>
           </a:xfrm>
           <a:prstGeom prst="roundRect">
             <a:avLst>
-              <a:gd name="adj" fmla="val 10000"/>
+              <a:gd name="adj" fmla="val 6000"/>
             </a:avLst>
           </a:prstGeom>
           <a:solidFill>
-            <a:srgbClr val="3D7BD9"/>
+            <a:srgbClr val="F0F5FC"/>
           </a:solidFill>
-          <a:ln/>
-        </p:spPr>
-        <p:txBody>
-          <a:bodyPr/>
-          <a:p/>
-        </p:txBody>
-      </p:sp>
-      <p:sp>
-        <p:nvSpPr>
-          <p:cNvPr id="85" name="" descr="{&quot;isTemplate&quot;:true,&quot;type&quot;:&quot;text&quot;}"/>
+          <a:ln>
+            <a:noFill/>
+          </a:ln>
+          <a:effectLst/>
+        </p:spPr>
+        <p:style>
+          <a:lnRef idx="1">
+            <a:schemeClr val="accent1"/>
+          </a:lnRef>
+          <a:fillRef idx="3">
+            <a:schemeClr val="accent1"/>
+          </a:fillRef>
+          <a:effectRef idx="2">
+            <a:schemeClr val="accent1"/>
+          </a:effectRef>
+          <a:fontRef idx="minor">
+            <a:schemeClr val="lt1"/>
+          </a:fontRef>
+        </p:style>
+        <p:txBody>
+          <a:bodyPr rtlCol="0" anchor="ctr"/>
+          <a:lstStyle/>
+          <a:p>
+            <a:pPr algn="ctr"/>
+          </a:p>
+        </p:txBody>
+      </p:sp>
+      <p:sp>
+        <p:nvSpPr>
+          <p:cNvPr id="104" name="TextBox 103"/>
           <p:cNvSpPr txBox="1"/>
           <p:nvPr/>
         </p:nvSpPr>
         <p:spPr>
-          <a:xfrm rot="0" flipH="0" flipV="0">
-            <a:off x="6296025" y="1219200"/>
-            <a:ext cx="2562225" cy="342900"/>
-          </a:xfrm>
-          <a:prstGeom prst="rect"/>
-        </p:spPr>
-        <p:txBody>
-          <a:bodyPr wrap="none" lIns="0" tIns="0" rIns="0" bIns="0"/>
+          <a:xfrm>
+            <a:off x="6324447" y="2510027"/>
+            <a:ext cx="5373471" cy="201168"/>
+          </a:xfrm>
+          <a:prstGeom prst="rect">
+            <a:avLst/>
+          </a:prstGeom>
+          <a:noFill/>
+        </p:spPr>
+        <p:txBody>
+          <a:bodyPr wrap="square" lIns="0" rIns="0" tIns="0" bIns="0">
+            <a:spAutoFit/>
+          </a:bodyPr>
+          <a:lstStyle/>
           <a:p>
-            <a:pPr>
-              <a:lnSpc>
-                <a:spcPct val="100000"/>
-              </a:lnSpc>
-            </a:pPr>
-            <a:r>
-              <a:rPr lang="en-US" sz="2250" b="1">
-                <a:solidFill>
-                  <a:srgbClr val="FFFFFF"/>
-                </a:solidFill>
-                <a:latin typeface="Microsoft YaHei"/>
-                <a:ea typeface="Microsoft YaHei"/>
-              </a:rPr>
-              <a:t>2,847</a:t>
-            </a:r>
-            <a:endParaRPr/>
+            <a:pPr algn="l"/>
+            <a:r>
+              <a:rPr sz="1150" b="1" i="0">
+                <a:solidFill>
+                  <a:srgbClr val="1E4FA8"/>
+                </a:solidFill>
+                <a:latin typeface="微软雅黑"/>
+              </a:rPr>
+              <a:t>2　录音质量体检（三灯）</a:t>
+            </a:r>
           </a:p>
         </p:txBody>
       </p:sp>
       <p:sp>
         <p:nvSpPr>
-          <p:cNvPr id="86" name="" descr="{&quot;isTemplate&quot;:true,&quot;type&quot;:&quot;text&quot;}"/>
+          <p:cNvPr id="105" name="TextBox 104"/>
           <p:cNvSpPr txBox="1"/>
           <p:nvPr/>
         </p:nvSpPr>
         <p:spPr>
-          <a:xfrm rot="0" flipH="0" flipV="0">
-            <a:off x="6296025" y="1600200"/>
-            <a:ext cx="2562225" cy="152400"/>
-          </a:xfrm>
-          <a:prstGeom prst="rect"/>
-        </p:spPr>
-        <p:txBody>
-          <a:bodyPr wrap="none" lIns="0" tIns="0" rIns="0" bIns="0"/>
+          <a:xfrm>
+            <a:off x="6324447" y="2702052"/>
+            <a:ext cx="5373471" cy="164592"/>
+          </a:xfrm>
+          <a:prstGeom prst="rect">
+            <a:avLst/>
+          </a:prstGeom>
+          <a:noFill/>
+        </p:spPr>
+        <p:txBody>
+          <a:bodyPr wrap="square" lIns="0" rIns="0" tIns="0" bIns="0">
+            <a:spAutoFit/>
+          </a:bodyPr>
+          <a:lstStyle/>
           <a:p>
-            <a:pPr>
-              <a:lnSpc>
-                <a:spcPct val="100000"/>
-              </a:lnSpc>
-            </a:pPr>
-            <a:r>
-              <a:rPr lang="zh-CN" sz="975">
-                <a:solidFill>
-                  <a:srgbClr val="D8E6F8"/>
-                </a:solidFill>
-                <a:latin typeface="Microsoft YaHei"/>
-                <a:ea typeface="Microsoft YaHei"/>
-              </a:rPr>
-              <a:t>自动化测试用例（</a:t>
-            </a:r>
-            <a:r>
-              <a:rPr lang="en-US" sz="975">
-                <a:solidFill>
-                  <a:srgbClr val="D8E6F8"/>
-                </a:solidFill>
-                <a:latin typeface="Microsoft YaHei"/>
-                <a:ea typeface="Microsoft YaHei"/>
-              </a:rPr>
-              <a:t xml:space="preserve">149 </a:t>
-            </a:r>
-            <a:r>
-              <a:rPr lang="zh-CN" sz="975">
-                <a:solidFill>
-                  <a:srgbClr val="D8E6F8"/>
-                </a:solidFill>
-                <a:latin typeface="Microsoft YaHei"/>
-                <a:ea typeface="Microsoft YaHei"/>
-              </a:rPr>
-              <a:t>文件）</a:t>
-            </a:r>
-            <a:endParaRPr/>
+            <a:pPr algn="l"/>
+            <a:r>
+              <a:rPr sz="950" b="0" i="0">
+                <a:solidFill>
+                  <a:srgbClr val="1A2230"/>
+                </a:solidFill>
+                <a:latin typeface="微软雅黑"/>
+              </a:rPr>
+              <a:t>录完自动判断「够不够」，不必多录</a:t>
+            </a:r>
           </a:p>
         </p:txBody>
       </p:sp>
-      <p:sp>
-        <p:nvSpPr>
-          <p:cNvPr id="87" name=""/>
+      <p:pic xmlns:r="http://schemas.openxmlformats.org/officeDocument/2006/relationships">
+        <p:nvPicPr>
+          <p:cNvPr id="106" name="Picture 105" descr="3-盲听评测.png"/>
+          <p:cNvPicPr>
+            <a:picLocks noChangeAspect="1"/>
+          </p:cNvPicPr>
+          <p:nvPr/>
+        </p:nvPicPr>
+        <p:blipFill>
+          <a:blip r:embed="rId4"/>
+          <a:stretch>
+            <a:fillRect/>
+          </a:stretch>
+        </p:blipFill>
+        <p:spPr>
+          <a:xfrm>
+            <a:off x="384048" y="3122675"/>
+            <a:ext cx="5592927" cy="1531619"/>
+          </a:xfrm>
+          <a:prstGeom prst="rect">
+            <a:avLst/>
+          </a:prstGeom>
+        </p:spPr>
+      </p:pic>
+      <p:sp>
+        <p:nvSpPr>
+          <p:cNvPr id="107" name="Rectangle 106"/>
           <p:cNvSpPr/>
           <p:nvPr/>
         </p:nvSpPr>
         <p:spPr>
-          <a:xfrm rot="0" flipH="0" flipV="0">
-            <a:off x="9124950" y="1009650"/>
-            <a:ext cx="2819400" cy="952500"/>
+          <a:xfrm>
+            <a:off x="384048" y="3122675"/>
+            <a:ext cx="5592927" cy="1531619"/>
+          </a:xfrm>
+          <a:prstGeom prst="rect">
+            <a:avLst/>
+          </a:prstGeom>
+          <a:noFill/>
+          <a:ln w="9525">
+            <a:solidFill>
+              <a:srgbClr val="D6DCE5"/>
+            </a:solidFill>
+          </a:ln>
+          <a:effectLst/>
+        </p:spPr>
+        <p:style>
+          <a:lnRef idx="1">
+            <a:schemeClr val="accent1"/>
+          </a:lnRef>
+          <a:fillRef idx="3">
+            <a:schemeClr val="accent1"/>
+          </a:fillRef>
+          <a:effectRef idx="2">
+            <a:schemeClr val="accent1"/>
+          </a:effectRef>
+          <a:fontRef idx="minor">
+            <a:schemeClr val="lt1"/>
+          </a:fontRef>
+        </p:style>
+        <p:txBody>
+          <a:bodyPr rtlCol="0" anchor="ctr"/>
+          <a:lstStyle/>
+          <a:p>
+            <a:pPr algn="ctr"/>
+          </a:p>
+        </p:txBody>
+      </p:sp>
+      <p:sp>
+        <p:nvSpPr>
+          <p:cNvPr id="108" name="Rounded Rectangle 107"/>
+          <p:cNvSpPr/>
+          <p:nvPr/>
+        </p:nvSpPr>
+        <p:spPr>
+          <a:xfrm>
+            <a:off x="384048" y="4654296"/>
+            <a:ext cx="5592927" cy="420624"/>
           </a:xfrm>
           <a:prstGeom prst="roundRect">
             <a:avLst>
-              <a:gd name="adj" fmla="val 10000"/>
+              <a:gd name="adj" fmla="val 6000"/>
             </a:avLst>
           </a:prstGeom>
           <a:solidFill>
-            <a:srgbClr val="FFC107"/>
+            <a:srgbClr val="F0F5FC"/>
           </a:solidFill>
-          <a:ln/>
-        </p:spPr>
-        <p:txBody>
-          <a:bodyPr/>
-          <a:p/>
-        </p:txBody>
-      </p:sp>
-      <p:sp>
-        <p:nvSpPr>
-          <p:cNvPr id="88" name="" descr="{&quot;isTemplate&quot;:true,&quot;type&quot;:&quot;text&quot;}"/>
+          <a:ln>
+            <a:noFill/>
+          </a:ln>
+          <a:effectLst/>
+        </p:spPr>
+        <p:style>
+          <a:lnRef idx="1">
+            <a:schemeClr val="accent1"/>
+          </a:lnRef>
+          <a:fillRef idx="3">
+            <a:schemeClr val="accent1"/>
+          </a:fillRef>
+          <a:effectRef idx="2">
+            <a:schemeClr val="accent1"/>
+          </a:effectRef>
+          <a:fontRef idx="minor">
+            <a:schemeClr val="lt1"/>
+          </a:fontRef>
+        </p:style>
+        <p:txBody>
+          <a:bodyPr rtlCol="0" anchor="ctr"/>
+          <a:lstStyle/>
+          <a:p>
+            <a:pPr algn="ctr"/>
+          </a:p>
+        </p:txBody>
+      </p:sp>
+      <p:sp>
+        <p:nvSpPr>
+          <p:cNvPr id="109" name="TextBox 108"/>
           <p:cNvSpPr txBox="1"/>
           <p:nvPr/>
         </p:nvSpPr>
         <p:spPr>
-          <a:xfrm rot="0" flipH="0" flipV="0">
-            <a:off x="9258300" y="1219200"/>
-            <a:ext cx="2552700" cy="342900"/>
-          </a:xfrm>
-          <a:prstGeom prst="rect"/>
-        </p:spPr>
-        <p:txBody>
-          <a:bodyPr wrap="none" lIns="0" tIns="0" rIns="0" bIns="0"/>
+          <a:xfrm>
+            <a:off x="493776" y="4700016"/>
+            <a:ext cx="5373471" cy="201168"/>
+          </a:xfrm>
+          <a:prstGeom prst="rect">
+            <a:avLst/>
+          </a:prstGeom>
+          <a:noFill/>
+        </p:spPr>
+        <p:txBody>
+          <a:bodyPr wrap="square" lIns="0" rIns="0" tIns="0" bIns="0">
+            <a:spAutoFit/>
+          </a:bodyPr>
+          <a:lstStyle/>
           <a:p>
-            <a:pPr>
-              <a:lnSpc>
-                <a:spcPct val="100000"/>
-              </a:lnSpc>
-            </a:pPr>
-            <a:r>
-              <a:rPr lang="en-US" sz="2250" b="1">
-                <a:solidFill>
-                  <a:srgbClr val="1A2230"/>
-                </a:solidFill>
-                <a:latin typeface="Microsoft YaHei"/>
-                <a:ea typeface="Microsoft YaHei"/>
-              </a:rPr>
-              <a:t>27</a:t>
-            </a:r>
-            <a:endParaRPr/>
+            <a:pPr algn="l"/>
+            <a:r>
+              <a:rPr sz="1150" b="1" i="0">
+                <a:solidFill>
+                  <a:srgbClr val="1E4FA8"/>
+                </a:solidFill>
+                <a:latin typeface="微软雅黑"/>
+              </a:rPr>
+              <a:t>3　盲听听测平台</a:t>
+            </a:r>
           </a:p>
         </p:txBody>
       </p:sp>
       <p:sp>
         <p:nvSpPr>
-          <p:cNvPr id="89" name="" descr="{&quot;isTemplate&quot;:true,&quot;type&quot;:&quot;text&quot;}"/>
+          <p:cNvPr id="110" name="TextBox 109"/>
           <p:cNvSpPr txBox="1"/>
           <p:nvPr/>
         </p:nvSpPr>
         <p:spPr>
-          <a:xfrm rot="0" flipH="0" flipV="0">
-            <a:off x="9258300" y="1600200"/>
-            <a:ext cx="2552700" cy="152400"/>
-          </a:xfrm>
-          <a:prstGeom prst="rect"/>
-        </p:spPr>
-        <p:txBody>
-          <a:bodyPr wrap="none" lIns="0" tIns="0" rIns="0" bIns="0"/>
+          <a:xfrm>
+            <a:off x="493776" y="4892040"/>
+            <a:ext cx="5373471" cy="164592"/>
+          </a:xfrm>
+          <a:prstGeom prst="rect">
+            <a:avLst/>
+          </a:prstGeom>
+          <a:noFill/>
+        </p:spPr>
+        <p:txBody>
+          <a:bodyPr wrap="square" lIns="0" rIns="0" tIns="0" bIns="0">
+            <a:spAutoFit/>
+          </a:bodyPr>
+          <a:lstStyle/>
           <a:p>
-            <a:pPr>
-              <a:lnSpc>
-                <a:spcPct val="100000"/>
-              </a:lnSpc>
-            </a:pPr>
-            <a:r>
-              <a:rPr lang="zh-CN" sz="975">
-                <a:solidFill>
-                  <a:srgbClr val="4A5568"/>
-                </a:solidFill>
-                <a:latin typeface="Microsoft YaHei"/>
-                <a:ea typeface="Microsoft YaHei"/>
-              </a:rPr>
-              <a:t>能力插件（含声音保存插件族）</a:t>
-            </a:r>
-            <a:endParaRPr/>
+            <a:pPr algn="l"/>
+            <a:r>
+              <a:rPr sz="950" b="0" i="0">
+                <a:solidFill>
+                  <a:srgbClr val="1A2230"/>
+                </a:solidFill>
+                <a:latin typeface="微软雅黑"/>
+              </a:rPr>
+              <a:t>手机扫码打分，主客观分互补</a:t>
+            </a:r>
           </a:p>
         </p:txBody>
       </p:sp>
-      <p:sp>
-        <p:nvSpPr>
-          <p:cNvPr id="90" name="" descr="{&quot;isTemplate&quot;:true,&quot;type&quot;:&quot;text&quot;}"/>
-          <p:cNvSpPr txBox="1"/>
-          <p:nvPr/>
-        </p:nvSpPr>
-        <p:spPr>
-          <a:xfrm rot="0" flipH="0" flipV="0">
-            <a:off x="247650" y="2095500"/>
-            <a:ext cx="11696700" cy="209550"/>
-          </a:xfrm>
-          <a:prstGeom prst="rect"/>
-        </p:spPr>
-        <p:txBody>
-          <a:bodyPr wrap="none" lIns="0" tIns="0" rIns="0" bIns="0"/>
+      <p:pic xmlns:r="http://schemas.openxmlformats.org/officeDocument/2006/relationships">
+        <p:nvPicPr>
+          <p:cNvPr id="111" name="Picture 110" descr="4-音频水印.png"/>
+          <p:cNvPicPr>
+            <a:picLocks noChangeAspect="1"/>
+          </p:cNvPicPr>
+          <p:nvPr/>
+        </p:nvPicPr>
+        <p:blipFill>
+          <a:blip r:embed="rId5"/>
+          <a:stretch>
+            <a:fillRect/>
+          </a:stretch>
+        </p:blipFill>
+        <p:spPr>
+          <a:xfrm>
+            <a:off x="6214719" y="3122675"/>
+            <a:ext cx="5592927" cy="1531619"/>
+          </a:xfrm>
+          <a:prstGeom prst="rect">
+            <a:avLst/>
+          </a:prstGeom>
+        </p:spPr>
+      </p:pic>
+      <p:sp>
+        <p:nvSpPr>
+          <p:cNvPr id="112" name="Rectangle 111"/>
+          <p:cNvSpPr/>
+          <p:nvPr/>
+        </p:nvSpPr>
+        <p:spPr>
+          <a:xfrm>
+            <a:off x="6214719" y="3122675"/>
+            <a:ext cx="5592927" cy="1531619"/>
+          </a:xfrm>
+          <a:prstGeom prst="rect">
+            <a:avLst/>
+          </a:prstGeom>
+          <a:noFill/>
+          <a:ln w="9525">
+            <a:solidFill>
+              <a:srgbClr val="D6DCE5"/>
+            </a:solidFill>
+          </a:ln>
+          <a:effectLst/>
+        </p:spPr>
+        <p:style>
+          <a:lnRef idx="1">
+            <a:schemeClr val="accent1"/>
+          </a:lnRef>
+          <a:fillRef idx="3">
+            <a:schemeClr val="accent1"/>
+          </a:fillRef>
+          <a:effectRef idx="2">
+            <a:schemeClr val="accent1"/>
+          </a:effectRef>
+          <a:fontRef idx="minor">
+            <a:schemeClr val="lt1"/>
+          </a:fontRef>
+        </p:style>
+        <p:txBody>
+          <a:bodyPr rtlCol="0" anchor="ctr"/>
+          <a:lstStyle/>
           <a:p>
-            <a:pPr>
-              <a:lnSpc>
-                <a:spcPct val="100000"/>
-              </a:lnSpc>
-            </a:pPr>
-            <a:r>
-              <a:rPr lang="zh-CN" sz="1350" b="1">
-                <a:solidFill>
-                  <a:srgbClr val="0E3F8C"/>
-                </a:solidFill>
-                <a:latin typeface="Microsoft YaHei"/>
-                <a:ea typeface="Microsoft YaHei"/>
-              </a:rPr>
-              <a:t>与本项目直接相关的既有能力</a:t>
-            </a:r>
-            <a:endParaRPr/>
+            <a:pPr algn="ctr"/>
           </a:p>
         </p:txBody>
       </p:sp>
-      <p:graphicFrame>
-        <p:nvGraphicFramePr>
-          <p:cNvPr id="91" name=""/>
-          <p:cNvGraphicFramePr/>
-          <p:nvPr/>
-        </p:nvGraphicFramePr>
-        <p:xfrm rot="0" flipH="0" flipV="0">
-          <a:off x="247650" y="2438400"/>
-          <a:ext cx="11696700" cy="2324100"/>
-        </p:xfrm>
-        <a:graphic>
-          <a:graphicData uri="http://schemas.openxmlformats.org/drawingml/2006/table">
-            <a:tbl>
-              <a:tblGrid>
-                <a:gridCol w="2843443">
-                  <a:extLst>
-                    <a:ext uri="{9D8B030D-6E8A-4147-A177-3AD203B41FA5}">
-                      <a16:colId val="1"/>
-                    </a:ext>
-                  </a:extLst>
-                </a:gridCol>
-                <a:gridCol w="5863029">
-                  <a:extLst>
-                    <a:ext uri="{9D8B030D-6E8A-4147-A177-3AD203B41FA5}">
-                      <a16:colId val="2"/>
-                    </a:ext>
-                  </a:extLst>
-                </a:gridCol>
-                <a:gridCol w="2990228">
-                  <a:extLst>
-                    <a:ext uri="{9D8B030D-6E8A-4147-A177-3AD203B41FA5}">
-                      <a16:colId val="3"/>
-                    </a:ext>
-                  </a:extLst>
-                </a:gridCol>
-              </a:tblGrid>
-              <a:tr h="332014">
-                <a:tc>
-                  <a:txBody>
-                    <a:bodyPr wrap="square" lIns="0" tIns="0" rIns="0" bIns="0" anchor="ctr">
-                      <a:normAutofit/>
-                    </a:bodyPr>
-                    <a:p>
-                      <a:pPr marL="114300" marR="114300" algn="l">
-                        <a:lnSpc>
-                          <a:spcPct val="120000"/>
-                        </a:lnSpc>
-                      </a:pPr>
-                      <a:r>
-                        <a:rPr sz="1050" b="1">
-                          <a:solidFill>
-                            <a:srgbClr val="FFFFFF"/>
-                          </a:solidFill>
-                          <a:latin typeface="Microsoft YaHei"/>
-                          <a:ea typeface="Microsoft YaHei"/>
-                        </a:rPr>
-                        <a:t>能力</a:t>
-                      </a:r>
-                      <a:endParaRPr/>
-                    </a:p>
-                  </a:txBody>
-                  <a:tcPr marL="45720" marR="45720" marT="45720" marB="45720" anchor="ctr">
-                    <a:lnL>
-                      <a:noFill/>
-                    </a:lnL>
-                    <a:lnR>
-                      <a:noFill/>
-                    </a:lnR>
-                    <a:lnT>
-                      <a:noFill/>
-                    </a:lnT>
-                    <a:lnB>
-                      <a:noFill/>
-                    </a:lnB>
-                    <a:solidFill>
-                      <a:srgbClr val="1E4FA8"/>
-                    </a:solidFill>
-                  </a:tcPr>
-                </a:tc>
-                <a:tc>
-                  <a:txBody>
-                    <a:bodyPr wrap="square" lIns="0" tIns="0" rIns="0" bIns="0" anchor="ctr">
-                      <a:normAutofit/>
-                    </a:bodyPr>
-                    <a:p>
-                      <a:pPr marL="114300" marR="114300" algn="l">
-                        <a:lnSpc>
-                          <a:spcPct val="120000"/>
-                        </a:lnSpc>
-                      </a:pPr>
-                      <a:r>
-                        <a:rPr sz="1050" b="1">
-                          <a:solidFill>
-                            <a:srgbClr val="FFFFFF"/>
-                          </a:solidFill>
-                          <a:latin typeface="Microsoft YaHei"/>
-                          <a:ea typeface="Microsoft YaHei"/>
-                        </a:rPr>
-                        <a:t>实现</a:t>
-                      </a:r>
-                      <a:endParaRPr/>
-                    </a:p>
-                  </a:txBody>
-                  <a:tcPr marL="45720" marR="45720" marT="45720" marB="45720" anchor="ctr">
-                    <a:lnL>
-                      <a:noFill/>
-                    </a:lnL>
-                    <a:lnR>
-                      <a:noFill/>
-                    </a:lnR>
-                    <a:lnT>
-                      <a:noFill/>
-                    </a:lnT>
-                    <a:lnB>
-                      <a:noFill/>
-                    </a:lnB>
-                    <a:solidFill>
-                      <a:srgbClr val="1E4FA8"/>
-                    </a:solidFill>
-                  </a:tcPr>
-                </a:tc>
-                <a:tc>
-                  <a:txBody>
-                    <a:bodyPr wrap="square" lIns="0" tIns="0" rIns="0" bIns="0" anchor="ctr">
-                      <a:normAutofit/>
-                    </a:bodyPr>
-                    <a:p>
-                      <a:pPr marL="114300" marR="114300" algn="l">
-                        <a:lnSpc>
-                          <a:spcPct val="120000"/>
-                        </a:lnSpc>
-                      </a:pPr>
-                      <a:r>
-                        <a:rPr sz="1050" b="1">
-                          <a:solidFill>
-                            <a:srgbClr val="FFFFFF"/>
-                          </a:solidFill>
-                          <a:latin typeface="Microsoft YaHei"/>
-                          <a:ea typeface="Microsoft YaHei"/>
-                        </a:rPr>
-                        <a:t>规模 / 状态</a:t>
-                      </a:r>
-                      <a:endParaRPr/>
-                    </a:p>
-                  </a:txBody>
-                  <a:tcPr marL="45720" marR="45720" marT="45720" marB="45720" anchor="ctr">
-                    <a:lnL>
-                      <a:noFill/>
-                    </a:lnL>
-                    <a:lnR>
-                      <a:noFill/>
-                    </a:lnR>
-                    <a:lnT>
-                      <a:noFill/>
-                    </a:lnT>
-                    <a:lnB>
-                      <a:noFill/>
-                    </a:lnB>
-                    <a:solidFill>
-                      <a:srgbClr val="1E4FA8"/>
-                    </a:solidFill>
-                  </a:tcPr>
-                </a:tc>
-                <a:extLst>
-                  <a:ext uri="{0D108BD9-81ED-4DB2-BD59-A6C34878D82A}">
-                    <a16:rowId val="1"/>
-                  </a:ext>
-                </a:extLst>
-              </a:tr>
-              <a:tr h="332014">
-                <a:tc>
-                  <a:txBody>
-                    <a:bodyPr wrap="square" lIns="0" tIns="0" rIns="0" bIns="0" anchor="ctr">
-                      <a:normAutofit/>
-                    </a:bodyPr>
-                    <a:p>
-                      <a:pPr marL="114300" marR="114300" algn="l">
-                        <a:lnSpc>
-                          <a:spcPct val="120000"/>
-                        </a:lnSpc>
-                      </a:pPr>
-                      <a:r>
-                        <a:rPr sz="1050">
-                          <a:solidFill>
-                            <a:srgbClr val="1A2230"/>
-                          </a:solidFill>
-                          <a:latin typeface="Microsoft YaHei"/>
-                          <a:ea typeface="Microsoft YaHei"/>
-                        </a:rPr>
-                        <a:t>声音档案存储与门禁</a:t>
-                      </a:r>
-                      <a:endParaRPr/>
-                    </a:p>
-                  </a:txBody>
-                  <a:tcPr marL="45720" marR="45720" marT="45720" marB="45720" anchor="ctr">
-                    <a:lnL>
-                      <a:noFill/>
-                    </a:lnL>
-                    <a:lnR>
-                      <a:noFill/>
-                    </a:lnR>
-                    <a:lnT>
-                      <a:noFill/>
-                    </a:lnT>
-                    <a:lnB>
-                      <a:noFill/>
-                    </a:lnB>
-                  </a:tcPr>
-                </a:tc>
-                <a:tc>
-                  <a:txBody>
-                    <a:bodyPr wrap="square" lIns="0" tIns="0" rIns="0" bIns="0" anchor="ctr">
-                      <a:normAutofit/>
-                    </a:bodyPr>
-                    <a:p>
-                      <a:pPr marL="114300" marR="114300" algn="l">
-                        <a:lnSpc>
-                          <a:spcPct val="120000"/>
-                        </a:lnSpc>
-                      </a:pPr>
-                      <a:r>
-                        <a:rPr sz="1050">
-                          <a:solidFill>
-                            <a:srgbClr val="1A2230"/>
-                          </a:solidFill>
-                          <a:latin typeface="Microsoft YaHei"/>
-                          <a:ea typeface="Microsoft YaHei"/>
-                        </a:rPr>
-                        <a:t>voicepreserve.py + voicepreserve_api.py</a:t>
-                      </a:r>
-                      <a:endParaRPr/>
-                    </a:p>
-                  </a:txBody>
-                  <a:tcPr marL="45720" marR="45720" marT="45720" marB="45720" anchor="ctr">
-                    <a:lnL>
-                      <a:noFill/>
-                    </a:lnL>
-                    <a:lnR>
-                      <a:noFill/>
-                    </a:lnR>
-                    <a:lnT>
-                      <a:noFill/>
-                    </a:lnT>
-                    <a:lnB>
-                      <a:noFill/>
-                    </a:lnB>
-                  </a:tcPr>
-                </a:tc>
-                <a:tc>
-                  <a:txBody>
-                    <a:bodyPr wrap="square" lIns="0" tIns="0" rIns="0" bIns="0" anchor="ctr">
-                      <a:normAutofit/>
-                    </a:bodyPr>
-                    <a:p>
-                      <a:pPr marL="114300" marR="114300" algn="l">
-                        <a:lnSpc>
-                          <a:spcPct val="120000"/>
-                        </a:lnSpc>
-                      </a:pPr>
-                      <a:r>
-                        <a:rPr sz="1050">
-                          <a:solidFill>
-                            <a:srgbClr val="1A2230"/>
-                          </a:solidFill>
-                          <a:latin typeface="Microsoft YaHei"/>
-                          <a:ea typeface="Microsoft YaHei"/>
-                        </a:rPr>
-                        <a:t>1187 行</a:t>
-                      </a:r>
-                      <a:endParaRPr/>
-                    </a:p>
-                  </a:txBody>
-                  <a:tcPr marL="45720" marR="45720" marT="45720" marB="45720" anchor="ctr">
-                    <a:lnL>
-                      <a:noFill/>
-                    </a:lnL>
-                    <a:lnR>
-                      <a:noFill/>
-                    </a:lnR>
-                    <a:lnT>
-                      <a:noFill/>
-                    </a:lnT>
-                    <a:lnB>
-                      <a:noFill/>
-                    </a:lnB>
-                  </a:tcPr>
-                </a:tc>
-                <a:extLst>
-                  <a:ext uri="{0D108BD9-81ED-4DB2-BD59-A6C34878D82A}">
-                    <a16:rowId val="2"/>
-                  </a:ext>
-                </a:extLst>
-              </a:tr>
-              <a:tr h="332014">
-                <a:tc>
-                  <a:txBody>
-                    <a:bodyPr wrap="square" lIns="0" tIns="0" rIns="0" bIns="0" anchor="ctr">
-                      <a:normAutofit/>
-                    </a:bodyPr>
-                    <a:p>
-                      <a:pPr marL="114300" marR="114300" algn="l">
-                        <a:lnSpc>
-                          <a:spcPct val="120000"/>
-                        </a:lnSpc>
-                      </a:pPr>
-                      <a:r>
-                        <a:rPr sz="1050" b="1">
-                          <a:solidFill>
-                            <a:srgbClr val="1E4FA8"/>
-                          </a:solidFill>
-                          <a:latin typeface="Microsoft YaHei"/>
-                          <a:ea typeface="Microsoft YaHei"/>
-                        </a:rPr>
-                        <a:t>评测引擎 ★</a:t>
-                      </a:r>
-                      <a:endParaRPr/>
-                    </a:p>
-                  </a:txBody>
-                  <a:tcPr marL="45720" marR="45720" marT="45720" marB="45720" anchor="ctr">
-                    <a:lnL>
-                      <a:noFill/>
-                    </a:lnL>
-                    <a:lnR>
-                      <a:noFill/>
-                    </a:lnR>
-                    <a:lnT>
-                      <a:noFill/>
-                    </a:lnT>
-                    <a:lnB>
-                      <a:noFill/>
-                    </a:lnB>
-                    <a:solidFill>
-                      <a:srgbClr val="F0F5FC"/>
-                    </a:solidFill>
-                  </a:tcPr>
-                </a:tc>
-                <a:tc>
-                  <a:txBody>
-                    <a:bodyPr wrap="square" lIns="0" tIns="0" rIns="0" bIns="0" anchor="ctr">
-                      <a:normAutofit/>
-                    </a:bodyPr>
-                    <a:p>
-                      <a:pPr marL="114300" marR="114300" algn="l">
-                        <a:lnSpc>
-                          <a:spcPct val="120000"/>
-                        </a:lnSpc>
-                      </a:pPr>
-                      <a:r>
-                        <a:rPr sz="1050">
-                          <a:solidFill>
-                            <a:srgbClr val="1A2230"/>
-                          </a:solidFill>
-                          <a:latin typeface="Microsoft YaHei"/>
-                          <a:ea typeface="Microsoft YaHei"/>
-                        </a:rPr>
-                        <a:t>voicebank_eval.py</a:t>
-                      </a:r>
-                      <a:endParaRPr/>
-                    </a:p>
-                  </a:txBody>
-                  <a:tcPr marL="45720" marR="45720" marT="45720" marB="45720" anchor="ctr">
-                    <a:lnL>
-                      <a:noFill/>
-                    </a:lnL>
-                    <a:lnR>
-                      <a:noFill/>
-                    </a:lnR>
-                    <a:lnT>
-                      <a:noFill/>
-                    </a:lnT>
-                    <a:lnB>
-                      <a:noFill/>
-                    </a:lnB>
-                    <a:solidFill>
-                      <a:srgbClr val="F0F5FC"/>
-                    </a:solidFill>
-                  </a:tcPr>
-                </a:tc>
-                <a:tc>
-                  <a:txBody>
-                    <a:bodyPr wrap="square" lIns="0" tIns="0" rIns="0" bIns="0" anchor="ctr">
-                      <a:normAutofit/>
-                    </a:bodyPr>
-                    <a:p>
-                      <a:pPr marL="114300" marR="114300" algn="l">
-                        <a:lnSpc>
-                          <a:spcPct val="120000"/>
-                        </a:lnSpc>
-                      </a:pPr>
-                      <a:r>
-                        <a:rPr sz="1050">
-                          <a:solidFill>
-                            <a:srgbClr val="1A2230"/>
-                          </a:solidFill>
-                          <a:latin typeface="Microsoft YaHei"/>
-                          <a:ea typeface="Microsoft YaHei"/>
-                        </a:rPr>
-                        <a:t>1559 行 + 99 个测试</a:t>
-                      </a:r>
-                      <a:endParaRPr/>
-                    </a:p>
-                  </a:txBody>
-                  <a:tcPr marL="45720" marR="45720" marT="45720" marB="45720" anchor="ctr">
-                    <a:lnL>
-                      <a:noFill/>
-                    </a:lnL>
-                    <a:lnR>
-                      <a:noFill/>
-                    </a:lnR>
-                    <a:lnT>
-                      <a:noFill/>
-                    </a:lnT>
-                    <a:lnB>
-                      <a:noFill/>
-                    </a:lnB>
-                    <a:solidFill>
-                      <a:srgbClr val="F0F5FC"/>
-                    </a:solidFill>
-                  </a:tcPr>
-                </a:tc>
-                <a:extLst>
-                  <a:ext uri="{0D108BD9-81ED-4DB2-BD59-A6C34878D82A}">
-                    <a16:rowId val="3"/>
-                  </a:ext>
-                </a:extLst>
-              </a:tr>
-              <a:tr h="332014">
-                <a:tc>
-                  <a:txBody>
-                    <a:bodyPr wrap="square" lIns="0" tIns="0" rIns="0" bIns="0" anchor="ctr">
-                      <a:normAutofit/>
-                    </a:bodyPr>
-                    <a:p>
-                      <a:pPr marL="114300" marR="114300" algn="l">
-                        <a:lnSpc>
-                          <a:spcPct val="120000"/>
-                        </a:lnSpc>
-                      </a:pPr>
-                      <a:r>
-                        <a:rPr sz="1050">
-                          <a:solidFill>
-                            <a:srgbClr val="1A2230"/>
-                          </a:solidFill>
-                          <a:latin typeface="Microsoft YaHei"/>
-                          <a:ea typeface="Microsoft YaHei"/>
-                        </a:rPr>
-                        <a:t>客观指标计算</a:t>
-                      </a:r>
-                      <a:endParaRPr/>
-                    </a:p>
-                  </a:txBody>
-                  <a:tcPr marL="45720" marR="45720" marT="45720" marB="45720" anchor="ctr">
-                    <a:lnL>
-                      <a:noFill/>
-                    </a:lnL>
-                    <a:lnR>
-                      <a:noFill/>
-                    </a:lnR>
-                    <a:lnT>
-                      <a:noFill/>
-                    </a:lnT>
-                    <a:lnB>
-                      <a:noFill/>
-                    </a:lnB>
-                  </a:tcPr>
-                </a:tc>
-                <a:tc>
-                  <a:txBody>
-                    <a:bodyPr wrap="square" lIns="0" tIns="0" rIns="0" bIns="0" anchor="ctr">
-                      <a:normAutofit/>
-                    </a:bodyPr>
-                    <a:p>
-                      <a:pPr marL="114300" marR="114300" algn="l">
-                        <a:lnSpc>
-                          <a:spcPct val="120000"/>
-                        </a:lnSpc>
-                      </a:pPr>
-                      <a:r>
-                        <a:rPr sz="1050">
-                          <a:solidFill>
-                            <a:srgbClr val="1A2230"/>
-                          </a:solidFill>
-                          <a:latin typeface="Microsoft YaHei"/>
-                          <a:ea typeface="Microsoft YaHei"/>
-                        </a:rPr>
-                        <a:t>HNR / H1-H2 / 谱倾斜 / jitter / shimmer</a:t>
-                      </a:r>
-                      <a:endParaRPr/>
-                    </a:p>
-                  </a:txBody>
-                  <a:tcPr marL="45720" marR="45720" marT="45720" marB="45720" anchor="ctr">
-                    <a:lnL>
-                      <a:noFill/>
-                    </a:lnL>
-                    <a:lnR>
-                      <a:noFill/>
-                    </a:lnR>
-                    <a:lnT>
-                      <a:noFill/>
-                    </a:lnT>
-                    <a:lnB>
-                      <a:noFill/>
-                    </a:lnB>
-                  </a:tcPr>
-                </a:tc>
-                <a:tc>
-                  <a:txBody>
-                    <a:bodyPr wrap="square" lIns="0" tIns="0" rIns="0" bIns="0" anchor="ctr">
-                      <a:normAutofit/>
-                    </a:bodyPr>
-                    <a:p>
-                      <a:pPr marL="114300" marR="114300" algn="l">
-                        <a:lnSpc>
-                          <a:spcPct val="120000"/>
-                        </a:lnSpc>
-                      </a:pPr>
-                      <a:r>
-                        <a:rPr sz="1050">
-                          <a:solidFill>
-                            <a:srgbClr val="1A2230"/>
-                          </a:solidFill>
-                          <a:latin typeface="Microsoft YaHei"/>
-                          <a:ea typeface="Microsoft YaHei"/>
-                        </a:rPr>
-                        <a:t>已实现并测试</a:t>
-                      </a:r>
-                      <a:endParaRPr/>
-                    </a:p>
-                  </a:txBody>
-                  <a:tcPr marL="45720" marR="45720" marT="45720" marB="45720" anchor="ctr">
-                    <a:lnL>
-                      <a:noFill/>
-                    </a:lnL>
-                    <a:lnR>
-                      <a:noFill/>
-                    </a:lnR>
-                    <a:lnT>
-                      <a:noFill/>
-                    </a:lnT>
-                    <a:lnB>
-                      <a:noFill/>
-                    </a:lnB>
-                  </a:tcPr>
-                </a:tc>
-                <a:extLst>
-                  <a:ext uri="{0D108BD9-81ED-4DB2-BD59-A6C34878D82A}">
-                    <a16:rowId val="4"/>
-                  </a:ext>
-                </a:extLst>
-              </a:tr>
-              <a:tr h="332014">
-                <a:tc>
-                  <a:txBody>
-                    <a:bodyPr wrap="square" lIns="0" tIns="0" rIns="0" bIns="0" anchor="ctr">
-                      <a:normAutofit/>
-                    </a:bodyPr>
-                    <a:p>
-                      <a:pPr marL="114300" marR="114300" algn="l">
-                        <a:lnSpc>
-                          <a:spcPct val="120000"/>
-                        </a:lnSpc>
-                      </a:pPr>
-                      <a:r>
-                        <a:rPr sz="1050">
-                          <a:solidFill>
-                            <a:srgbClr val="1A2230"/>
-                          </a:solidFill>
-                          <a:latin typeface="Microsoft YaHei"/>
-                          <a:ea typeface="Microsoft YaHei"/>
-                        </a:rPr>
-                        <a:t>盲听平台</a:t>
-                      </a:r>
-                      <a:endParaRPr/>
-                    </a:p>
-                  </a:txBody>
-                  <a:tcPr marL="45720" marR="45720" marT="45720" marB="45720" anchor="ctr">
-                    <a:lnL>
-                      <a:noFill/>
-                    </a:lnL>
-                    <a:lnR>
-                      <a:noFill/>
-                    </a:lnR>
-                    <a:lnT>
-                      <a:noFill/>
-                    </a:lnT>
-                    <a:lnB>
-                      <a:noFill/>
-                    </a:lnB>
-                    <a:solidFill>
-                      <a:srgbClr val="F0F5FC"/>
-                    </a:solidFill>
-                  </a:tcPr>
-                </a:tc>
-                <a:tc>
-                  <a:txBody>
-                    <a:bodyPr wrap="square" lIns="0" tIns="0" rIns="0" bIns="0" anchor="ctr">
-                      <a:normAutofit/>
-                    </a:bodyPr>
-                    <a:p>
-                      <a:pPr marL="114300" marR="114300" algn="l">
-                        <a:lnSpc>
-                          <a:spcPct val="120000"/>
-                        </a:lnSpc>
-                      </a:pPr>
-                      <a:r>
-                        <a:rPr sz="1050">
-                          <a:solidFill>
-                            <a:srgbClr val="1A2230"/>
-                          </a:solidFill>
-                          <a:latin typeface="Microsoft YaHei"/>
-                          <a:ea typeface="Microsoft YaHei"/>
-                        </a:rPr>
-                        <a:t>随机化、不显示条件</a:t>
-                      </a:r>
-                      <a:endParaRPr/>
-                    </a:p>
-                  </a:txBody>
-                  <a:tcPr marL="45720" marR="45720" marT="45720" marB="45720" anchor="ctr">
-                    <a:lnL>
-                      <a:noFill/>
-                    </a:lnL>
-                    <a:lnR>
-                      <a:noFill/>
-                    </a:lnR>
-                    <a:lnT>
-                      <a:noFill/>
-                    </a:lnT>
-                    <a:lnB>
-                      <a:noFill/>
-                    </a:lnB>
-                    <a:solidFill>
-                      <a:srgbClr val="F0F5FC"/>
-                    </a:solidFill>
-                  </a:tcPr>
-                </a:tc>
-                <a:tc>
-                  <a:txBody>
-                    <a:bodyPr wrap="square" lIns="0" tIns="0" rIns="0" bIns="0" anchor="ctr">
-                      <a:normAutofit/>
-                    </a:bodyPr>
-                    <a:p>
-                      <a:pPr marL="114300" marR="114300" algn="l">
-                        <a:lnSpc>
-                          <a:spcPct val="120000"/>
-                        </a:lnSpc>
-                      </a:pPr>
-                      <a:r>
-                        <a:rPr sz="1050">
-                          <a:solidFill>
-                            <a:srgbClr val="1A2230"/>
-                          </a:solidFill>
-                          <a:latin typeface="Microsoft YaHei"/>
-                          <a:ea typeface="Microsoft YaHei"/>
-                        </a:rPr>
-                        <a:t>已实现</a:t>
-                      </a:r>
-                      <a:endParaRPr/>
-                    </a:p>
-                  </a:txBody>
-                  <a:tcPr marL="45720" marR="45720" marT="45720" marB="45720" anchor="ctr">
-                    <a:lnL>
-                      <a:noFill/>
-                    </a:lnL>
-                    <a:lnR>
-                      <a:noFill/>
-                    </a:lnR>
-                    <a:lnT>
-                      <a:noFill/>
-                    </a:lnT>
-                    <a:lnB>
-                      <a:noFill/>
-                    </a:lnB>
-                    <a:solidFill>
-                      <a:srgbClr val="F0F5FC"/>
-                    </a:solidFill>
-                  </a:tcPr>
-                </a:tc>
-                <a:extLst>
-                  <a:ext uri="{0D108BD9-81ED-4DB2-BD59-A6C34878D82A}">
-                    <a16:rowId val="5"/>
-                  </a:ext>
-                </a:extLst>
-              </a:tr>
-              <a:tr h="332014">
-                <a:tc>
-                  <a:txBody>
-                    <a:bodyPr wrap="square" lIns="0" tIns="0" rIns="0" bIns="0" anchor="ctr">
-                      <a:normAutofit/>
-                    </a:bodyPr>
-                    <a:p>
-                      <a:pPr marL="114300" marR="114300" algn="l">
-                        <a:lnSpc>
-                          <a:spcPct val="120000"/>
-                        </a:lnSpc>
-                      </a:pPr>
-                      <a:r>
-                        <a:rPr sz="1050">
-                          <a:solidFill>
-                            <a:srgbClr val="1A2230"/>
-                          </a:solidFill>
-                          <a:latin typeface="Microsoft YaHei"/>
-                          <a:ea typeface="Microsoft YaHei"/>
-                        </a:rPr>
-                        <a:t>失败判词</a:t>
-                      </a:r>
-                      <a:endParaRPr/>
-                    </a:p>
-                  </a:txBody>
-                  <a:tcPr marL="45720" marR="45720" marT="45720" marB="45720" anchor="ctr">
-                    <a:lnL>
-                      <a:noFill/>
-                    </a:lnL>
-                    <a:lnR>
-                      <a:noFill/>
-                    </a:lnR>
-                    <a:lnT>
-                      <a:noFill/>
-                    </a:lnT>
-                    <a:lnB>
-                      <a:noFill/>
-                    </a:lnB>
-                  </a:tcPr>
-                </a:tc>
-                <a:tc>
-                  <a:txBody>
-                    <a:bodyPr wrap="square" lIns="0" tIns="0" rIns="0" bIns="0" anchor="ctr">
-                      <a:normAutofit/>
-                    </a:bodyPr>
-                    <a:p>
-                      <a:pPr marL="114300" marR="114300" algn="l">
-                        <a:lnSpc>
-                          <a:spcPct val="120000"/>
-                        </a:lnSpc>
-                      </a:pPr>
-                      <a:r>
-                        <a:rPr sz="1050">
-                          <a:solidFill>
-                            <a:srgbClr val="1A2230"/>
-                          </a:solidFill>
-                          <a:latin typeface="Microsoft YaHei"/>
-                          <a:ea typeface="Microsoft YaHei"/>
-                        </a:rPr>
-                        <a:t>质量不达标时给出具体原因</a:t>
-                      </a:r>
-                      <a:endParaRPr/>
-                    </a:p>
-                  </a:txBody>
-                  <a:tcPr marL="45720" marR="45720" marT="45720" marB="45720" anchor="ctr">
-                    <a:lnL>
-                      <a:noFill/>
-                    </a:lnL>
-                    <a:lnR>
-                      <a:noFill/>
-                    </a:lnR>
-                    <a:lnT>
-                      <a:noFill/>
-                    </a:lnT>
-                    <a:lnB>
-                      <a:noFill/>
-                    </a:lnB>
-                  </a:tcPr>
-                </a:tc>
-                <a:tc>
-                  <a:txBody>
-                    <a:bodyPr wrap="square" lIns="0" tIns="0" rIns="0" bIns="0" anchor="ctr">
-                      <a:normAutofit/>
-                    </a:bodyPr>
-                    <a:p>
-                      <a:pPr marL="114300" marR="114300" algn="l">
-                        <a:lnSpc>
-                          <a:spcPct val="120000"/>
-                        </a:lnSpc>
-                      </a:pPr>
-                      <a:r>
-                        <a:rPr sz="1050">
-                          <a:solidFill>
-                            <a:srgbClr val="1A2230"/>
-                          </a:solidFill>
-                          <a:latin typeface="Microsoft YaHei"/>
-                          <a:ea typeface="Microsoft YaHei"/>
-                        </a:rPr>
-                        <a:t>已实现</a:t>
-                      </a:r>
-                      <a:endParaRPr/>
-                    </a:p>
-                  </a:txBody>
-                  <a:tcPr marL="45720" marR="45720" marT="45720" marB="45720" anchor="ctr">
-                    <a:lnL>
-                      <a:noFill/>
-                    </a:lnL>
-                    <a:lnR>
-                      <a:noFill/>
-                    </a:lnR>
-                    <a:lnT>
-                      <a:noFill/>
-                    </a:lnT>
-                    <a:lnB>
-                      <a:noFill/>
-                    </a:lnB>
-                  </a:tcPr>
-                </a:tc>
-                <a:extLst>
-                  <a:ext uri="{0D108BD9-81ED-4DB2-BD59-A6C34878D82A}">
-                    <a16:rowId val="6"/>
-                  </a:ext>
-                </a:extLst>
-              </a:tr>
-              <a:tr h="332014">
-                <a:tc>
-                  <a:txBody>
-                    <a:bodyPr wrap="square" lIns="0" tIns="0" rIns="0" bIns="0" anchor="ctr">
-                      <a:normAutofit/>
-                    </a:bodyPr>
-                    <a:p>
-                      <a:pPr marL="114300" marR="114300" algn="l">
-                        <a:lnSpc>
-                          <a:spcPct val="120000"/>
-                        </a:lnSpc>
-                      </a:pPr>
-                      <a:r>
-                        <a:rPr sz="1050">
-                          <a:solidFill>
-                            <a:srgbClr val="1A2230"/>
-                          </a:solidFill>
-                          <a:latin typeface="Microsoft YaHei"/>
-                          <a:ea typeface="Microsoft YaHei"/>
-                        </a:rPr>
-                        <a:t>实验协议</a:t>
-                      </a:r>
-                      <a:endParaRPr/>
-                    </a:p>
-                  </a:txBody>
-                  <a:tcPr marL="45720" marR="45720" marT="45720" marB="45720" anchor="ctr">
-                    <a:lnL>
-                      <a:noFill/>
-                    </a:lnL>
-                    <a:lnR>
-                      <a:noFill/>
-                    </a:lnR>
-                    <a:lnT>
-                      <a:noFill/>
-                    </a:lnT>
-                    <a:lnB>
-                      <a:noFill/>
-                    </a:lnB>
-                    <a:solidFill>
-                      <a:srgbClr val="F0F5FC"/>
-                    </a:solidFill>
-                  </a:tcPr>
-                </a:tc>
-                <a:tc>
-                  <a:txBody>
-                    <a:bodyPr wrap="square" lIns="0" tIns="0" rIns="0" bIns="0" anchor="ctr">
-                      <a:normAutofit/>
-                    </a:bodyPr>
-                    <a:p>
-                      <a:pPr marL="114300" marR="114300" algn="l">
-                        <a:lnSpc>
-                          <a:spcPct val="120000"/>
-                        </a:lnSpc>
-                      </a:pPr>
-                      <a:r>
-                        <a:rPr sz="1050">
-                          <a:solidFill>
-                            <a:srgbClr val="1A2230"/>
-                          </a:solidFill>
-                          <a:latin typeface="Microsoft YaHei"/>
-                          <a:ea typeface="Microsoft YaHei"/>
-                        </a:rPr>
-                        <a:t>《嗓音保存评测协议》</a:t>
-                      </a:r>
-                      <a:endParaRPr/>
-                    </a:p>
-                  </a:txBody>
-                  <a:tcPr marL="45720" marR="45720" marT="45720" marB="45720" anchor="ctr">
-                    <a:lnL>
-                      <a:noFill/>
-                    </a:lnL>
-                    <a:lnR>
-                      <a:noFill/>
-                    </a:lnR>
-                    <a:lnT>
-                      <a:noFill/>
-                    </a:lnT>
-                    <a:lnB>
-                      <a:noFill/>
-                    </a:lnB>
-                    <a:solidFill>
-                      <a:srgbClr val="F0F5FC"/>
-                    </a:solidFill>
-                  </a:tcPr>
-                </a:tc>
-                <a:tc>
-                  <a:txBody>
-                    <a:bodyPr wrap="square" lIns="0" tIns="0" rIns="0" bIns="0" anchor="ctr">
-                      <a:normAutofit/>
-                    </a:bodyPr>
-                    <a:p>
-                      <a:pPr marL="114300" marR="114300" algn="l">
-                        <a:lnSpc>
-                          <a:spcPct val="120000"/>
-                        </a:lnSpc>
-                      </a:pPr>
-                      <a:r>
-                        <a:rPr sz="1050">
-                          <a:solidFill>
-                            <a:srgbClr val="1A2230"/>
-                          </a:solidFill>
-                          <a:latin typeface="Microsoft YaHei"/>
-                          <a:ea typeface="Microsoft YaHei"/>
-                        </a:rPr>
-                        <a:t>已撰写</a:t>
-                      </a:r>
-                      <a:endParaRPr/>
-                    </a:p>
-                  </a:txBody>
-                  <a:tcPr marL="45720" marR="45720" marT="45720" marB="45720" anchor="ctr">
-                    <a:lnL>
-                      <a:noFill/>
-                    </a:lnL>
-                    <a:lnR>
-                      <a:noFill/>
-                    </a:lnR>
-                    <a:lnT>
-                      <a:noFill/>
-                    </a:lnT>
-                    <a:lnB>
-                      <a:noFill/>
-                    </a:lnB>
-                    <a:solidFill>
-                      <a:srgbClr val="F0F5FC"/>
-                    </a:solidFill>
-                  </a:tcPr>
-                </a:tc>
-                <a:extLst>
-                  <a:ext uri="{0D108BD9-81ED-4DB2-BD59-A6C34878D82A}">
-                    <a16:rowId val="7"/>
-                  </a:ext>
-                </a:extLst>
-              </a:tr>
-            </a:tbl>
-          </a:graphicData>
-        </a:graphic>
-      </p:graphicFrame>
-      <p:sp>
-        <p:nvSpPr>
-          <p:cNvPr id="92" name=""/>
+      <p:sp>
+        <p:nvSpPr>
+          <p:cNvPr id="113" name="Rounded Rectangle 112"/>
           <p:cNvSpPr/>
           <p:nvPr/>
         </p:nvSpPr>
         <p:spPr>
-          <a:xfrm rot="0" flipH="0" flipV="0">
-            <a:off x="295275" y="4895850"/>
-            <a:ext cx="11696700" cy="819150"/>
+          <a:xfrm>
+            <a:off x="6214719" y="4654296"/>
+            <a:ext cx="5592927" cy="420624"/>
           </a:xfrm>
           <a:prstGeom prst="roundRect">
             <a:avLst>
-              <a:gd name="adj" fmla="val 11628"/>
+              <a:gd name="adj" fmla="val 6000"/>
+            </a:avLst>
+          </a:prstGeom>
+          <a:solidFill>
+            <a:srgbClr val="F0F5FC"/>
+          </a:solidFill>
+          <a:ln>
+            <a:noFill/>
+          </a:ln>
+          <a:effectLst/>
+        </p:spPr>
+        <p:style>
+          <a:lnRef idx="1">
+            <a:schemeClr val="accent1"/>
+          </a:lnRef>
+          <a:fillRef idx="3">
+            <a:schemeClr val="accent1"/>
+          </a:fillRef>
+          <a:effectRef idx="2">
+            <a:schemeClr val="accent1"/>
+          </a:effectRef>
+          <a:fontRef idx="minor">
+            <a:schemeClr val="lt1"/>
+          </a:fontRef>
+        </p:style>
+        <p:txBody>
+          <a:bodyPr rtlCol="0" anchor="ctr"/>
+          <a:lstStyle/>
+          <a:p>
+            <a:pPr algn="ctr"/>
+          </a:p>
+        </p:txBody>
+      </p:sp>
+      <p:sp>
+        <p:nvSpPr>
+          <p:cNvPr id="114" name="TextBox 113"/>
+          <p:cNvSpPr txBox="1"/>
+          <p:nvPr/>
+        </p:nvSpPr>
+        <p:spPr>
+          <a:xfrm>
+            <a:off x="6324447" y="4700016"/>
+            <a:ext cx="5373471" cy="201168"/>
+          </a:xfrm>
+          <a:prstGeom prst="rect">
+            <a:avLst/>
+          </a:prstGeom>
+          <a:noFill/>
+        </p:spPr>
+        <p:txBody>
+          <a:bodyPr wrap="square" lIns="0" rIns="0" tIns="0" bIns="0">
+            <a:spAutoFit/>
+          </a:bodyPr>
+          <a:lstStyle/>
+          <a:p>
+            <a:pPr algn="l"/>
+            <a:r>
+              <a:rPr sz="1150" b="1" i="0">
+                <a:solidFill>
+                  <a:srgbClr val="1E4FA8"/>
+                </a:solidFill>
+                <a:latin typeface="微软雅黑"/>
+              </a:rPr>
+              <a:t>4　音频溯源水印</a:t>
+            </a:r>
+          </a:p>
+        </p:txBody>
+      </p:sp>
+      <p:sp>
+        <p:nvSpPr>
+          <p:cNvPr id="115" name="TextBox 114"/>
+          <p:cNvSpPr txBox="1"/>
+          <p:nvPr/>
+        </p:nvSpPr>
+        <p:spPr>
+          <a:xfrm>
+            <a:off x="6324447" y="4892040"/>
+            <a:ext cx="5373471" cy="164592"/>
+          </a:xfrm>
+          <a:prstGeom prst="rect">
+            <a:avLst/>
+          </a:prstGeom>
+          <a:noFill/>
+        </p:spPr>
+        <p:txBody>
+          <a:bodyPr wrap="square" lIns="0" rIns="0" tIns="0" bIns="0">
+            <a:spAutoFit/>
+          </a:bodyPr>
+          <a:lstStyle/>
+          <a:p>
+            <a:pPr algn="l"/>
+            <a:r>
+              <a:rPr sz="950" b="0" i="0">
+                <a:solidFill>
+                  <a:srgbClr val="1A2230"/>
+                </a:solidFill>
+                <a:latin typeface="微软雅黑"/>
+              </a:rPr>
+              <a:t>转码后仍可检出，对外分享可溯源</a:t>
+            </a:r>
+          </a:p>
+        </p:txBody>
+      </p:sp>
+      <p:sp>
+        <p:nvSpPr>
+          <p:cNvPr id="116" name="Rounded Rectangle 115"/>
+          <p:cNvSpPr/>
+          <p:nvPr/>
+        </p:nvSpPr>
+        <p:spPr>
+          <a:xfrm>
+            <a:off x="384048" y="5138928"/>
+            <a:ext cx="11420856" cy="384048"/>
+          </a:xfrm>
+          <a:prstGeom prst="roundRect">
+            <a:avLst>
+              <a:gd name="adj" fmla="val 6000"/>
+            </a:avLst>
+          </a:prstGeom>
+          <a:solidFill>
+            <a:srgbClr val="0E3F8C"/>
+          </a:solidFill>
+          <a:ln>
+            <a:noFill/>
+          </a:ln>
+          <a:effectLst/>
+        </p:spPr>
+        <p:style>
+          <a:lnRef idx="1">
+            <a:schemeClr val="accent1"/>
+          </a:lnRef>
+          <a:fillRef idx="3">
+            <a:schemeClr val="accent1"/>
+          </a:fillRef>
+          <a:effectRef idx="2">
+            <a:schemeClr val="accent1"/>
+          </a:effectRef>
+          <a:fontRef idx="minor">
+            <a:schemeClr val="lt1"/>
+          </a:fontRef>
+        </p:style>
+        <p:txBody>
+          <a:bodyPr rtlCol="0" anchor="ctr"/>
+          <a:lstStyle/>
+          <a:p>
+            <a:pPr algn="ctr"/>
+          </a:p>
+        </p:txBody>
+      </p:sp>
+      <p:sp>
+        <p:nvSpPr>
+          <p:cNvPr id="117" name="TextBox 116"/>
+          <p:cNvSpPr txBox="1"/>
+          <p:nvPr/>
+        </p:nvSpPr>
+        <p:spPr>
+          <a:xfrm>
+            <a:off x="566928" y="5239512"/>
+            <a:ext cx="11064240" cy="219456"/>
+          </a:xfrm>
+          <a:prstGeom prst="rect">
+            <a:avLst/>
+          </a:prstGeom>
+          <a:noFill/>
+        </p:spPr>
+        <p:txBody>
+          <a:bodyPr wrap="square" lIns="0" rIns="0" tIns="0" bIns="0">
+            <a:spAutoFit/>
+          </a:bodyPr>
+          <a:lstStyle/>
+          <a:p>
+            <a:pPr algn="ctr"/>
+            <a:r>
+              <a:rPr sz="1100" b="0" i="0">
+                <a:solidFill>
+                  <a:srgbClr val="FFFFFF"/>
+                </a:solidFill>
+                <a:latin typeface="微软雅黑"/>
+              </a:rPr>
+              <a:t>工程体量：后端 37,872 行 · 前端 40,169 行 · 自动化测试 2,847 个（149 文件） · 能力插件 27 个 · CI 门禁与发布流程齐全 · 已在 GitHub 开源</a:t>
+            </a:r>
+          </a:p>
+        </p:txBody>
+      </p:sp>
+      <p:sp>
+        <p:nvSpPr>
+          <p:cNvPr id="118" name="Rounded Rectangle 117"/>
+          <p:cNvSpPr/>
+          <p:nvPr/>
+        </p:nvSpPr>
+        <p:spPr>
+          <a:xfrm>
+            <a:off x="384048" y="5596128"/>
+            <a:ext cx="11420856" cy="402336"/>
+          </a:xfrm>
+          <a:prstGeom prst="roundRect">
+            <a:avLst>
+              <a:gd name="adj" fmla="val 6000"/>
             </a:avLst>
           </a:prstGeom>
           <a:solidFill>
             <a:srgbClr val="E8EFF8"/>
           </a:solidFill>
-          <a:ln/>
-        </p:spPr>
-        <p:txBody>
-          <a:bodyPr/>
-          <a:p/>
-        </p:txBody>
-      </p:sp>
-      <p:sp>
-        <p:nvSpPr>
-          <p:cNvPr id="93" name=""/>
-          <p:cNvSpPr/>
-          <p:nvPr/>
-        </p:nvSpPr>
-        <p:spPr>
-          <a:xfrm rot="0" flipH="0" flipV="0">
-            <a:off x="295275" y="4895850"/>
-            <a:ext cx="11696700" cy="819150"/>
-          </a:xfrm>
-          <a:custGeom>
-            <a:pathLst>
-              <a:path w="1228" h="86">
-                <a:moveTo>
-                  <a:pt x="10" y="0"/>
-                </a:moveTo>
-                <a:cubicBezTo>
-                  <a:pt x="7" y="0"/>
-                  <a:pt x="5" y="2"/>
-                  <a:pt x="5" y="5"/>
-                </a:cubicBezTo>
-                <a:lnTo>
-                  <a:pt x="5" y="81"/>
-                </a:lnTo>
-                <a:cubicBezTo>
-                  <a:pt x="5" y="83"/>
-                  <a:pt x="7" y="85"/>
-                  <a:pt x="9" y="86"/>
-                </a:cubicBezTo>
-                <a:cubicBezTo>
-                  <a:pt x="4" y="85"/>
-                  <a:pt x="0" y="81"/>
-                  <a:pt x="0" y="76"/>
-                </a:cubicBezTo>
-                <a:lnTo>
-                  <a:pt x="0" y="10"/>
-                </a:lnTo>
-                <a:cubicBezTo>
-                  <a:pt x="0" y="5"/>
-                  <a:pt x="4" y="0"/>
-                  <a:pt x="10" y="0"/>
-                </a:cubicBezTo>
-                <a:close/>
-              </a:path>
-            </a:pathLst>
-          </a:custGeom>
-          <a:solidFill>
-            <a:srgbClr val="1E4FA8"/>
-          </a:solidFill>
-          <a:ln/>
-        </p:spPr>
-        <p:txBody>
-          <a:bodyPr/>
-          <a:p/>
-        </p:txBody>
-      </p:sp>
-      <p:sp>
-        <p:nvSpPr>
-          <p:cNvPr id="94" name="" descr="{&quot;isTemplate&quot;:true,&quot;type&quot;:&quot;text&quot;}"/>
+          <a:ln w="9525">
+            <a:solidFill>
+              <a:srgbClr val="1E4FA8"/>
+            </a:solidFill>
+          </a:ln>
+          <a:effectLst/>
+        </p:spPr>
+        <p:style>
+          <a:lnRef idx="1">
+            <a:schemeClr val="accent1"/>
+          </a:lnRef>
+          <a:fillRef idx="3">
+            <a:schemeClr val="accent1"/>
+          </a:fillRef>
+          <a:effectRef idx="2">
+            <a:schemeClr val="accent1"/>
+          </a:effectRef>
+          <a:fontRef idx="minor">
+            <a:schemeClr val="lt1"/>
+          </a:fontRef>
+        </p:style>
+        <p:txBody>
+          <a:bodyPr rtlCol="0" anchor="ctr"/>
+          <a:lstStyle/>
+          <a:p>
+            <a:pPr algn="ctr"/>
+          </a:p>
+        </p:txBody>
+      </p:sp>
+      <p:sp>
+        <p:nvSpPr>
+          <p:cNvPr id="119" name="TextBox 118"/>
           <p:cNvSpPr txBox="1"/>
           <p:nvPr/>
         </p:nvSpPr>
         <p:spPr>
-          <a:xfrm rot="0" flipH="0" flipV="0">
-            <a:off x="428625" y="5029200"/>
-            <a:ext cx="11382375" cy="552450"/>
-          </a:xfrm>
-          <a:prstGeom prst="rect"/>
-        </p:spPr>
-        <p:txBody>
-          <a:bodyPr wrap="square" lIns="0" tIns="0" rIns="0" bIns="0">
-            <a:normAutofit/>
+          <a:xfrm>
+            <a:off x="566928" y="5687568"/>
+            <a:ext cx="11064240" cy="237744"/>
+          </a:xfrm>
+          <a:prstGeom prst="rect">
+            <a:avLst/>
+          </a:prstGeom>
+          <a:noFill/>
+        </p:spPr>
+        <p:txBody>
+          <a:bodyPr wrap="square" lIns="0" rIns="0" tIns="0" bIns="0">
+            <a:spAutoFit/>
           </a:bodyPr>
+          <a:lstStyle/>
           <a:p>
-            <a:pPr>
-              <a:lnSpc>
-                <a:spcPct val="170000"/>
-              </a:lnSpc>
-            </a:pPr>
-            <a:r>
-              <a:rPr lang="zh-CN" sz="1050">
-                <a:solidFill>
-                  <a:srgbClr val="1A2230"/>
-                </a:solidFill>
-                <a:latin typeface="Microsoft YaHei"/>
-                <a:ea typeface="Microsoft YaHei"/>
-              </a:rPr>
-              <a:t>说明</a:t>
-            </a:r>
-            <a:r>
-              <a:rPr lang="zh-CN" sz="1050">
-                <a:solidFill>
-                  <a:srgbClr val="1A2230"/>
-                </a:solidFill>
-                <a:latin typeface="Microsoft YaHei"/>
-                <a:ea typeface="Microsoft YaHei"/>
-              </a:rPr>
-              <a:t>：以上为本项目的</a:t>
-            </a:r>
-            <a:r>
-              <a:rPr lang="zh-CN" sz="1050">
-                <a:solidFill>
-                  <a:srgbClr val="1A2230"/>
-                </a:solidFill>
-                <a:latin typeface="Microsoft YaHei"/>
-                <a:ea typeface="Microsoft YaHei"/>
-              </a:rPr>
-              <a:t>前期工作积累</a:t>
-            </a:r>
-            <a:r>
-              <a:rPr lang="zh-CN" sz="1050">
-                <a:solidFill>
-                  <a:srgbClr val="1A2230"/>
-                </a:solidFill>
-                <a:latin typeface="Microsoft YaHei"/>
-                <a:ea typeface="Microsoft YaHei"/>
-              </a:rPr>
-              <a:t>，是项目可行性的直接证据，</a:t>
-            </a:r>
-            <a:r>
-              <a:rPr lang="en-US" sz="1050">
-                <a:solidFill>
-                  <a:srgbClr val="1A2230"/>
-                </a:solidFill>
-                <a:latin typeface="Microsoft YaHei"/>
-                <a:ea typeface="Microsoft YaHei"/>
-              </a:rPr>
-              <a:t xml:space="preserve"> </a:t>
-            </a:r>
-            <a:r>
-              <a:rPr lang="zh-CN" sz="1050">
-                <a:solidFill>
-                  <a:srgbClr val="1A2230"/>
-                </a:solidFill>
-                <a:latin typeface="Microsoft YaHei"/>
-                <a:ea typeface="Microsoft YaHei"/>
-              </a:rPr>
-              <a:t>属于项目的前提条件，</a:t>
-            </a:r>
-            <a:r>
-              <a:rPr lang="zh-CN" sz="1050">
-                <a:solidFill>
-                  <a:srgbClr val="1A2230"/>
-                </a:solidFill>
-                <a:latin typeface="Microsoft YaHei"/>
-                <a:ea typeface="Microsoft YaHei"/>
-              </a:rPr>
-              <a:t>不是本项目的研究产出</a:t>
-            </a:r>
-            <a:r>
-              <a:rPr lang="zh-CN" sz="1050">
-                <a:solidFill>
-                  <a:srgbClr val="1A2230"/>
-                </a:solidFill>
-                <a:latin typeface="Microsoft YaHei"/>
-                <a:ea typeface="Microsoft YaHei"/>
-              </a:rPr>
-              <a:t>。</a:t>
-            </a:r>
-            <a:r>
-              <a:rPr lang="en-US" sz="1050">
-                <a:solidFill>
-                  <a:srgbClr val="1A2230"/>
-                </a:solidFill>
-                <a:latin typeface="Microsoft YaHei"/>
-                <a:ea typeface="Microsoft YaHei"/>
-              </a:rPr>
-              <a:t xml:space="preserve"> </a:t>
-            </a:r>
-            <a:r>
-              <a:rPr lang="zh-CN" sz="1050">
-                <a:solidFill>
-                  <a:srgbClr val="1A2230"/>
-                </a:solidFill>
-                <a:latin typeface="Microsoft YaHei"/>
-                <a:ea typeface="Microsoft YaHei"/>
-              </a:rPr>
-              <a:t>工程化配套齐全：完整的</a:t>
-            </a:r>
-            <a:r>
-              <a:rPr lang="en-US" sz="1050">
-                <a:solidFill>
-                  <a:srgbClr val="1A2230"/>
-                </a:solidFill>
-                <a:latin typeface="Microsoft YaHei"/>
-                <a:ea typeface="Microsoft YaHei"/>
-              </a:rPr>
-              <a:t xml:space="preserve"> CI </a:t>
-            </a:r>
-            <a:r>
-              <a:rPr lang="zh-CN" sz="1050">
-                <a:solidFill>
-                  <a:srgbClr val="1A2230"/>
-                </a:solidFill>
-                <a:latin typeface="Microsoft YaHei"/>
-                <a:ea typeface="Microsoft YaHei"/>
-              </a:rPr>
-              <a:t>门禁、发布流程、插件化架构，代码已在</a:t>
-            </a:r>
-            <a:r>
-              <a:rPr lang="en-US" sz="1050">
-                <a:solidFill>
-                  <a:srgbClr val="1A2230"/>
-                </a:solidFill>
-                <a:latin typeface="Microsoft YaHei"/>
-                <a:ea typeface="Microsoft YaHei"/>
-              </a:rPr>
-              <a:t xml:space="preserve"> GitHub </a:t>
-            </a:r>
-            <a:r>
-              <a:rPr lang="zh-CN" sz="1050">
-                <a:solidFill>
-                  <a:srgbClr val="1A2230"/>
-                </a:solidFill>
-                <a:latin typeface="Microsoft YaHei"/>
-                <a:ea typeface="Microsoft YaHei"/>
-              </a:rPr>
-              <a:t>开源。</a:t>
-            </a:r>
-            <a:endParaRPr/>
-          </a:p>
-        </p:txBody>
-      </p:sp>
-      <p:sp>
-        <p:nvSpPr>
-          <p:cNvPr id="95" name="" descr="{&quot;isTemplate&quot;:true,&quot;type&quot;:&quot;text&quot;}"/>
-          <p:cNvSpPr txBox="1"/>
-          <p:nvPr/>
-        </p:nvSpPr>
-        <p:spPr>
-          <a:xfrm rot="0" flipH="0" flipV="0">
-            <a:off x="381000" y="6486525"/>
-            <a:ext cx="11811000" cy="171450"/>
-          </a:xfrm>
-          <a:prstGeom prst="rect"/>
-        </p:spPr>
-        <p:txBody>
-          <a:bodyPr wrap="none" lIns="0" tIns="0" rIns="0" bIns="0"/>
-          <a:p>
-            <a:pPr>
-              <a:lnSpc>
-                <a:spcPct val="100000"/>
-              </a:lnSpc>
-            </a:pPr>
-            <a:r>
-              <a:rPr lang="zh-CN" sz="1125">
-                <a:solidFill>
-                  <a:srgbClr val="8B97A8"/>
-                </a:solidFill>
-                <a:latin typeface="Microsoft YaHei"/>
-                <a:ea typeface="Microsoft YaHei"/>
-              </a:rPr>
-              <a:t>韩山师范学院</a:t>
-            </a:r>
-            <a:r>
-              <a:rPr lang="en-US" sz="1125">
-                <a:solidFill>
-                  <a:srgbClr val="8B97A8"/>
-                </a:solidFill>
-                <a:latin typeface="Microsoft YaHei"/>
-                <a:ea typeface="Microsoft YaHei"/>
-              </a:rPr>
-              <a:t xml:space="preserve"> · </a:t>
-            </a:r>
-            <a:r>
-              <a:rPr lang="zh-CN" sz="1125">
-                <a:solidFill>
-                  <a:srgbClr val="8B97A8"/>
-                </a:solidFill>
-                <a:latin typeface="Microsoft YaHei"/>
-                <a:ea typeface="Microsoft YaHei"/>
-              </a:rPr>
-              <a:t>大学生创新创业训练项目　　</a:t>
-            </a:r>
-            <a:r>
-              <a:rPr lang="en-US" sz="1125">
-                <a:solidFill>
-                  <a:srgbClr val="8B97A8"/>
-                </a:solidFill>
-                <a:latin typeface="Microsoft YaHei"/>
-                <a:ea typeface="Microsoft YaHei"/>
-              </a:rPr>
-              <a:t>13 / 18</a:t>
-            </a:r>
-            <a:r>
-              <a:rPr lang="zh-CN" sz="1125">
-                <a:solidFill>
-                  <a:srgbClr val="8B97A8"/>
-                </a:solidFill>
-                <a:latin typeface="Microsoft YaHei"/>
-                <a:ea typeface="Microsoft YaHei"/>
-              </a:rPr>
-              <a:t>　│　注：均标注为本机实测数据</a:t>
-            </a:r>
-            <a:endParaRPr/>
+            <a:pPr algn="l"/>
+            <a:r>
+              <a:rPr sz="1100" b="0" i="0">
+                <a:solidFill>
+                  <a:srgbClr val="1A2230"/>
+                </a:solidFill>
+                <a:latin typeface="微软雅黑"/>
+              </a:rPr>
+              <a:t>说明：以上为本项目的前期工作积累，是可行性的直接证据，属于项目的前提条件，不是本项目的研究产出。</a:t>
+            </a:r>
           </a:p>
         </p:txBody>
       </p:sp>
@@ -15458,7 +14685,7 @@
   <p:cSld>
     <p:spTree>
       <p:nvGrpSpPr>
-        <p:cNvPr id="156" name="" descr="&lt;Slide style={{ padding: 0, background: '#0E3F8C' }}&gt;&#10;  &lt;Box style={{ height: 720, justifyContent: 'center', paddingLeft: 80, paddingRight: 80 }}&gt;&#10;    &lt;Text style={{ fontSize: 42, color: '#FFFFFF', fontWeight: 'bold', lineHeight: 1.4 }}&gt;感谢各位老师审阅&lt;/Text&gt;&#10;    &lt;Box style={{ width: 90, height: 5, background: '#FFC107', marginTop: 22 }} /&gt;&#10;    &lt;Box style={{ background: '#3D7BD9', borderRadius: 10, padding: 20, marginTop: 28, width: '100%' }}&gt;&#10;      &lt;Text style={{ fontSize: 18, color: '#FFFFFF', lineHeight: 1.9 }}&gt;&#10;        &lt;Text style={{ fontWeight: 'bold', color: '#FFC107' }}&gt;项目名称：&lt;/Text&gt;面向职业用嗓人群的本地声音保存与少样本复现质量边界研究{&quot;\n&quot;}&#10;        &lt;Text style={{ fontWeight: 'bold', color: '#FFC107' }}&gt;项目负责人：&lt;/Text&gt;牟旭　　&lt;Text style={{ fontWeight: 'bold', color: '#FFC107' }}&gt;团队成员：&lt;/Text&gt;李河璋　罗文钎　陈宏杰{&quot;\n&quot;}&#10;        &lt;Text style={{ fontWeight: 'bold', color: '#FFC107' }}&gt;指导教师：&lt;/Text&gt;＿＿＿＿＿＿　　&lt;Text style={{ fontWeight: 'bold', color: '#FFC107' }}&gt;所在学院：&lt;/Text&gt;＿＿＿＿＿＿&#10;      &lt;/Text&gt;&#10;    &lt;/Box&gt;&#10;    &lt;Text style={{ fontSize: 17, color: '#C9D8F0', marginTop: 26, lineHeight: 1.8 }}&gt;&#10;      所有语音数据&lt;Text style={{ fontWeight: 'bold', color: '#FFFFFF' }}&gt;全程在本地处理，不上传任何服务器&lt;/Text&gt;。&#10;      本项目为&lt;Text style={{ fontWeight: 'bold', color: '#FFFFFF' }}&gt;研究训练 + 系统集成创新 + 场景落地&lt;/Text&gt;，&#10;      不宣称医疗效果，不使用&quot;首次 / 领先 / 唯一&quot;等表述。&#10;    &lt;/Text&gt;&#10;  &lt;/Box&gt;&#10;&lt;/Slide&gt;&#10;"/>
+        <p:cNvPr id="156" name="" descr="&lt;Slide style={{ padding: 0, background: '#0E3F8C' }}&gt;&#10;  &lt;Box style={{ height: 720, justifyContent: 'center', paddingLeft: 80, paddingRight: 80 }}&gt;&#10;    &lt;Text style={{ fontSize: 42, color: '#FFFFFF', fontWeight: 'bold', lineHeight: 1.4 }}&gt;感谢各位老师审阅&lt;/Text&gt;&#10;    &lt;Box style={{ width: 90, height: 5, background: '#FFC107', marginTop: 22 }} /&gt;&#10;    &lt;Box style={{ background: '#3D7BD9', borderRadius: 10, padding: 20, marginTop: 28, width: '100%' }}&gt;&#10;      &lt;Text style={{ fontSize: 18, color: '#FFFFFF', lineHeight: 1.9 }}&gt;&#10;        &lt;Text style={{ fontWeight: 'bold', color: '#FFC107' }}&gt;项目名称：&lt;/Text&gt;面向录课人群用嗓减负的本地声音复现与质量边界研究{&quot;\n&quot;}&#10;        &lt;Text style={{ fontWeight: 'bold', color: '#FFC107' }}&gt;项目负责人：&lt;/Text&gt;牟旭　　&lt;Text style={{ fontWeight: 'bold', color: '#FFC107' }}&gt;团队成员：&lt;/Text&gt;李河璋　罗文钎　陈宏杰{&quot;\n&quot;}&#10;        &lt;Text style={{ fontWeight: 'bold', color: '#FFC107' }}&gt;指导教师：&lt;/Text&gt;＿＿＿＿＿＿　　&lt;Text style={{ fontWeight: 'bold', color: '#FFC107' }}&gt;所在学院：&lt;/Text&gt;＿＿＿＿＿＿&#10;      &lt;/Text&gt;&#10;    &lt;/Box&gt;&#10;    &lt;Text style={{ fontSize: 17, color: '#C9D8F0', marginTop: 26, lineHeight: 1.8 }}&gt;&#10;      所有语音数据&lt;Text style={{ fontWeight: 'bold', color: '#FFFFFF' }}&gt;全程在本地处理，不上传任何服务器&lt;/Text&gt;。&#10;      本项目为&lt;Text style={{ fontWeight: 'bold', color: '#FFFFFF' }}&gt;研究训练 + 系统集成创新 + 场景落地&lt;/Text&gt;，&#10;      不宣称医疗效果，不使用&quot;首次 / 领先 / 唯一&quot;等表述。&#10;    &lt;/Text&gt;&#10;  &lt;/Box&gt;&#10;&lt;/Slide&gt;&#10;"/>
         <p:cNvGrpSpPr/>
         <p:nvPr/>
       </p:nvGrpSpPr>
@@ -15618,7 +14845,7 @@
                 <a:latin typeface="Microsoft YaHei"/>
                 <a:ea typeface="Microsoft YaHei"/>
               </a:rPr>
-              <a:t>面向职业用嗓人群的本地声音保存与少样本复现质量边界研究</a:t>
+              <a:t>面向录课人群用嗓减负的本地声音复现与质量边界研究</a:t>
             </a:r>
             <a:endParaRPr/>
           </a:p>
@@ -17981,7 +17208,7 @@
   <p:cSld>
     <p:spTree>
       <p:nvGrpSpPr>
-        <p:cNvPr id="205" name="" descr="&lt;Slide style={{ padding: 0, background: '#FFFFFF' }}&gt;&#10;  &lt;Box style={{ height: 80, background: '#0E3F8C', justifyContent: 'center', paddingLeft: 40, flexDirection: 'row', alignItems: 'center', gap: 16 }}&gt;&#10;    &lt;Text style={{ fontSize: 28, color: '#FFFFFF', fontWeight: 'bold' }}&gt;一、项目概述&lt;/Text&gt;&#10;    &lt;Text style={{ fontSize: 15, color: '#C9D8F0' }}&gt;官方要求第 1 项 · 一段话说清是什么&lt;/Text&gt;&#10;  &lt;/Box&gt;&#10;  &lt;Box style={{ height: 580, padding: 32, gap: 18 }}&gt;&#10;    &lt;Box style={{ background: '#F0F5FC', borderRadius: 12, padding: 24, borderLeft: '6px solid #1E4FA8' }}&gt;&#10;      &lt;Text style={{ fontSize: 19, color: '#0E3F8C', fontWeight: 'bold' }}&gt;本项目做什么&lt;/Text&gt;&#10;      &lt;Text style={{ fontSize: 17, color: '#1A2230', marginTop: 10, lineHeight: 1.85 }}&gt;&#10;        面向&lt;Text style={{ fontWeight: 'bold', color: '#0E3F8C' }}&gt;职业用嗓人群&lt;/Text&gt;（教师、师范生、播音主持、客服等）&#10;        不可逆嗓音损失的风险，研究&lt;Text style={{ fontWeight: 'bold', color: '#0E3F8C' }}&gt;本地离线、秒级参考音&lt;/Text&gt;条件下的&#10;        &lt;Text style={{ fontWeight: 'bold', color: '#0E3F8C' }}&gt;声音保存与复现质量边界&lt;/Text&gt;问题——&#10;        即&quot;&lt;Text style={{ color: '#D9534F', fontWeight: 'bold' }}&gt;给克隆系统多少秒参考音，才能复现出可接受的声音&lt;/Text&gt;&quot;，&#10;        并回答&quot;&lt;Text style={{ color: '#D9534F', fontWeight: 'bold' }}&gt;客观声学指标能否替代人工听测&lt;/Text&gt;&quot;这一方法论问题。&#10;      &lt;/Text&gt;&#10;    &lt;/Box&gt;&#10;    &lt;Box style={{ flexDirection: 'row', gap: 18, flex: 1 }}&gt;&#10;      &lt;Box style={{ flex: 1, background: '#FFFFFF', border: '2px solid #D6DCE5', borderRadius: 12, padding: 20 }}&gt;&#10;        &lt;Text style={{ fontSize: 19, color: '#D9534F', fontWeight: 'bold' }}&gt;✕ 我们不做&lt;/Text&gt;&#10;        &lt;Text style={{ fontSize: 16, color: '#4A5568', marginTop: 10, lineHeight: 1.9 }}&gt;&#10;          · 不发明新的大模型{&quot;\n&quot;}&#10;          · 不追求模型层面的原创{&quot;\n&quot;}&#10;          · 不做&quot;产品 / 商业&quot;叙事{&quot;\n&quot;}&#10;          · 不宣称任何医疗效果&#10;        &lt;/Text&gt;&#10;      &lt;/Box&gt;&#10;      &lt;Box style={{ flex: 1, background: '#E8EFF8', border: '2px solid #1E4FA8', borderRadius: 12, padding: 20 }}&gt;&#10;        &lt;Text style={{ fontSize: 19, color: '#1E4FA8', fontWeight: 'bold' }}&gt;✓ 我们做&lt;/Text&gt;&#10;        &lt;Text style={{ fontSize: 16, color: '#1A2230', marginTop: 10, lineHeight: 1.9 }}&gt;&#10;          · 把已有成熟模型工程化为{&quot;\n&quot;}　&lt;Text style={{ fontWeight: 'bold' }}&gt;可控、可复现的实验平台&lt;/Text&gt;{&quot;\n&quot;}&#10;          · 用严格协议测量「质量—代价」{&quot;\n&quot;}　的真实关系{&quot;\n&quot;}&#10;          · 把测量结果反哺为&lt;Text style={{ fontWeight: 'bold' }}&gt;自动质量门禁&lt;/Text&gt;&#10;        &lt;/Text&gt;&#10;      &lt;/Box&gt;&#10;    &lt;/Box&gt;&#10;    &lt;Box style={{ background: '#0E3F8C', borderRadius: 12, padding: 18 }}&gt;&#10;      &lt;Text style={{ fontSize: 17, color: '#FFFFFF', lineHeight: 1.7 }}&gt;&#10;        核心价值：把&quot;&lt;Text style={{ color: '#FFC107' }}&gt;能不能用&lt;/Text&gt;&quot;（凭感觉）转化为&#10;        &quot;&lt;Text style={{ color: '#FFC107' }}&gt;在什么条件下、以什么代价可用&lt;/Text&gt;&quot;（&lt;Text style={{ fontWeight: 'bold' }}&gt;用数据回答&lt;/Text&gt;）。&#10;      &lt;/Text&gt;&#10;    &lt;/Box&gt;&#10;  &lt;/Box&gt;&#10;  &lt;Box style={{ height: 60, justifyContent: 'center', paddingLeft: 40 }}&gt;&#10;    &lt;Text style={{ fontSize: 15, color: '#8B97A8' }}&gt;韩山师范学院 · 大学生创新创业训练项目　　04 / 18&lt;/Text&gt;&#10;  &lt;/Box&gt;&#10;&lt;/Slide&gt;&#10;"/>
+        <p:cNvPr id="205" name="" descr="&lt;Slide style={{ padding: 0, background: '#FFFFFF' }}&gt;&#10;  &lt;Box style={{ height: 80, background: '#0E3F8C', justifyContent: 'center', paddingLeft: 40, flexDirection: 'row', alignItems: 'center', gap: 16 }}&gt;&#10;    &lt;Text style={{ fontSize: 28, color: '#FFFFFF', fontWeight: 'bold' }}&gt;一、项目概述&lt;/Text&gt;&#10;    &lt;Text style={{ fontSize: 15, color: '#C9D8F0' }}&gt;官方要求第 1 项 · 一段话说清是什么&lt;/Text&gt;&#10;  &lt;/Box&gt;&#10;  &lt;Box style={{ height: 580, padding: 32, gap: 18 }}&gt;&#10;    &lt;Box style={{ background: '#F0F5FC', borderRadius: 12, padding: 24, borderLeft: '6px solid #1E4FA8' }}&gt;&#10;      &lt;Text style={{ fontSize: 19, color: '#0E3F8C', fontWeight: 'bold' }}&gt;本项目做什么&lt;/Text&gt;&#10;      &lt;Text style={{ fontSize: 17, color: '#1A2230', marginTop: 10, lineHeight: 1.85 }}&gt;&#10;        面向&lt;Text style={{ fontWeight: 'bold', color: '#0E3F8C' }}&gt;录课与职业用嗓人群（教师、师范生、播音主持、客服等）&#10;        不可逆嗓音损失的风险，研究&lt;Text style={{ fontWeight: 'bold', color: '#0E3F8C' }}&gt;本地离线、秒级参考音&lt;/Text&gt;条件下的&#10;        &lt;Text style={{ fontWeight: 'bold', color: '#0E3F8C' }}&gt;声音复现质量边界&lt;/Text&gt;问题——&#10;        即&quot;&lt;Text style={{ color: '#D9534F', fontWeight: 'bold' }}&gt;给克隆系统多少秒参考音，才能复现出可接受的声音&lt;/Text&gt;&quot;，&#10;        并回答&quot;&lt;Text style={{ color: '#D9534F', fontWeight: 'bold' }}&gt;客观声学指标能否替代人工听测&lt;/Text&gt;&quot;这一方法论问题。&#10;      &lt;/Text&gt;&#10;    &lt;/Box&gt;&#10;    &lt;Box style={{ flexDirection: 'row', gap: 18, flex: 1 }}&gt;&#10;      &lt;Box style={{ flex: 1, background: '#FFFFFF', border: '2px solid #D6DCE5', borderRadius: 12, padding: 20 }}&gt;&#10;        &lt;Text style={{ fontSize: 19, color: '#D9534F', fontWeight: 'bold' }}&gt;✕ 我们不做&lt;/Text&gt;&#10;        &lt;Text style={{ fontSize: 16, color: '#4A5568', marginTop: 10, lineHeight: 1.9 }}&gt;&#10;          · 不发明新的大模型{&quot;\n&quot;}&#10;          · 不追求模型层面的原创{&quot;\n&quot;}&#10;          · 不做&quot;产品 / 商业&quot;叙事{&quot;\n&quot;}&#10;          · 不宣称任何医疗效果&#10;        &lt;/Text&gt;&#10;      &lt;/Box&gt;&#10;      &lt;Box style={{ flex: 1, background: '#E8EFF8', border: '2px solid #1E4FA8', borderRadius: 12, padding: 20 }}&gt;&#10;        &lt;Text style={{ fontSize: 19, color: '#1E4FA8', fontWeight: 'bold' }}&gt;✓ 我们做&lt;/Text&gt;&#10;        &lt;Text style={{ fontSize: 16, color: '#1A2230', marginTop: 10, lineHeight: 1.9 }}&gt;&#10;          · 把已有成熟模型工程化为{&quot;\n&quot;}　&lt;Text style={{ fontWeight: 'bold' }}&gt;可控、可复现的实验平台&lt;/Text&gt;{&quot;\n&quot;}&#10;          · 用严格协议测量「质量—代价」{&quot;\n&quot;}　的真实关系{&quot;\n&quot;}&#10;          · 把测量结果反哺为&lt;Text style={{ fontWeight: 'bold' }}&gt;自动质量门禁&lt;/Text&gt;&#10;        &lt;/Text&gt;&#10;      &lt;/Box&gt;&#10;    &lt;/Box&gt;&#10;    &lt;Box style={{ background: '#0E3F8C', borderRadius: 12, padding: 18 }}&gt;&#10;      &lt;Text style={{ fontSize: 17, color: '#FFFFFF', lineHeight: 1.7 }}&gt;&#10;        核心价值：把&quot;&lt;Text style={{ color: '#FFC107' }}&gt;能不能用&lt;/Text&gt;&quot;（凭感觉）转化为&#10;        &quot;&lt;Text style={{ color: '#FFC107' }}&gt;在什么条件下、以什么代价可用&lt;/Text&gt;&quot;（&lt;Text style={{ fontWeight: 'bold' }}&gt;用数据回答&lt;/Text&gt;）。&#10;      &lt;/Text&gt;&#10;    &lt;/Box&gt;&#10;  &lt;/Box&gt;&#10;  &lt;Box style={{ height: 60, justifyContent: 'center', paddingLeft: 40 }}&gt;&#10;    &lt;Text style={{ fontSize: 15, color: '#8B97A8' }}&gt;韩山师范学院 · 大学生创新创业训练项目　　04 / 18&lt;/Text&gt;&#10;  &lt;/Box&gt;&#10;&lt;/Slide&gt;&#10;"/>
         <p:cNvGrpSpPr/>
         <p:nvPr/>
       </p:nvGrpSpPr>
@@ -18302,7 +17529,7 @@
             </a:r>
             <a:r>
               <a:rPr b="0" sz="1600"/>
-              <a:t>声音克隆当前多服务于创作与娱乐，而职业用嗓人群面临的是不可逆的嗓音损失风险——他们需要的不是“像不像”，而是</a:t>
+              <a:t>录课、网课是教师与师范生的日常，连续讲解与反复重录让用嗓负担真实存在——他们需要的不是“像不像”，而是</a:t>
             </a:r>
             <a:r>
               <a:rPr b="1" sz="1600">
@@ -18310,7 +17537,7 @@
                   <a:srgbClr val="D9534F"/>
                 </a:solidFill>
               </a:rPr>
-              <a:t>在负担得起的前提下把声音保存下来</a:t>
+              <a:t>用我自己的声音把课录出来</a:t>
             </a:r>
             <a:r>
               <a:rPr b="0" sz="1600"/>
@@ -18329,11 +17556,11 @@
             </a:r>
             <a:r>
               <a:rPr b="0" sz="1600"/>
-              <a:t>把“声音保存”从玩具重新定位为</a:t>
+              <a:t>把“声音复现”从玩具重新定位为</a:t>
             </a:r>
             <a:r>
               <a:rPr b="1" sz="1600"/>
-              <a:t>面向该人群的实用工具</a:t>
+              <a:t>面向录课减负的实用工具</a:t>
             </a:r>
             <a:r>
               <a:rPr b="0" sz="1600"/>
@@ -18616,7 +17843,7 @@
             </a:r>
             <a:r>
               <a:rPr b="0"/>
-              <a:t>：以职业用嗓者的真实负担为设计起点</a:t>
+              <a:t>：以录课人群的用嗓减负需求为设计起点</a:t>
             </a:r>
             <a:endParaRPr/>
           </a:p>
@@ -22043,7 +21270,7 @@
   <p:cSld>
     <p:spTree>
       <p:nvGrpSpPr>
-        <p:cNvPr id="264" name="" descr="&lt;Slide style={{ padding: 0, background: '#FFFFFF' }}&gt;&#10;  &lt;Box style={{ height: 80, background: '#0E3F8C', justifyContent: 'center', paddingLeft: 40, flexDirection: 'row', alignItems: 'center', gap: 16 }}&gt;&#10;    &lt;Text style={{ fontSize: 28, color: '#FFFFFF', fontWeight: 'bold' }}&gt;二、目的意义与技术水平&lt;/Text&gt;&#10;    &lt;Text style={{ fontSize: 15, color: '#C9D8F0' }}&gt;技术水平 = 可核验的硬数字&lt;/Text&gt;&#10;  &lt;/Box&gt;&#10;  &lt;Box style={{ height: 580, flexDirection: 'row', padding: 30, gap: 24 }}&gt;&#10;    &lt;Box style={{ width: '38%', background: '#F0F5FC', borderRadius: 12, padding: 22, borderLeft: '6px solid #1E4FA8' }}&gt;&#10;      &lt;Text style={{ fontSize: 21, color: '#0E3F8C', fontWeight: 'bold' }}&gt;目的与意义&lt;/Text&gt;&#10;      &lt;Text style={{ fontSize: 15, color: '#1A2230', marginTop: 12, lineHeight: 1.95 }}&gt;&#10;        &lt;Text style={{ fontWeight: 'bold', color: '#1E4FA8' }}&gt;目的&lt;/Text&gt;{&quot;\n&quot;}&#10;        建立一套可复现的测量方法，回答&quot;本地离线、秒级参考音条件下的声音复现质量边界&quot;，并给出面向普通用户的可操作结论。&lt;Text style={{ color: '#D9534F', fontWeight: 'bold' }}&gt;（要保存声音，最少录多久？）&lt;/Text&gt;{&quot;\n\n&quot;}&#10;        &lt;Text style={{ fontWeight: 'bold', color: '#1E4FA8' }}&gt;意义&lt;/Text&gt;{&quot;\n&quot;}&#10;        · 对职业用嗓人群：提供不依赖网络与特定设备的保存路径{&quot;\n&quot;}&#10;        · 对研究方法：补充系统性、控制变量的实验数据{&quot;\n&quot;}&#10;        · 对教学场景：微课配音的本地化、离线化生产{&quot;\n&quot;}&#10;        · 对人才培养：完整的研究训练全链条&#10;      &lt;/Text&gt;&#10;    &lt;/Box&gt;&#10;    &lt;Box style={{ flex: 1, gap: 12 }}&gt;&#10;      &lt;Text style={{ fontSize: 21, color: '#0E3F8C', fontWeight: 'bold' }}&gt;技术水平 —— 前期积累已达水平（本机实测）&lt;/Text&gt;&#10;      &lt;Box style={{ flexDirection: 'row', gap: 12, height: 112 }}&gt;&#10;        &lt;Box style={{ flex: 1, background: '#0E3F8C', borderRadius: 10, padding: 14, justifyContent: 'center' }}&gt;&#10;          &lt;Text style={{ fontSize: 38, color: '#FFC107', fontWeight: 'bold' }}&gt;50ms&lt;/Text&gt;&#10;          &lt;Text style={{ fontSize: 13, color: '#C9D8F0', marginTop: 4 }}&gt;端到端延迟 p50{&quot;\n&quot;}RTX 5060 · 消费级 GPU&lt;/Text&gt;&#10;        &lt;/Box&gt;&#10;        &lt;Box style={{ flex: 1, background: '#1E4FA8', borderRadius: 10, padding: 14, justifyContent: 'center' }}&gt;&#10;          &lt;Text style={{ fontSize: 38, color: '#FFFFFF', fontWeight: 'bold' }}&gt;0.53&lt;/Text&gt;&#10;          &lt;Text style={{ fontSize: 13, color: '#C9D8F0', marginTop: 4 }}&gt;实时率 RTF{&quot;\n&quot;}91 句连续合成零失败&lt;/Text&gt;&#10;        &lt;/Box&gt;&#10;        &lt;Box style={{ flex: 1, background: '#3D7BD9', borderRadius: 10, padding: 14, justifyContent: 'center' }}&gt;&#10;          &lt;Text style={{ fontSize: 38, color: '#FFFFFF', fontWeight: 'bold' }}&gt;6/6&lt;/Text&gt;&#10;          &lt;Text style={{ fontSize: 13, color: '#D8E6F8', marginTop: 4 }}&gt;六项可核验指标{&quot;\n&quot;}延迟/实时率/规模/测试&lt;/Text&gt;&#10;        &lt;/Box&gt;&#10;      &lt;/Box&gt;&#10;      &lt;Table&#10;        style={{ width: '100%', height: 220 }}&#10;        defaultTextStyle={{ fontSize: 13, textAlign: 'center', color: '#1A2230' }}&#10;        defaultCellStyle={{ border: { left: { width: 1, color: '#D6DCE5' }, right: { width: 1, color: '#D6DCE5' }, top: { width: 1, color: '#D6DCE5' }, bottom: { width: 1, color: '#D6DCE5' } } }}&#10;        cells={[&#10;          [&#10;            { text: '能力维度', textStyle: { bold: true, color: '#FFFFFF' }, cellStyle: { background: { color: '#1E4FA8' } } },&#10;            { text: '现状', textStyle: { bold: true, color: '#FFFFFF' }, cellStyle: { background: { color: '#1E4FA8' } } },&#10;          ],&#10;          ['实时语音转换延迟', '消费级 GPU 端到端 p50 ≈ 50 ms'],&#10;          [&#10;            { text: '小样本声音克隆', cellStyle: { background: { color: '#F0F5FC' } } },&#10;            { text: 'Qwen3-TTS 已跑通，秒级参考音可生成语音', cellStyle: { background: { color: '#F0F5FC' } } },&#10;          ],&#10;          ['长文本语音合成', '91 句连续合成零失败，RTF 0.53'],&#10;          [&#10;            { text: '客观指标栈', cellStyle: { background: { color: '#F0F5FC' } } },&#10;            { text: 'HNR / H1-H2 / 谱倾斜 / jitter / shimmer 已实现', cellStyle: { background: { color: '#F0F5FC' } } },&#10;          ],&#10;          ['系统规模', '后端 35,667 行 · 前端 36,973 行 · 24 插件 · 1,940 测试'],&#10;          [&#10;            { text: '音频注入任意应用', cellStyle: { background: { color: '#F0F5FC' } } },&#10;            { text: '虚拟声卡路由，微信 / 游戏场景已验证', cellStyle: { background: { color: '#F0F5FC' } } },&#10;          ],&#10;        ]}&#10;      /&gt;&#10;    &lt;/Box&gt;&#10;  &lt;/Box&gt;&#10;  &lt;Box style={{ height: 60, justifyContent: 'center', paddingLeft: 40 }}&gt;&#10;    &lt;Text style={{ fontSize: 15, color: '#8B97A8' }}&gt;韩山师范学院 · 大学生创新创业训练项目　　08 / 18　│　注：以上均为前期基础，非本项目研究成果&lt;/Text&gt;&#10;  &lt;/Box&gt;&#10;&lt;/Slide&gt;&#10;"/>
+        <p:cNvPr id="264" name="" descr="&lt;Slide style={{ padding: 0, background: '#FFFFFF' }}&gt;&#10;  &lt;Box style={{ height: 80, background: '#0E3F8C', justifyContent: 'center', paddingLeft: 40, flexDirection: 'row', alignItems: 'center', gap: 16 }}&gt;&#10;    &lt;Text style={{ fontSize: 28, color: '#FFFFFF', fontWeight: 'bold' }}&gt;二、目的意义与技术水平&lt;/Text&gt;&#10;    &lt;Text style={{ fontSize: 15, color: '#C9D8F0' }}&gt;技术水平 = 可核验的硬数字&lt;/Text&gt;&#10;  &lt;/Box&gt;&#10;  &lt;Box style={{ height: 580, flexDirection: 'row', padding: 30, gap: 24 }}&gt;&#10;    &lt;Box style={{ width: '38%', background: '#F0F5FC', borderRadius: 12, padding: 22, borderLeft: '6px solid #1E4FA8' }}&gt;&#10;      &lt;Text style={{ fontSize: 21, color: '#0E3F8C', fontWeight: 'bold' }}&gt;目的与意义&lt;/Text&gt;&#10;      &lt;Text style={{ fontSize: 15, color: '#1A2230', marginTop: 12, lineHeight: 1.95 }}&gt;&#10;        &lt;Text style={{ fontWeight: 'bold', color: '#1E4FA8' }}&gt;目的&lt;/Text&gt;{&quot;\n&quot;}&#10;        建立一套可复现的测量方法，回答&quot;本地离线、秒级参考音条件下的声音复现质量边界&quot;，并给出面向普通用户的可操作结论。&lt;Text style={{ color: '#D9534F', fontWeight: 'bold' }}&gt;（要保存声音，最少录多久？）&lt;/Text&gt;{&quot;\n\n&quot;}&#10;        &lt;Text style={{ fontWeight: 'bold', color: '#1E4FA8' }}&gt;意义&lt;/Text&gt;{&quot;\n&quot;}&#10;        · 对录课与职业用嗓人群：为“用嗓减负”提供不依赖网络与特定设备的本地路径{&quot;\n&quot;}&#10;        · 对研究方法：补充系统性、控制变量的实验数据{&quot;\n&quot;}&#10;        · 对教学场景：微课/网课录制的本地化、离线化生产，提供用嗓减负的技术路径{&quot;\n&quot;}&#10;        · 对人才培养：完整的研究训练全链条&#10;      &lt;/Text&gt;&#10;    &lt;/Box&gt;&#10;    &lt;Box style={{ flex: 1, gap: 12 }}&gt;&#10;      &lt;Text style={{ fontSize: 21, color: '#0E3F8C', fontWeight: 'bold' }}&gt;技术水平 —— 前期积累已达水平（本机实测）&lt;/Text&gt;&#10;      &lt;Box style={{ flexDirection: 'row', gap: 12, height: 112 }}&gt;&#10;        &lt;Box style={{ flex: 1, background: '#0E3F8C', borderRadius: 10, padding: 14, justifyContent: 'center' }}&gt;&#10;          &lt;Text style={{ fontSize: 38, color: '#FFC107', fontWeight: 'bold' }}&gt;50ms&lt;/Text&gt;&#10;          &lt;Text style={{ fontSize: 13, color: '#C9D8F0', marginTop: 4 }}&gt;端到端延迟 p50{&quot;\n&quot;}RTX 5060 · 消费级 GPU&lt;/Text&gt;&#10;        &lt;/Box&gt;&#10;        &lt;Box style={{ flex: 1, background: '#1E4FA8', borderRadius: 10, padding: 14, justifyContent: 'center' }}&gt;&#10;          &lt;Text style={{ fontSize: 38, color: '#FFFFFF', fontWeight: 'bold' }}&gt;0.53&lt;/Text&gt;&#10;          &lt;Text style={{ fontSize: 13, color: '#C9D8F0', marginTop: 4 }}&gt;实时率 RTF{&quot;\n&quot;}91 句连续合成零失败&lt;/Text&gt;&#10;        &lt;/Box&gt;&#10;        &lt;Box style={{ flex: 1, background: '#3D7BD9', borderRadius: 10, padding: 14, justifyContent: 'center' }}&gt;&#10;          &lt;Text style={{ fontSize: 38, color: '#FFFFFF', fontWeight: 'bold' }}&gt;6/6&lt;/Text&gt;&#10;          &lt;Text style={{ fontSize: 13, color: '#D8E6F8', marginTop: 4 }}&gt;六项可核验指标{&quot;\n&quot;}延迟/实时率/规模/测试&lt;/Text&gt;&#10;        &lt;/Box&gt;&#10;      &lt;/Box&gt;&#10;      &lt;Table&#10;        style={{ width: '100%', height: 220 }}&#10;        defaultTextStyle={{ fontSize: 13, textAlign: 'center', color: '#1A2230' }}&#10;        defaultCellStyle={{ border: { left: { width: 1, color: '#D6DCE5' }, right: { width: 1, color: '#D6DCE5' }, top: { width: 1, color: '#D6DCE5' }, bottom: { width: 1, color: '#D6DCE5' } } }}&#10;        cells={[&#10;          [&#10;            { text: '能力维度', textStyle: { bold: true, color: '#FFFFFF' }, cellStyle: { background: { color: '#1E4FA8' } } },&#10;            { text: '现状', textStyle: { bold: true, color: '#FFFFFF' }, cellStyle: { background: { color: '#1E4FA8' } } },&#10;          ],&#10;          ['实时语音转换延迟', '消费级 GPU 端到端 p50 ≈ 50 ms'],&#10;          [&#10;            { text: '小样本声音克隆', cellStyle: { background: { color: '#F0F5FC' } } },&#10;            { text: 'Qwen3-TTS 已跑通，秒级参考音可生成语音', cellStyle: { background: { color: '#F0F5FC' } } },&#10;          ],&#10;          ['长文本语音合成', '91 句连续合成零失败，RTF 0.53'],&#10;          [&#10;            { text: '客观指标栈', cellStyle: { background: { color: '#F0F5FC' } } },&#10;            { text: 'HNR / H1-H2 / 谱倾斜 / jitter / shimmer 已实现', cellStyle: { background: { color: '#F0F5FC' } } },&#10;          ],&#10;          ['系统规模', '后端 35,667 行 · 前端 36,973 行 · 24 插件 · 1,940 测试'],&#10;          [&#10;            { text: '音频注入任意应用', cellStyle: { background: { color: '#F0F5FC' } } },&#10;            { text: '虚拟声卡路由，微信 / 游戏场景已验证', cellStyle: { background: { color: '#F0F5FC' } } },&#10;          ],&#10;        ]}&#10;      /&gt;&#10;    &lt;/Box&gt;&#10;  &lt;/Box&gt;&#10;  &lt;Box style={{ height: 60, justifyContent: 'center', paddingLeft: 40 }}&gt;&#10;    &lt;Text style={{ fontSize: 15, color: '#8B97A8' }}&gt;韩山师范学院 · 大学生创新创业训练项目　　08 / 18　│　注：以上均为前期基础，非本项目研究成果&lt;/Text&gt;&#10;  &lt;/Box&gt;&#10;&lt;/Slide&gt;&#10;"/>
         <p:cNvGrpSpPr/>
         <p:nvPr/>
       </p:nvGrpSpPr>
@@ -22360,7 +21587,7 @@
                 <a:latin typeface="Microsoft YaHei"/>
                 <a:ea typeface="Microsoft YaHei"/>
               </a:rPr>
-              <a:t>把声音保存的关注对象从创作与娱乐场景，转向职业用嗓人群的真实负担，回答“本地离线、秒级参考音条件下的复现质量边界”，并给出面向普通用户的可操作结论。（要保存声音，最少录多久？）</a:t>
+              <a:t>以“减轻录课人群的用嗓负担”为应用定位，回答“本地离线、秒级参考音条件下的声音复现质量边界”，并给出面向普通用户的可操作结论。（用你的声音替你录课，最少录多久？）</a:t>
             </a:r>
             <a:endParaRPr/>
           </a:p>
@@ -22388,7 +21615,7 @@
                 <a:latin typeface="Microsoft YaHei"/>
                 <a:ea typeface="Microsoft YaHei"/>
               </a:rPr>
-              <a:t>对职业用嗓人群：提供不依赖网络与特定设备的保存路径</a:t>
+              <a:t>对录课与职业用嗓人群：为“用嗓减负”提供不依赖网络与特定设备的本地路径</a:t>
             </a:r>
             <a:endParaRPr/>
           </a:p>
@@ -22444,7 +21671,7 @@
                 <a:latin typeface="Microsoft YaHei"/>
                 <a:ea typeface="Microsoft YaHei"/>
               </a:rPr>
-              <a:t>对教学场景：微课配音的本地化、离线化生产</a:t>
+              <a:t>对教学场景：微课/网课录制的本地化、离线化生产，提供用嗓减负的技术路径</a:t>
             </a:r>
             <a:endParaRPr/>
           </a:p>
@@ -24027,7 +23254,7 @@
             </a:r>
             <a:r>
               <a:rPr b="0"/>
-              <a:t>：职业用嗓人群的嗓音损伤真实且高发，而声音一旦失去</a:t>
+              <a:t>：录课等职业用嗓人群以嗓音为工具，嗓音损伤真实且高发，而声音一旦失去</a:t>
             </a:r>
             <a:r>
               <a:rPr b="1"/>

--- a/docs/大创申报-2026-10/大创申报PPT.pptx
+++ b/docs/大创申报-2026-10/大创申报PPT.pptx
@@ -2437,7 +2437,7 @@
                 <a:latin typeface="Microsoft YaHei"/>
                 <a:ea typeface="Microsoft YaHei"/>
               </a:rPr>
-              <a:t>样本规模：</a:t>
+              <a:t>样本规模：12 人 × 4 档 × 4 条件 = 192 个合成样本 + 24 名听测被试。★ 四档为同一段录音按前缀截取，须同一人一次录制完成（故不能用公开语料替代）；每人只需朗读约 65 秒。</a:t>
             </a:r>
             <a:r>
               <a:rPr lang="en-US" sz="1125">
@@ -2447,7 +2447,7 @@
                 <a:latin typeface="Microsoft YaHei"/>
                 <a:ea typeface="Microsoft YaHei"/>
               </a:rPr>
-              <a:t xml:space="preserve">12 </a:t>
+              <a:t xml:space="preserve"/>
             </a:r>
             <a:r>
               <a:rPr lang="zh-CN" sz="1125">
@@ -2457,7 +2457,7 @@
                 <a:latin typeface="Microsoft YaHei"/>
                 <a:ea typeface="Microsoft YaHei"/>
               </a:rPr>
-              <a:t>人</a:t>
+              <a:t/>
             </a:r>
             <a:r>
               <a:rPr lang="en-US" sz="1125">
@@ -2467,7 +2467,7 @@
                 <a:latin typeface="Microsoft YaHei"/>
                 <a:ea typeface="Microsoft YaHei"/>
               </a:rPr>
-              <a:t xml:space="preserve"> × 4 </a:t>
+              <a:t xml:space="preserve"/>
             </a:r>
             <a:r>
               <a:rPr lang="zh-CN" sz="1125">
@@ -2477,7 +2477,7 @@
                 <a:latin typeface="Microsoft YaHei"/>
                 <a:ea typeface="Microsoft YaHei"/>
               </a:rPr>
-              <a:t>档</a:t>
+              <a:t/>
             </a:r>
             <a:r>
               <a:rPr lang="en-US" sz="1125">
@@ -2487,7 +2487,7 @@
                 <a:latin typeface="Microsoft YaHei"/>
                 <a:ea typeface="Microsoft YaHei"/>
               </a:rPr>
-              <a:t xml:space="preserve"> × 4 </a:t>
+              <a:t xml:space="preserve"/>
             </a:r>
             <a:r>
               <a:rPr lang="zh-CN" sz="1125">
@@ -2497,7 +2497,7 @@
                 <a:latin typeface="Microsoft YaHei"/>
                 <a:ea typeface="Microsoft YaHei"/>
               </a:rPr>
-              <a:t>条件</a:t>
+              <a:t/>
             </a:r>
             <a:r>
               <a:rPr lang="en-US" sz="1125">
@@ -2507,7 +2507,7 @@
                 <a:latin typeface="Microsoft YaHei"/>
                 <a:ea typeface="Microsoft YaHei"/>
               </a:rPr>
-              <a:t xml:space="preserve"> = 192 </a:t>
+              <a:t xml:space="preserve"/>
             </a:r>
             <a:r>
               <a:rPr lang="zh-CN" sz="1125">
@@ -2517,7 +2517,7 @@
                 <a:latin typeface="Microsoft YaHei"/>
                 <a:ea typeface="Microsoft YaHei"/>
               </a:rPr>
-              <a:t>个合成样本</a:t>
+              <a:t/>
             </a:r>
             <a:r>
               <a:rPr lang="en-US" sz="1125">
@@ -2527,7 +2527,7 @@
                 <a:latin typeface="Microsoft YaHei"/>
                 <a:ea typeface="Microsoft YaHei"/>
               </a:rPr>
-              <a:t xml:space="preserve"> + 24 </a:t>
+              <a:t xml:space="preserve"/>
             </a:r>
             <a:r>
               <a:rPr lang="zh-CN" sz="1125">
@@ -2537,7 +2537,7 @@
                 <a:latin typeface="Microsoft YaHei"/>
                 <a:ea typeface="Microsoft YaHei"/>
               </a:rPr>
-              <a:t>名听测被试。</a:t>
+              <a:t/>
             </a:r>
             <a:r>
               <a:rPr lang="en-US" sz="1125">
@@ -2547,7 +2547,7 @@
                 <a:latin typeface="Microsoft YaHei"/>
                 <a:ea typeface="Microsoft YaHei"/>
               </a:rPr>
-              <a:t xml:space="preserve">★ </a:t>
+              <a:t xml:space="preserve"/>
             </a:r>
             <a:r>
               <a:rPr lang="zh-CN" sz="1125">
@@ -2557,7 +2557,7 @@
                 <a:latin typeface="Microsoft YaHei"/>
                 <a:ea typeface="Microsoft YaHei"/>
               </a:rPr>
-              <a:t>档位定义是</a:t>
+              <a:t/>
             </a:r>
             <a:r>
               <a:rPr lang="en-US" sz="1125">
@@ -2567,7 +2567,7 @@
                 <a:latin typeface="Microsoft YaHei"/>
                 <a:ea typeface="Microsoft YaHei"/>
               </a:rPr>
-              <a:t>"</a:t>
+              <a:t/>
             </a:r>
             <a:r>
               <a:rPr lang="zh-CN" sz="1125">
@@ -2577,7 +2577,7 @@
                 <a:latin typeface="Microsoft YaHei"/>
                 <a:ea typeface="Microsoft YaHei"/>
               </a:rPr>
-              <a:t>对</a:t>
+              <a:t/>
             </a:r>
             <a:r>
               <a:rPr lang="zh-CN" sz="1125">
@@ -2587,7 +2587,7 @@
                 <a:latin typeface="Microsoft YaHei"/>
                 <a:ea typeface="Microsoft YaHei"/>
               </a:rPr>
-              <a:t>同一段录音</a:t>
+              <a:t/>
             </a:r>
             <a:r>
               <a:rPr lang="zh-CN" sz="1125">
@@ -2597,7 +2597,7 @@
                 <a:latin typeface="Microsoft YaHei"/>
                 <a:ea typeface="Microsoft YaHei"/>
               </a:rPr>
-              <a:t>按顺序截取前</a:t>
+              <a:t/>
             </a:r>
             <a:r>
               <a:rPr lang="en-US" sz="1125">
@@ -2607,7 +2607,7 @@
                 <a:latin typeface="Microsoft YaHei"/>
                 <a:ea typeface="Microsoft YaHei"/>
               </a:rPr>
-              <a:t xml:space="preserve"> N </a:t>
+              <a:t xml:space="preserve"/>
             </a:r>
             <a:r>
               <a:rPr lang="zh-CN" sz="1125">
@@ -2617,7 +2617,7 @@
                 <a:latin typeface="Microsoft YaHei"/>
                 <a:ea typeface="Microsoft YaHei"/>
               </a:rPr>
-              <a:t>秒</a:t>
+              <a:t/>
             </a:r>
             <a:r>
               <a:rPr lang="en-US" sz="1125">
@@ -2627,7 +2627,7 @@
                 <a:latin typeface="Microsoft YaHei"/>
                 <a:ea typeface="Microsoft YaHei"/>
               </a:rPr>
-              <a:t>"——</a:t>
+              <a:t/>
             </a:r>
             <a:r>
               <a:rPr lang="zh-CN" sz="1125">
@@ -2637,7 +2637,7 @@
                 <a:latin typeface="Microsoft YaHei"/>
                 <a:ea typeface="Microsoft YaHei"/>
               </a:rPr>
-              <a:t>这决定了</a:t>
+              <a:t/>
             </a:r>
             <a:r>
               <a:rPr lang="zh-CN" sz="1125">
@@ -2647,7 +2647,7 @@
                 <a:latin typeface="Microsoft YaHei"/>
                 <a:ea typeface="Microsoft YaHei"/>
               </a:rPr>
-              <a:t>必须由同一人在同一条件下一次录制完成</a:t>
+              <a:t/>
             </a:r>
             <a:r>
               <a:rPr lang="zh-CN" sz="1125">
@@ -2657,7 +2657,7 @@
                 <a:latin typeface="Microsoft YaHei"/>
                 <a:ea typeface="Microsoft YaHei"/>
               </a:rPr>
-              <a:t>，</a:t>
+              <a:t/>
             </a:r>
             <a:r>
               <a:rPr lang="en-US" sz="1125">
@@ -2667,7 +2667,7 @@
                 <a:latin typeface="Microsoft YaHei"/>
                 <a:ea typeface="Microsoft YaHei"/>
               </a:rPr>
-              <a:t xml:space="preserve"> </a:t>
+              <a:t xml:space="preserve"/>
             </a:r>
             <a:r>
               <a:rPr lang="zh-CN" sz="1125">
@@ -2677,7 +2677,7 @@
                 <a:latin typeface="Microsoft YaHei"/>
                 <a:ea typeface="Microsoft YaHei"/>
               </a:rPr>
-              <a:t>这也是本项目不能使用公开语料替代的原因。实际录制时每人</a:t>
+              <a:t/>
             </a:r>
             <a:r>
               <a:rPr lang="zh-CN" sz="1125">
@@ -2687,7 +2687,7 @@
                 <a:latin typeface="Microsoft YaHei"/>
                 <a:ea typeface="Microsoft YaHei"/>
               </a:rPr>
-              <a:t>只需连续朗读约</a:t>
+              <a:t/>
             </a:r>
             <a:r>
               <a:rPr lang="en-US" sz="1125">
@@ -2697,7 +2697,7 @@
                 <a:latin typeface="Microsoft YaHei"/>
                 <a:ea typeface="Microsoft YaHei"/>
               </a:rPr>
-              <a:t xml:space="preserve"> 65 </a:t>
+              <a:t xml:space="preserve"/>
             </a:r>
             <a:r>
               <a:rPr lang="zh-CN" sz="1125">
@@ -2707,7 +2707,7 @@
                 <a:latin typeface="Microsoft YaHei"/>
                 <a:ea typeface="Microsoft YaHei"/>
               </a:rPr>
-              <a:t>秒</a:t>
+              <a:t/>
             </a:r>
             <a:r>
               <a:rPr lang="zh-CN" sz="1125">
@@ -2717,7 +2717,7 @@
                 <a:latin typeface="Microsoft YaHei"/>
                 <a:ea typeface="Microsoft YaHei"/>
               </a:rPr>
-              <a:t>。</a:t>
+              <a:t/>
             </a:r>
             <a:endParaRPr/>
           </a:p>
@@ -3236,7 +3236,8 @@
                 <a:latin typeface="Microsoft YaHei"/>
                 <a:ea typeface="Microsoft YaHei"/>
               </a:rPr>
-              <a:t>（属辅助沟通范畴，不涉及任何医疗用途声称）</a:t>
+              <a:t>（属辅助沟通，不涉医疗声称）
+③ 教育教学场景（主打）</a:t>
             </a:r>
             <a:r>
               <a:rPr sz="1050">
@@ -3246,8 +3247,7 @@
                 <a:latin typeface="Microsoft YaHei"/>
                 <a:ea typeface="Microsoft YaHei"/>
               </a:rPr>
-              <a:t xml:space="preserve">
-</a:t>
+              <a:t xml:space="preserve"/>
             </a:r>
             <a:r>
               <a:rPr lang="en-US" sz="1050">
@@ -3257,7 +3257,7 @@
                 <a:latin typeface="Microsoft YaHei"/>
                 <a:ea typeface="Microsoft YaHei"/>
               </a:rPr>
-              <a:t xml:space="preserve">③ </a:t>
+              <a:t xml:space="preserve"/>
             </a:r>
             <a:r>
               <a:rPr lang="zh-CN" sz="1050">
@@ -3267,7 +3267,7 @@
                 <a:latin typeface="Microsoft YaHei"/>
                 <a:ea typeface="Microsoft YaHei"/>
               </a:rPr>
-              <a:t>教育教学场景（主打）</a:t>
+              <a:t/>
             </a:r>
             <a:endParaRPr/>
           </a:p>
@@ -3515,7 +3515,8 @@
                 <a:latin typeface="Microsoft YaHei"/>
                 <a:ea typeface="Microsoft YaHei"/>
               </a:rPr>
-              <a:t>代码已开源并采用插件化架构，第三方可做二次开发或场景适配</a:t>
+              <a:t>代码已开源、插件化架构，第三方可二次开发
+② 离线是刚性需求</a:t>
             </a:r>
             <a:r>
               <a:rPr sz="1050">
@@ -3525,8 +3526,7 @@
                 <a:latin typeface="Microsoft YaHei"/>
                 <a:ea typeface="Microsoft YaHei"/>
               </a:rPr>
-              <a:t xml:space="preserve">
-</a:t>
+              <a:t xml:space="preserve"/>
             </a:r>
             <a:r>
               <a:rPr lang="en-US" sz="1050">
@@ -3536,7 +3536,7 @@
                 <a:latin typeface="Microsoft YaHei"/>
                 <a:ea typeface="Microsoft YaHei"/>
               </a:rPr>
-              <a:t xml:space="preserve">② </a:t>
+              <a:t xml:space="preserve"/>
             </a:r>
             <a:r>
               <a:rPr lang="zh-CN" sz="1050">
@@ -3546,7 +3546,7 @@
                 <a:latin typeface="Microsoft YaHei"/>
                 <a:ea typeface="Microsoft YaHei"/>
               </a:rPr>
-              <a:t>离线是刚性需求</a:t>
+              <a:t/>
             </a:r>
             <a:endParaRPr/>
           </a:p>
@@ -3613,7 +3613,7 @@
                 <a:latin typeface="Microsoft YaHei"/>
                 <a:ea typeface="Microsoft YaHei"/>
               </a:rPr>
-              <a:t>师范生嗓音健康建档与录课减负实践：学生基数大、需求真实、与专业培养相关</a:t>
+              <a:t>师范生嗓音建档与录课减负：学生基数大、需求真实</a:t>
             </a:r>
             <a:endParaRPr/>
           </a:p>
@@ -3714,7 +3714,7 @@
                 <a:latin typeface="Microsoft YaHei"/>
                 <a:ea typeface="Microsoft YaHei"/>
               </a:rPr>
-              <a:t xml:space="preserve">⚠️ </a:t>
+              <a:t xml:space="preserve">⚠️ 不承诺医疗效果；定位为声音保存与辅助沟通</a:t>
             </a:r>
             <a:r>
               <a:rPr lang="zh-CN" sz="975">
@@ -3724,7 +3724,7 @@
                 <a:latin typeface="Microsoft YaHei"/>
                 <a:ea typeface="Microsoft YaHei"/>
               </a:rPr>
-              <a:t>不承诺任何医疗效果；系统定位为</a:t>
+              <a:t/>
             </a:r>
             <a:r>
               <a:rPr lang="zh-CN" sz="975">
@@ -3734,7 +3734,7 @@
                 <a:latin typeface="Microsoft YaHei"/>
                 <a:ea typeface="Microsoft YaHei"/>
               </a:rPr>
-              <a:t>声音的保存与辅助沟通</a:t>
+              <a:t/>
             </a:r>
             <a:r>
               <a:rPr lang="zh-CN" sz="975">
@@ -3744,7 +3744,7 @@
                 <a:latin typeface="Microsoft YaHei"/>
                 <a:ea typeface="Microsoft YaHei"/>
               </a:rPr>
-              <a:t>，而非治疗</a:t>
+              <a:t/>
             </a:r>
             <a:endParaRPr/>
           </a:p>
@@ -3820,7 +3820,7 @@
                 <a:latin typeface="Microsoft YaHei"/>
                 <a:ea typeface="Microsoft YaHei"/>
               </a:rPr>
-              <a:t xml:space="preserve">⚠️ </a:t>
+              <a:t xml:space="preserve">⚠️ 无障碍为在研模块</a:t>
             </a:r>
             <a:r>
               <a:rPr lang="zh-CN" sz="975">
@@ -3830,7 +3830,7 @@
                 <a:latin typeface="Microsoft YaHei"/>
                 <a:ea typeface="Microsoft YaHei"/>
               </a:rPr>
-              <a:t>无障碍方向为</a:t>
+              <a:t/>
             </a:r>
             <a:r>
               <a:rPr lang="zh-CN" sz="975">
@@ -3840,7 +3840,7 @@
                 <a:latin typeface="Microsoft YaHei"/>
                 <a:ea typeface="Microsoft YaHei"/>
               </a:rPr>
-              <a:t>在研模块</a:t>
+              <a:t/>
             </a:r>
             <a:r>
               <a:rPr lang="zh-CN" sz="975">
@@ -3850,7 +3850,7 @@
                 <a:latin typeface="Microsoft YaHei"/>
                 <a:ea typeface="Microsoft YaHei"/>
               </a:rPr>
-              <a:t>，尚未完成产品化验证</a:t>
+              <a:t/>
             </a:r>
             <a:endParaRPr/>
           </a:p>
@@ -3911,7 +3911,7 @@
                 <a:latin typeface="Microsoft YaHei"/>
                 <a:ea typeface="Microsoft YaHei"/>
               </a:rPr>
-              <a:t>结论的通用价值：</a:t>
+              <a:t>结论通用："参考音时长—质量"数据与门禁结论对任何少样本克隆应用都有参考价值。</a:t>
             </a:r>
             <a:r>
               <a:rPr lang="zh-CN" sz="975">
@@ -3921,7 +3921,7 @@
                 <a:latin typeface="Microsoft YaHei"/>
                 <a:ea typeface="Microsoft YaHei"/>
               </a:rPr>
-              <a:t>本研究产出的</a:t>
+              <a:t/>
             </a:r>
             <a:r>
               <a:rPr lang="en-US" sz="975">
@@ -3931,7 +3931,7 @@
                 <a:latin typeface="Microsoft YaHei"/>
                 <a:ea typeface="Microsoft YaHei"/>
               </a:rPr>
-              <a:t>"</a:t>
+              <a:t/>
             </a:r>
             <a:r>
               <a:rPr lang="zh-CN" sz="975">
@@ -3941,7 +3941,7 @@
                 <a:latin typeface="Microsoft YaHei"/>
                 <a:ea typeface="Microsoft YaHei"/>
               </a:rPr>
-              <a:t>参考音时长—质量</a:t>
+              <a:t/>
             </a:r>
             <a:r>
               <a:rPr lang="en-US" sz="975">
@@ -3951,7 +3951,7 @@
                 <a:latin typeface="Microsoft YaHei"/>
                 <a:ea typeface="Microsoft YaHei"/>
               </a:rPr>
-              <a:t>"</a:t>
+              <a:t/>
             </a:r>
             <a:r>
               <a:rPr lang="zh-CN" sz="975">
@@ -3961,7 +3961,7 @@
                 <a:latin typeface="Microsoft YaHei"/>
                 <a:ea typeface="Microsoft YaHei"/>
               </a:rPr>
-              <a:t>数据与</a:t>
+              <a:t/>
             </a:r>
             <a:r>
               <a:rPr lang="en-US" sz="975">
@@ -3971,7 +3971,7 @@
                 <a:latin typeface="Microsoft YaHei"/>
                 <a:ea typeface="Microsoft YaHei"/>
               </a:rPr>
-              <a:t>"</a:t>
+              <a:t/>
             </a:r>
             <a:r>
               <a:rPr lang="zh-CN" sz="975">
@@ -3981,7 +3981,7 @@
                 <a:latin typeface="Microsoft YaHei"/>
                 <a:ea typeface="Microsoft YaHei"/>
               </a:rPr>
-              <a:t>客观指标能否替代听测</a:t>
+              <a:t/>
             </a:r>
             <a:r>
               <a:rPr lang="en-US" sz="975">
@@ -3991,7 +3991,7 @@
                 <a:latin typeface="Microsoft YaHei"/>
                 <a:ea typeface="Microsoft YaHei"/>
               </a:rPr>
-              <a:t>"</a:t>
+              <a:t/>
             </a:r>
             <a:r>
               <a:rPr lang="zh-CN" sz="975">
@@ -4001,7 +4001,7 @@
                 <a:latin typeface="Microsoft YaHei"/>
                 <a:ea typeface="Microsoft YaHei"/>
               </a:rPr>
-              <a:t>的结论，对</a:t>
+              <a:t/>
             </a:r>
             <a:r>
               <a:rPr lang="zh-CN" sz="975">
@@ -4011,7 +4011,7 @@
                 <a:latin typeface="Microsoft YaHei"/>
                 <a:ea typeface="Microsoft YaHei"/>
               </a:rPr>
-              <a:t>任何使用少样本克隆的下游应用都有参考价值</a:t>
+              <a:t/>
             </a:r>
             <a:r>
               <a:rPr lang="zh-CN" sz="975">
@@ -4021,7 +4021,7 @@
                 <a:latin typeface="Microsoft YaHei"/>
                 <a:ea typeface="Microsoft YaHei"/>
               </a:rPr>
-              <a:t>。</a:t>
+              <a:t/>
             </a:r>
             <a:endParaRPr/>
           </a:p>
@@ -5929,7 +5929,7 @@
                 <a:latin typeface="Microsoft YaHei"/>
                 <a:ea typeface="Microsoft YaHei"/>
               </a:rPr>
-              <a:t>校级合格标准：</a:t>
+              <a:t>校级合格：软著 / 调研报告 / 论文（前 4 作者）任一。本项目已有可登记系统，具备双保险。</a:t>
             </a:r>
             <a:r>
               <a:rPr lang="zh-CN" sz="1050">
@@ -5939,7 +5939,7 @@
                 <a:latin typeface="Microsoft YaHei"/>
                 <a:ea typeface="Microsoft YaHei"/>
               </a:rPr>
-              <a:t>软著</a:t>
+              <a:t/>
             </a:r>
             <a:r>
               <a:rPr lang="en-US" sz="1050">
@@ -5949,7 +5949,7 @@
                 <a:latin typeface="Microsoft YaHei"/>
                 <a:ea typeface="Microsoft YaHei"/>
               </a:rPr>
-              <a:t xml:space="preserve"> / </a:t>
+              <a:t xml:space="preserve"/>
             </a:r>
             <a:r>
               <a:rPr lang="zh-CN" sz="1050">
@@ -5959,7 +5959,7 @@
                 <a:latin typeface="Microsoft YaHei"/>
                 <a:ea typeface="Microsoft YaHei"/>
               </a:rPr>
-              <a:t>调研报告</a:t>
+              <a:t/>
             </a:r>
             <a:r>
               <a:rPr lang="en-US" sz="1050">
@@ -5969,7 +5969,7 @@
                 <a:latin typeface="Microsoft YaHei"/>
                 <a:ea typeface="Microsoft YaHei"/>
               </a:rPr>
-              <a:t xml:space="preserve"> / </a:t>
+              <a:t xml:space="preserve"/>
             </a:r>
             <a:r>
               <a:rPr lang="zh-CN" sz="1050">
@@ -5979,7 +5979,7 @@
                 <a:latin typeface="Microsoft YaHei"/>
                 <a:ea typeface="Microsoft YaHei"/>
               </a:rPr>
-              <a:t>论文（前</a:t>
+              <a:t/>
             </a:r>
             <a:r>
               <a:rPr lang="en-US" sz="1050">
@@ -5989,7 +5989,7 @@
                 <a:latin typeface="Microsoft YaHei"/>
                 <a:ea typeface="Microsoft YaHei"/>
               </a:rPr>
-              <a:t xml:space="preserve"> 4 </a:t>
+              <a:t xml:space="preserve"/>
             </a:r>
             <a:r>
               <a:rPr lang="zh-CN" sz="1050">
@@ -5999,7 +5999,7 @@
                 <a:latin typeface="Microsoft YaHei"/>
                 <a:ea typeface="Microsoft YaHei"/>
               </a:rPr>
-              <a:t>作者）三者任一即可</a:t>
+              <a:t/>
             </a:r>
             <a:r>
               <a:rPr lang="zh-CN" sz="1050">
@@ -6009,7 +6009,7 @@
                 <a:latin typeface="Microsoft YaHei"/>
                 <a:ea typeface="Microsoft YaHei"/>
               </a:rPr>
-              <a:t>。</a:t>
+              <a:t/>
             </a:r>
             <a:r>
               <a:rPr lang="en-US" sz="1050">
@@ -6019,7 +6019,7 @@
                 <a:latin typeface="Microsoft YaHei"/>
                 <a:ea typeface="Microsoft YaHei"/>
               </a:rPr>
-              <a:t xml:space="preserve"> </a:t>
+              <a:t xml:space="preserve"/>
             </a:r>
             <a:r>
               <a:rPr lang="zh-CN" sz="1050">
@@ -6029,7 +6029,7 @@
                 <a:latin typeface="Microsoft YaHei"/>
                 <a:ea typeface="Microsoft YaHei"/>
               </a:rPr>
-              <a:t>本项目</a:t>
+              <a:t/>
             </a:r>
             <a:r>
               <a:rPr lang="zh-CN" sz="1050">
@@ -6039,7 +6039,7 @@
                 <a:latin typeface="Microsoft YaHei"/>
                 <a:ea typeface="Microsoft YaHei"/>
               </a:rPr>
-              <a:t>具备双保险</a:t>
+              <a:t/>
             </a:r>
             <a:r>
               <a:rPr lang="zh-CN" sz="1050">
@@ -6049,7 +6049,7 @@
                 <a:latin typeface="Microsoft YaHei"/>
                 <a:ea typeface="Microsoft YaHei"/>
               </a:rPr>
-              <a:t>——已有可登记系统，且研究问题明确具备撰写条件。</a:t>
+              <a:t/>
             </a:r>
             <a:endParaRPr/>
           </a:p>
@@ -7772,7 +7772,7 @@
                 <a:latin typeface="Microsoft YaHei"/>
                 <a:ea typeface="Microsoft YaHei"/>
               </a:rPr>
-              <a:t>区分：</a:t>
+              <a:t>「已有成果」= 做出来了什么；「现有结论」= 学到了什么。每条标注证据强度。</a:t>
             </a:r>
             <a:r>
               <a:rPr lang="zh-CN" sz="1125">
@@ -7782,7 +7782,7 @@
                 <a:latin typeface="Microsoft YaHei"/>
                 <a:ea typeface="Microsoft YaHei"/>
               </a:rPr>
-              <a:t>「已有成果」</a:t>
+              <a:t/>
             </a:r>
             <a:r>
               <a:rPr lang="en-US" sz="1125">
@@ -7792,7 +7792,7 @@
                 <a:latin typeface="Microsoft YaHei"/>
                 <a:ea typeface="Microsoft YaHei"/>
               </a:rPr>
-              <a:t xml:space="preserve">= </a:t>
+              <a:t xml:space="preserve"/>
             </a:r>
             <a:r>
               <a:rPr lang="zh-CN" sz="1125">
@@ -7802,7 +7802,7 @@
                 <a:latin typeface="Microsoft YaHei"/>
                 <a:ea typeface="Microsoft YaHei"/>
               </a:rPr>
-              <a:t>我们</a:t>
+              <a:t/>
             </a:r>
             <a:r>
               <a:rPr lang="zh-CN" sz="1125">
@@ -7812,7 +7812,7 @@
                 <a:latin typeface="Microsoft YaHei"/>
                 <a:ea typeface="Microsoft YaHei"/>
               </a:rPr>
-              <a:t>做出来了什么</a:t>
+              <a:t/>
             </a:r>
             <a:r>
               <a:rPr lang="zh-CN" sz="1125">
@@ -7822,7 +7822,7 @@
                 <a:latin typeface="Microsoft YaHei"/>
                 <a:ea typeface="Microsoft YaHei"/>
               </a:rPr>
-              <a:t>；「现有结论」</a:t>
+              <a:t/>
             </a:r>
             <a:r>
               <a:rPr lang="en-US" sz="1125">
@@ -7832,7 +7832,7 @@
                 <a:latin typeface="Microsoft YaHei"/>
                 <a:ea typeface="Microsoft YaHei"/>
               </a:rPr>
-              <a:t xml:space="preserve">= </a:t>
+              <a:t xml:space="preserve"/>
             </a:r>
             <a:r>
               <a:rPr lang="zh-CN" sz="1125">
@@ -7842,7 +7842,7 @@
                 <a:latin typeface="Microsoft YaHei"/>
                 <a:ea typeface="Microsoft YaHei"/>
               </a:rPr>
-              <a:t>我们</a:t>
+              <a:t/>
             </a:r>
             <a:r>
               <a:rPr lang="zh-CN" sz="1125">
@@ -7852,7 +7852,7 @@
                 <a:latin typeface="Microsoft YaHei"/>
                 <a:ea typeface="Microsoft YaHei"/>
               </a:rPr>
-              <a:t>从中学到了什么</a:t>
+              <a:t/>
             </a:r>
             <a:r>
               <a:rPr lang="zh-CN" sz="1125">
@@ -7862,7 +7862,7 @@
                 <a:latin typeface="Microsoft YaHei"/>
                 <a:ea typeface="Microsoft YaHei"/>
               </a:rPr>
-              <a:t>。以下每条标注证据强度。</a:t>
+              <a:t/>
             </a:r>
             <a:endParaRPr/>
           </a:p>
@@ -9238,7 +9238,7 @@
                 <a:latin typeface="Microsoft YaHei"/>
                 <a:ea typeface="Microsoft YaHei"/>
               </a:rPr>
-              <a:t>我们主动说明：</a:t>
+              <a:t>现有结论均来自工程链路验证，尚未获得正式实验的质量数据——这是立项理由，也是对研究边界的清醒。</a:t>
             </a:r>
             <a:r>
               <a:rPr lang="zh-CN" sz="1050">
@@ -9248,7 +9248,7 @@
                 <a:latin typeface="Microsoft YaHei"/>
                 <a:ea typeface="Microsoft YaHei"/>
               </a:rPr>
-              <a:t>现有结论主要来自</a:t>
+              <a:t/>
             </a:r>
             <a:r>
               <a:rPr lang="zh-CN" sz="1050">
@@ -9258,7 +9258,7 @@
                 <a:latin typeface="Microsoft YaHei"/>
                 <a:ea typeface="Microsoft YaHei"/>
               </a:rPr>
-              <a:t>工程链路验证</a:t>
+              <a:t/>
             </a:r>
             <a:r>
               <a:rPr lang="zh-CN" sz="1050">
@@ -9268,7 +9268,7 @@
                 <a:latin typeface="Microsoft YaHei"/>
                 <a:ea typeface="Microsoft YaHei"/>
               </a:rPr>
-              <a:t>，</a:t>
+              <a:t/>
             </a:r>
             <a:r>
               <a:rPr lang="zh-CN" sz="1050">
@@ -9278,7 +9278,7 @@
                 <a:latin typeface="Microsoft YaHei"/>
                 <a:ea typeface="Microsoft YaHei"/>
               </a:rPr>
-              <a:t>尚未获得任何来自正式实验的质量数据</a:t>
+              <a:t/>
             </a:r>
             <a:r>
               <a:rPr lang="zh-CN" sz="1050">
@@ -9288,7 +9288,7 @@
                 <a:latin typeface="Microsoft YaHei"/>
                 <a:ea typeface="Microsoft YaHei"/>
               </a:rPr>
-              <a:t>。</a:t>
+              <a:t/>
             </a:r>
             <a:r>
               <a:rPr lang="en-US" sz="1050">
@@ -9298,7 +9298,7 @@
                 <a:latin typeface="Microsoft YaHei"/>
                 <a:ea typeface="Microsoft YaHei"/>
               </a:rPr>
-              <a:t xml:space="preserve"> </a:t>
+              <a:t xml:space="preserve"/>
             </a:r>
             <a:r>
               <a:rPr lang="zh-CN" sz="1050">
@@ -9308,7 +9308,7 @@
                 <a:latin typeface="Microsoft YaHei"/>
                 <a:ea typeface="Microsoft YaHei"/>
               </a:rPr>
-              <a:t>这既是本项目的立项理由，也是我们对研究边界保持清醒的体现。</a:t>
+              <a:t/>
             </a:r>
             <a:endParaRPr/>
           </a:p>
@@ -9657,7 +9657,8 @@
                 <a:latin typeface="Microsoft YaHei"/>
                 <a:ea typeface="Microsoft YaHei"/>
               </a:rPr>
-              <a:t>　</a:t>
+              <a:t>　12 人 × 4 档 × 4 条件的客观评测结果
+· 主观评测结论</a:t>
             </a:r>
             <a:r>
               <a:rPr lang="en-US" sz="1050">
@@ -9667,7 +9668,7 @@
                 <a:latin typeface="Microsoft YaHei"/>
                 <a:ea typeface="Microsoft YaHei"/>
               </a:rPr>
-              <a:t xml:space="preserve">12 </a:t>
+              <a:t xml:space="preserve"/>
             </a:r>
             <a:r>
               <a:rPr lang="zh-CN" sz="1050">
@@ -9677,7 +9678,7 @@
                 <a:latin typeface="Microsoft YaHei"/>
                 <a:ea typeface="Microsoft YaHei"/>
               </a:rPr>
-              <a:t>名被试</a:t>
+              <a:t/>
             </a:r>
             <a:r>
               <a:rPr lang="en-US" sz="1050">
@@ -9687,7 +9688,7 @@
                 <a:latin typeface="Microsoft YaHei"/>
                 <a:ea typeface="Microsoft YaHei"/>
               </a:rPr>
-              <a:t xml:space="preserve"> × 4 </a:t>
+              <a:t xml:space="preserve"/>
             </a:r>
             <a:r>
               <a:rPr lang="zh-CN" sz="1050">
@@ -9697,7 +9698,7 @@
                 <a:latin typeface="Microsoft YaHei"/>
                 <a:ea typeface="Microsoft YaHei"/>
               </a:rPr>
-              <a:t>档参考音</a:t>
+              <a:t/>
             </a:r>
             <a:r>
               <a:rPr lang="en-US" sz="1050">
@@ -9707,7 +9708,7 @@
                 <a:latin typeface="Microsoft YaHei"/>
                 <a:ea typeface="Microsoft YaHei"/>
               </a:rPr>
-              <a:t xml:space="preserve"> × 4 </a:t>
+              <a:t xml:space="preserve"/>
             </a:r>
             <a:r>
               <a:rPr lang="zh-CN" sz="1050">
@@ -9717,7 +9718,7 @@
                 <a:latin typeface="Microsoft YaHei"/>
                 <a:ea typeface="Microsoft YaHei"/>
               </a:rPr>
-              <a:t>种文本条件的客观评测结果</a:t>
+              <a:t/>
             </a:r>
             <a:r>
               <a:rPr sz="1050">
@@ -9727,8 +9728,7 @@
                 <a:latin typeface="Microsoft YaHei"/>
                 <a:ea typeface="Microsoft YaHei"/>
               </a:rPr>
-              <a:t xml:space="preserve">
-</a:t>
+              <a:t xml:space="preserve"/>
             </a:r>
             <a:r>
               <a:rPr lang="en-US" sz="1050">
@@ -9738,7 +9738,7 @@
                 <a:latin typeface="Microsoft YaHei"/>
                 <a:ea typeface="Microsoft YaHei"/>
               </a:rPr>
-              <a:t xml:space="preserve">· </a:t>
+              <a:t xml:space="preserve"/>
             </a:r>
             <a:r>
               <a:rPr lang="zh-CN" sz="1050">
@@ -9748,7 +9748,7 @@
                 <a:latin typeface="Microsoft YaHei"/>
                 <a:ea typeface="Microsoft YaHei"/>
               </a:rPr>
-              <a:t>主观评测结论</a:t>
+              <a:t/>
             </a:r>
             <a:endParaRPr/>
           </a:p>
@@ -10358,7 +10358,7 @@
                 <a:latin typeface="Microsoft YaHei"/>
                 <a:ea typeface="Microsoft YaHei"/>
               </a:rPr>
-              <a:t xml:space="preserve">· </a:t>
+              <a:t xml:space="preserve">· 知情同意流程与本地克隆审计日志（前期已落地）</a:t>
             </a:r>
             <a:r>
               <a:rPr lang="zh-CN" sz="1050">
@@ -10368,7 +10368,7 @@
                 <a:latin typeface="Microsoft YaHei"/>
                 <a:ea typeface="Microsoft YaHei"/>
               </a:rPr>
-              <a:t>知情同意流程与</a:t>
+              <a:t/>
             </a:r>
             <a:r>
               <a:rPr lang="zh-CN" sz="1050">
@@ -10378,7 +10378,7 @@
                 <a:latin typeface="Microsoft YaHei"/>
                 <a:ea typeface="Microsoft YaHei"/>
               </a:rPr>
-              <a:t>本地克隆审计日志</a:t>
+              <a:t/>
             </a:r>
             <a:r>
               <a:rPr lang="zh-CN" sz="1050">
@@ -10388,7 +10388,7 @@
                 <a:latin typeface="Microsoft YaHei"/>
                 <a:ea typeface="Microsoft YaHei"/>
               </a:rPr>
-              <a:t>（只追加：谁、何时、对谁的档案做了什么）</a:t>
+              <a:t/>
             </a:r>
             <a:endParaRPr/>
           </a:p>
@@ -10577,7 +10577,7 @@
                 <a:latin typeface="Microsoft YaHei"/>
                 <a:ea typeface="Microsoft YaHei"/>
               </a:rPr>
-              <a:t>结项达标路径（三选一）：</a:t>
+              <a:t>结项达标路径（三选一）：软著 / 调研报告 / 论文（前 4 作者）任一。本项目已有可登记系统，具备双保险。成果发表学生为第一作者，标注"大学生创新创业训练计划资助 + 项目编号"。</a:t>
             </a:r>
             <a:r>
               <a:rPr lang="zh-CN" sz="1200">
@@ -10587,7 +10587,7 @@
                 <a:latin typeface="Microsoft YaHei"/>
                 <a:ea typeface="Microsoft YaHei"/>
               </a:rPr>
-              <a:t>校级合格标准为</a:t>
+              <a:t/>
             </a:r>
             <a:r>
               <a:rPr lang="zh-CN" sz="1200">
@@ -10597,7 +10597,7 @@
                 <a:latin typeface="Microsoft YaHei"/>
                 <a:ea typeface="Microsoft YaHei"/>
               </a:rPr>
-              <a:t>软著</a:t>
+              <a:t/>
             </a:r>
             <a:r>
               <a:rPr lang="en-US" sz="1200">
@@ -10607,7 +10607,7 @@
                 <a:latin typeface="Microsoft YaHei"/>
                 <a:ea typeface="Microsoft YaHei"/>
               </a:rPr>
-              <a:t xml:space="preserve"> / </a:t>
+              <a:t xml:space="preserve"/>
             </a:r>
             <a:r>
               <a:rPr lang="zh-CN" sz="1200">
@@ -10617,7 +10617,7 @@
                 <a:latin typeface="Microsoft YaHei"/>
                 <a:ea typeface="Microsoft YaHei"/>
               </a:rPr>
-              <a:t>调研报告</a:t>
+              <a:t/>
             </a:r>
             <a:r>
               <a:rPr lang="en-US" sz="1200">
@@ -10627,7 +10627,7 @@
                 <a:latin typeface="Microsoft YaHei"/>
                 <a:ea typeface="Microsoft YaHei"/>
               </a:rPr>
-              <a:t xml:space="preserve"> / </a:t>
+              <a:t xml:space="preserve"/>
             </a:r>
             <a:r>
               <a:rPr lang="zh-CN" sz="1200">
@@ -10637,7 +10637,7 @@
                 <a:latin typeface="Microsoft YaHei"/>
                 <a:ea typeface="Microsoft YaHei"/>
               </a:rPr>
-              <a:t>论文（前</a:t>
+              <a:t/>
             </a:r>
             <a:r>
               <a:rPr lang="en-US" sz="1200">
@@ -10647,7 +10647,7 @@
                 <a:latin typeface="Microsoft YaHei"/>
                 <a:ea typeface="Microsoft YaHei"/>
               </a:rPr>
-              <a:t xml:space="preserve"> 4 </a:t>
+              <a:t xml:space="preserve"/>
             </a:r>
             <a:r>
               <a:rPr lang="zh-CN" sz="1200">
@@ -10657,7 +10657,7 @@
                 <a:latin typeface="Microsoft YaHei"/>
                 <a:ea typeface="Microsoft YaHei"/>
               </a:rPr>
-              <a:t>作者）三者任一</a:t>
+              <a:t/>
             </a:r>
             <a:r>
               <a:rPr lang="en-US" sz="1200">
@@ -10667,7 +10667,7 @@
                 <a:latin typeface="Microsoft YaHei"/>
                 <a:ea typeface="Microsoft YaHei"/>
               </a:rPr>
-              <a:t xml:space="preserve">—— </a:t>
+              <a:t xml:space="preserve"/>
             </a:r>
             <a:r>
               <a:rPr lang="zh-CN" sz="1200">
@@ -10677,7 +10677,7 @@
                 <a:latin typeface="Microsoft YaHei"/>
                 <a:ea typeface="Microsoft YaHei"/>
               </a:rPr>
-              <a:t>本项目</a:t>
+              <a:t/>
             </a:r>
             <a:r>
               <a:rPr lang="zh-CN" sz="1200">
@@ -10687,7 +10687,7 @@
                 <a:latin typeface="Microsoft YaHei"/>
                 <a:ea typeface="Microsoft YaHei"/>
               </a:rPr>
-              <a:t>已有可登记的系统与评测引擎，具备双保险</a:t>
+              <a:t/>
             </a:r>
             <a:r>
               <a:rPr lang="zh-CN" sz="1200">
@@ -10697,7 +10697,7 @@
                 <a:latin typeface="Microsoft YaHei"/>
                 <a:ea typeface="Microsoft YaHei"/>
               </a:rPr>
-              <a:t>。</a:t>
+              <a:t/>
             </a:r>
             <a:r>
               <a:rPr lang="en-US" sz="1200">
@@ -10707,7 +10707,7 @@
                 <a:latin typeface="Microsoft YaHei"/>
                 <a:ea typeface="Microsoft YaHei"/>
               </a:rPr>
-              <a:t xml:space="preserve"> </a:t>
+              <a:t xml:space="preserve"/>
             </a:r>
             <a:r>
               <a:rPr lang="zh-CN" sz="1200">
@@ -10717,7 +10717,7 @@
                 <a:latin typeface="Microsoft YaHei"/>
                 <a:ea typeface="Microsoft YaHei"/>
               </a:rPr>
-              <a:t>成果发表时学生为第一作者，并标注</a:t>
+              <a:t/>
             </a:r>
             <a:r>
               <a:rPr lang="en-US" sz="1200">
@@ -10727,7 +10727,7 @@
                 <a:latin typeface="Microsoft YaHei"/>
                 <a:ea typeface="Microsoft YaHei"/>
               </a:rPr>
-              <a:t>"</a:t>
+              <a:t/>
             </a:r>
             <a:r>
               <a:rPr lang="zh-CN" sz="1200">
@@ -10737,7 +10737,7 @@
                 <a:latin typeface="Microsoft YaHei"/>
                 <a:ea typeface="Microsoft YaHei"/>
               </a:rPr>
-              <a:t>大学生创新创业训练计划资助</a:t>
+              <a:t/>
             </a:r>
             <a:r>
               <a:rPr lang="en-US" sz="1200">
@@ -10747,7 +10747,7 @@
                 <a:latin typeface="Microsoft YaHei"/>
                 <a:ea typeface="Microsoft YaHei"/>
               </a:rPr>
-              <a:t xml:space="preserve"> + </a:t>
+              <a:t xml:space="preserve"/>
             </a:r>
             <a:r>
               <a:rPr lang="zh-CN" sz="1200">
@@ -10757,7 +10757,7 @@
                 <a:latin typeface="Microsoft YaHei"/>
                 <a:ea typeface="Microsoft YaHei"/>
               </a:rPr>
-              <a:t>项目编号</a:t>
+              <a:t/>
             </a:r>
             <a:r>
               <a:rPr lang="en-US" sz="1200">
@@ -10767,7 +10767,7 @@
                 <a:latin typeface="Microsoft YaHei"/>
                 <a:ea typeface="Microsoft YaHei"/>
               </a:rPr>
-              <a:t>"</a:t>
+              <a:t/>
             </a:r>
             <a:r>
               <a:rPr lang="zh-CN" sz="1200">
@@ -10777,7 +10777,7 @@
                 <a:latin typeface="Microsoft YaHei"/>
                 <a:ea typeface="Microsoft YaHei"/>
               </a:rPr>
-              <a:t>。</a:t>
+              <a:t/>
             </a:r>
             <a:endParaRPr/>
           </a:p>
@@ -12869,7 +12869,7 @@
                 <a:latin typeface="Microsoft YaHei"/>
                 <a:ea typeface="Microsoft YaHei"/>
               </a:rPr>
-              <a:t>预算说明</a:t>
+              <a:t>预算说明：以软件与数据研究为主，设备投入低；主要开支为被试劳务、材料与成果发表。</a:t>
             </a:r>
             <a:r>
               <a:rPr lang="zh-CN" sz="1125">
@@ -12879,7 +12879,7 @@
                 <a:latin typeface="Microsoft YaHei"/>
                 <a:ea typeface="Microsoft YaHei"/>
               </a:rPr>
-              <a:t>：本项目以</a:t>
+              <a:t/>
             </a:r>
             <a:r>
               <a:rPr lang="zh-CN" sz="1125">
@@ -12889,7 +12889,7 @@
                 <a:latin typeface="Microsoft YaHei"/>
                 <a:ea typeface="Microsoft YaHei"/>
               </a:rPr>
-              <a:t>软件与数据研究</a:t>
+              <a:t/>
             </a:r>
             <a:r>
               <a:rPr lang="zh-CN" sz="1125">
@@ -12899,7 +12899,7 @@
                 <a:latin typeface="Microsoft YaHei"/>
                 <a:ea typeface="Microsoft YaHei"/>
               </a:rPr>
-              <a:t>为主，设备投入低；</a:t>
+              <a:t/>
             </a:r>
             <a:r>
               <a:rPr lang="en-US" sz="1125">
@@ -12909,7 +12909,7 @@
                 <a:latin typeface="Microsoft YaHei"/>
                 <a:ea typeface="Microsoft YaHei"/>
               </a:rPr>
-              <a:t xml:space="preserve"> </a:t>
+              <a:t xml:space="preserve"/>
             </a:r>
             <a:r>
               <a:rPr lang="zh-CN" sz="1125">
@@ -12919,7 +12919,7 @@
                 <a:latin typeface="Microsoft YaHei"/>
                 <a:ea typeface="Microsoft YaHei"/>
               </a:rPr>
-              <a:t>主要开支为被试劳务、材料与成果发表。具体额度以系统填报时的实际额度为准，</a:t>
+              <a:t/>
             </a:r>
             <a:r>
               <a:rPr lang="zh-CN" sz="1125">
@@ -12929,7 +12929,7 @@
                 <a:latin typeface="Microsoft YaHei"/>
                 <a:ea typeface="Microsoft YaHei"/>
               </a:rPr>
-              <a:t>按学校规定如实申报使用</a:t>
+              <a:t/>
             </a:r>
             <a:r>
               <a:rPr lang="zh-CN" sz="1125">
@@ -12939,7 +12939,7 @@
                 <a:latin typeface="Microsoft YaHei"/>
                 <a:ea typeface="Microsoft YaHei"/>
               </a:rPr>
-              <a:t>。</a:t>
+              <a:t/>
             </a:r>
             <a:endParaRPr/>
           </a:p>
@@ -12974,7 +12974,7 @@
                 <a:latin typeface="Microsoft YaHei"/>
                 <a:ea typeface="Microsoft YaHei"/>
               </a:rPr>
-              <a:t xml:space="preserve">⚠️ </a:t>
+              <a:t xml:space="preserve">⚠️ 已具备可用消费级 GPU，无需大额硬件采购。</a:t>
             </a:r>
             <a:r>
               <a:rPr lang="zh-CN" sz="1050">
@@ -12984,7 +12984,7 @@
                 <a:latin typeface="Microsoft YaHei"/>
                 <a:ea typeface="Microsoft YaHei"/>
               </a:rPr>
-              <a:t>说明：本项目已具备可用的消费级</a:t>
+              <a:t/>
             </a:r>
             <a:r>
               <a:rPr lang="en-US" sz="1050">
@@ -12994,7 +12994,7 @@
                 <a:latin typeface="Microsoft YaHei"/>
                 <a:ea typeface="Microsoft YaHei"/>
               </a:rPr>
-              <a:t xml:space="preserve"> GPU</a:t>
+              <a:t xml:space="preserve"/>
             </a:r>
             <a:r>
               <a:rPr lang="zh-CN" sz="1050">
@@ -13004,7 +13004,7 @@
                 <a:latin typeface="Microsoft YaHei"/>
                 <a:ea typeface="Microsoft YaHei"/>
               </a:rPr>
-              <a:t>，</a:t>
+              <a:t/>
             </a:r>
             <a:r>
               <a:rPr lang="zh-CN" sz="1050">
@@ -13014,7 +13014,7 @@
                 <a:latin typeface="Microsoft YaHei"/>
                 <a:ea typeface="Microsoft YaHei"/>
               </a:rPr>
-              <a:t>无需大额硬件采购</a:t>
+              <a:t/>
             </a:r>
             <a:r>
               <a:rPr lang="zh-CN" sz="1050">
@@ -13024,7 +13024,7 @@
                 <a:latin typeface="Microsoft YaHei"/>
                 <a:ea typeface="Microsoft YaHei"/>
               </a:rPr>
-              <a:t>，预算聚焦劳务与发表。</a:t>
+              <a:t/>
             </a:r>
             <a:endParaRPr/>
           </a:p>
@@ -13581,7 +13581,7 @@
                           <a:latin typeface="Microsoft YaHei"/>
                           <a:ea typeface="Microsoft YaHei"/>
                         </a:rPr>
-                        <a:t>总体方案设计；实验平台与评测流水线实现；自动质量门禁；数据统计分析；申报与结题材料统筹</a:t>
+                        <a:t>方案设计；评测流水线与门禁实现；统计分析；结题材料统筹</a:t>
                       </a:r>
                       <a:endParaRPr/>
                     </a:p>
@@ -13750,7 +13750,7 @@
                           <a:latin typeface="Microsoft YaHei"/>
                           <a:ea typeface="Microsoft YaHei"/>
                         </a:rPr>
-                        <a:t>被试招募与沟通；知情同意流程执行；录音 SOP 制定与执行；录音质量筛查；评测语料集整理</a:t>
+                        <a:t>招募与沟通；知情同意流程；录音 SOP 执行与质量筛查</a:t>
                       </a:r>
                       <a:endParaRPr/>
                     </a:p>
@@ -13919,7 +13919,7 @@
                           <a:latin typeface="Microsoft YaHei"/>
                           <a:ea typeface="Microsoft YaHei"/>
                         </a:rPr>
-                        <a:t>听测方案设计；听测平台配置（随机化、盲听）；24 名听测者组织与实施；评分表收集与一致性检验</a:t>
+                        <a:t>听测方案与平台配置；24 名听测者实施；一致性检验</a:t>
                       </a:r>
                       <a:endParaRPr/>
                     </a:p>
@@ -14088,7 +14088,7 @@
                           <a:latin typeface="Microsoft YaHei"/>
                           <a:ea typeface="Microsoft YaHei"/>
                         </a:rPr>
-                        <a:t>国内外研究现状调研；与 Apple Personal Voice / 传统声音银行 / 云端克隆的对比分析；参考文献管理</a:t>
+                        <a:t>现状调研；与声音银行/云端克隆对比分析；文献管理</a:t>
                       </a:r>
                       <a:endParaRPr/>
                     </a:p>
@@ -14484,7 +14484,7 @@
                 <a:latin typeface="Microsoft YaHei"/>
                 <a:ea typeface="Microsoft YaHei"/>
               </a:rPr>
-              <a:t>按</a:t>
+              <a:t>按研究链条划分，每人有独立可交付物，不设"协助"类虚职。</a:t>
             </a:r>
             <a:r>
               <a:rPr lang="zh-CN" sz="1050">
@@ -14494,7 +14494,7 @@
                 <a:latin typeface="Microsoft YaHei"/>
                 <a:ea typeface="Microsoft YaHei"/>
               </a:rPr>
-              <a:t>研究链条</a:t>
+              <a:t/>
             </a:r>
             <a:r>
               <a:rPr lang="zh-CN" sz="1050">
@@ -14504,7 +14504,7 @@
                 <a:latin typeface="Microsoft YaHei"/>
                 <a:ea typeface="Microsoft YaHei"/>
               </a:rPr>
-              <a:t>划分，四人的职责互相衔接且</a:t>
+              <a:t/>
             </a:r>
             <a:r>
               <a:rPr lang="zh-CN" sz="1050">
@@ -14514,7 +14514,7 @@
                 <a:latin typeface="Microsoft YaHei"/>
                 <a:ea typeface="Microsoft YaHei"/>
               </a:rPr>
-              <a:t>均有独立产出</a:t>
+              <a:t/>
             </a:r>
             <a:r>
               <a:rPr lang="zh-CN" sz="1050">
@@ -14524,7 +14524,7 @@
                 <a:latin typeface="Microsoft YaHei"/>
                 <a:ea typeface="Microsoft YaHei"/>
               </a:rPr>
-              <a:t>；</a:t>
+              <a:t/>
             </a:r>
             <a:r>
               <a:rPr lang="en-US" sz="1050">
@@ -14534,7 +14534,7 @@
                 <a:latin typeface="Microsoft YaHei"/>
                 <a:ea typeface="Microsoft YaHei"/>
               </a:rPr>
-              <a:t xml:space="preserve"> </a:t>
+              <a:t xml:space="preserve"/>
             </a:r>
             <a:r>
               <a:rPr lang="zh-CN" sz="1050">
@@ -14544,7 +14544,7 @@
                 <a:latin typeface="Microsoft YaHei"/>
                 <a:ea typeface="Microsoft YaHei"/>
               </a:rPr>
-              <a:t>每人对应明确可交付物，</a:t>
+              <a:t/>
             </a:r>
             <a:r>
               <a:rPr lang="zh-CN" sz="1050">
@@ -14554,7 +14554,7 @@
                 <a:latin typeface="Microsoft YaHei"/>
                 <a:ea typeface="Microsoft YaHei"/>
               </a:rPr>
-              <a:t>不设</a:t>
+              <a:t/>
             </a:r>
             <a:r>
               <a:rPr lang="en-US" sz="1050">
@@ -14564,7 +14564,7 @@
                 <a:latin typeface="Microsoft YaHei"/>
                 <a:ea typeface="Microsoft YaHei"/>
               </a:rPr>
-              <a:t>"</a:t>
+              <a:t/>
             </a:r>
             <a:r>
               <a:rPr lang="zh-CN" sz="1050">
@@ -14574,7 +14574,7 @@
                 <a:latin typeface="Microsoft YaHei"/>
                 <a:ea typeface="Microsoft YaHei"/>
               </a:rPr>
-              <a:t>协助</a:t>
+              <a:t/>
             </a:r>
             <a:r>
               <a:rPr lang="en-US" sz="1050">
@@ -14584,7 +14584,7 @@
                 <a:latin typeface="Microsoft YaHei"/>
                 <a:ea typeface="Microsoft YaHei"/>
               </a:rPr>
-              <a:t>"</a:t>
+              <a:t/>
             </a:r>
             <a:r>
               <a:rPr lang="zh-CN" sz="1050">
@@ -14594,7 +14594,7 @@
                 <a:latin typeface="Microsoft YaHei"/>
                 <a:ea typeface="Microsoft YaHei"/>
               </a:rPr>
-              <a:t>类虚职</a:t>
+              <a:t/>
             </a:r>
             <a:r>
               <a:rPr lang="zh-CN" sz="1050">
@@ -14604,7 +14604,7 @@
                 <a:latin typeface="Microsoft YaHei"/>
                 <a:ea typeface="Microsoft YaHei"/>
               </a:rPr>
-              <a:t>。</a:t>
+              <a:t/>
             </a:r>
             <a:endParaRPr/>
           </a:p>
@@ -15204,7 +15204,7 @@
                 <a:latin typeface="Microsoft YaHei"/>
                 <a:ea typeface="Microsoft YaHei"/>
               </a:rPr>
-              <a:t>严格对照官方</a:t>
+              <a:t>对照官方"创新类项目进展 PPT"5 项要求组织</a:t>
             </a:r>
             <a:r>
               <a:rPr lang="en-US" sz="1125">
@@ -15214,7 +15214,7 @@
                 <a:latin typeface="Microsoft YaHei"/>
                 <a:ea typeface="Microsoft YaHei"/>
               </a:rPr>
-              <a:t>"</a:t>
+              <a:t/>
             </a:r>
             <a:r>
               <a:rPr lang="zh-CN" sz="1125">
@@ -15224,7 +15224,7 @@
                 <a:latin typeface="Microsoft YaHei"/>
                 <a:ea typeface="Microsoft YaHei"/>
               </a:rPr>
-              <a:t>创新类项目进展</a:t>
+              <a:t/>
             </a:r>
             <a:r>
               <a:rPr lang="en-US" sz="1125">
@@ -15234,7 +15234,7 @@
                 <a:latin typeface="Microsoft YaHei"/>
                 <a:ea typeface="Microsoft YaHei"/>
               </a:rPr>
-              <a:t xml:space="preserve"> PPT"5 </a:t>
+              <a:t xml:space="preserve"/>
             </a:r>
             <a:r>
               <a:rPr lang="zh-CN" sz="1125">
@@ -15244,7 +15244,7 @@
                 <a:latin typeface="Microsoft YaHei"/>
                 <a:ea typeface="Microsoft YaHei"/>
               </a:rPr>
-              <a:t>项要求逐条组织</a:t>
+              <a:t/>
             </a:r>
             <a:endParaRPr/>
           </a:p>
@@ -17525,11 +17525,11 @@
                   <a:srgbClr val="0E3F8C"/>
                 </a:solidFill>
               </a:rPr>
-              <a:t>看谁的问题：</a:t>
+              <a:t>看谁的问题：录课、网课是教师与师范生的日常，连续讲解与反复重录让用嗓负担真实存在——需要的不是“像不像”，而是用自己的声音把课录出来。</a:t>
             </a:r>
             <a:r>
               <a:rPr b="0" sz="1600"/>
-              <a:t>录课、网课是教师与师范生的日常，连续讲解与反复重录让用嗓负担真实存在——他们需要的不是“像不像”，而是</a:t>
+              <a:t/>
             </a:r>
             <a:r>
               <a:rPr b="1" sz="1600">
@@ -17537,11 +17537,11 @@
                   <a:srgbClr val="D9534F"/>
                 </a:solidFill>
               </a:rPr>
-              <a:t>用我自己的声音把课录出来</a:t>
+              <a:t/>
             </a:r>
             <a:r>
               <a:rPr b="0" sz="1600"/>
-              <a:t>。</a:t>
+              <a:t/>
             </a:r>
             <a:endParaRPr/>
           </a:p>
@@ -17552,35 +17552,35 @@
                   <a:srgbClr val="0E3F8C"/>
                 </a:solidFill>
               </a:rPr>
-              <a:t>做什么：</a:t>
+              <a:t>做什么：把“声音复现”定位为录课减负的实用工具，研究本地离线、秒级参考音下的质量边界，反哺为自动质量门禁——让用户知道“录多久就够”。</a:t>
             </a:r>
             <a:r>
               <a:rPr b="0" sz="1600"/>
-              <a:t>把“声音复现”从玩具重新定位为</a:t>
+              <a:t/>
             </a:r>
             <a:r>
               <a:rPr b="1" sz="1600"/>
-              <a:t>面向录课减负的实用工具</a:t>
+              <a:t/>
             </a:r>
             <a:r>
               <a:rPr b="0" sz="1600"/>
-              <a:t>，研究</a:t>
+              <a:t/>
             </a:r>
             <a:r>
               <a:rPr b="1" sz="1600"/>
-              <a:t>本地离线、秒级参考音</a:t>
+              <a:t/>
             </a:r>
             <a:r>
               <a:rPr b="0" sz="1600"/>
-              <a:t>下的复现质量边界，并反哺为</a:t>
+              <a:t/>
             </a:r>
             <a:r>
               <a:rPr b="1" sz="1600"/>
-              <a:t>自动质量门禁</a:t>
+              <a:t/>
             </a:r>
             <a:r>
               <a:rPr b="0" sz="1600"/>
-              <a:t>——让用户知道“录多久就够”。</a:t>
+              <a:t/>
             </a:r>
           </a:p>
         </p:txBody>
@@ -17946,7 +17946,7 @@
                 <a:latin typeface="Microsoft YaHei"/>
                 <a:ea typeface="Microsoft YaHei"/>
               </a:rPr>
-              <a:t>核心价值：把注意力从“技术能做什么”转向“谁需要它、用起来的代价是什么”——关注对象与研究视角的转变，本身就是本项目的创新所在。</a:t>
+              <a:t>核心价值：从“技术能做什么”转向“谁需要它、代价是什么”——关注对象的转变本身就是创新。</a:t>
             </a:r>
             <a:endParaRPr/>
           </a:p>
@@ -19352,7 +19352,7 @@
                 <a:latin typeface="Microsoft YaHei"/>
                 <a:ea typeface="Microsoft YaHei"/>
               </a:rPr>
-              <a:t>真正的缺口不是</a:t>
+              <a:t>真正的缺口是"离线可用性"——无网环境下联网方案在结构上不适用。而"本地离线 + 秒级参考音"下质量代价有多大，尚未被系统回答。</a:t>
             </a:r>
             <a:r>
               <a:rPr lang="en-US" sz="1275">
@@ -19362,7 +19362,7 @@
                 <a:latin typeface="Microsoft YaHei"/>
                 <a:ea typeface="Microsoft YaHei"/>
               </a:rPr>
-              <a:t xml:space="preserve">"Windows </a:t>
+              <a:t xml:space="preserve"/>
             </a:r>
             <a:r>
               <a:rPr lang="zh-CN" sz="1275">
@@ -19372,7 +19372,7 @@
                 <a:latin typeface="Microsoft YaHei"/>
                 <a:ea typeface="Microsoft YaHei"/>
               </a:rPr>
-              <a:t>上没人做</a:t>
+              <a:t/>
             </a:r>
             <a:r>
               <a:rPr lang="en-US" sz="1275">
@@ -19382,7 +19382,7 @@
                 <a:latin typeface="Microsoft YaHei"/>
                 <a:ea typeface="Microsoft YaHei"/>
               </a:rPr>
-              <a:t>"</a:t>
+              <a:t/>
             </a:r>
             <a:r>
               <a:rPr lang="zh-CN" sz="1275">
@@ -19392,7 +19392,7 @@
                 <a:latin typeface="Microsoft YaHei"/>
                 <a:ea typeface="Microsoft YaHei"/>
               </a:rPr>
-              <a:t>，而是</a:t>
+              <a:t/>
             </a:r>
             <a:r>
               <a:rPr lang="en-US" sz="1275">
@@ -19402,7 +19402,7 @@
                 <a:latin typeface="Microsoft YaHei"/>
                 <a:ea typeface="Microsoft YaHei"/>
               </a:rPr>
-              <a:t>"</a:t>
+              <a:t/>
             </a:r>
             <a:r>
               <a:rPr lang="zh-CN" sz="1275">
@@ -19412,7 +19412,7 @@
                 <a:latin typeface="Microsoft YaHei"/>
                 <a:ea typeface="Microsoft YaHei"/>
               </a:rPr>
-              <a:t>离线可用性</a:t>
+              <a:t/>
             </a:r>
             <a:r>
               <a:rPr lang="en-US" sz="1275">
@@ -19422,7 +19422,7 @@
                 <a:latin typeface="Microsoft YaHei"/>
                 <a:ea typeface="Microsoft YaHei"/>
               </a:rPr>
-              <a:t>"</a:t>
+              <a:t/>
             </a:r>
             <a:r>
               <a:rPr lang="en-US" sz="1275">
@@ -19432,7 +19432,7 @@
                 <a:latin typeface="Microsoft YaHei"/>
                 <a:ea typeface="Microsoft YaHei"/>
               </a:rPr>
-              <a:t xml:space="preserve">—— </a:t>
+              <a:t xml:space="preserve"/>
             </a:r>
             <a:r>
               <a:rPr lang="zh-CN" sz="1275">
@@ -19442,7 +19442,7 @@
                 <a:latin typeface="Microsoft YaHei"/>
                 <a:ea typeface="Microsoft YaHei"/>
               </a:rPr>
-              <a:t>对行动受限或处于无网环境的人群，联网方案在结构上就不适用。</a:t>
+              <a:t/>
             </a:r>
             <a:r>
               <a:rPr lang="en-US" sz="1275">
@@ -19452,7 +19452,7 @@
                 <a:latin typeface="Microsoft YaHei"/>
                 <a:ea typeface="Microsoft YaHei"/>
               </a:rPr>
-              <a:t xml:space="preserve"> </a:t>
+              <a:t xml:space="preserve"/>
             </a:r>
             <a:r>
               <a:rPr lang="zh-CN" sz="1275">
@@ -19462,7 +19462,7 @@
                 <a:latin typeface="Microsoft YaHei"/>
                 <a:ea typeface="Microsoft YaHei"/>
               </a:rPr>
-              <a:t>而在</a:t>
+              <a:t/>
             </a:r>
             <a:r>
               <a:rPr lang="en-US" sz="1275">
@@ -19472,7 +19472,7 @@
                 <a:latin typeface="Microsoft YaHei"/>
                 <a:ea typeface="Microsoft YaHei"/>
               </a:rPr>
-              <a:t>"</a:t>
+              <a:t/>
             </a:r>
             <a:r>
               <a:rPr lang="zh-CN" sz="1275">
@@ -19482,7 +19482,7 @@
                 <a:latin typeface="Microsoft YaHei"/>
                 <a:ea typeface="Microsoft YaHei"/>
               </a:rPr>
-              <a:t>本地离线</a:t>
+              <a:t/>
             </a:r>
             <a:r>
               <a:rPr lang="en-US" sz="1275">
@@ -19492,7 +19492,7 @@
                 <a:latin typeface="Microsoft YaHei"/>
                 <a:ea typeface="Microsoft YaHei"/>
               </a:rPr>
-              <a:t xml:space="preserve"> + </a:t>
+              <a:t xml:space="preserve"/>
             </a:r>
             <a:r>
               <a:rPr lang="zh-CN" sz="1275">
@@ -19502,7 +19502,7 @@
                 <a:latin typeface="Microsoft YaHei"/>
                 <a:ea typeface="Microsoft YaHei"/>
               </a:rPr>
-              <a:t>秒级参考音</a:t>
+              <a:t/>
             </a:r>
             <a:r>
               <a:rPr lang="en-US" sz="1275">
@@ -19512,7 +19512,7 @@
                 <a:latin typeface="Microsoft YaHei"/>
                 <a:ea typeface="Microsoft YaHei"/>
               </a:rPr>
-              <a:t>"</a:t>
+              <a:t/>
             </a:r>
             <a:r>
               <a:rPr lang="zh-CN" sz="1275">
@@ -19522,7 +19522,7 @@
                 <a:latin typeface="Microsoft YaHei"/>
                 <a:ea typeface="Microsoft YaHei"/>
               </a:rPr>
-              <a:t>这一格中，</a:t>
+              <a:t/>
             </a:r>
             <a:r>
               <a:rPr lang="zh-CN" sz="1275">
@@ -19532,7 +19532,7 @@
                 <a:latin typeface="Microsoft YaHei"/>
                 <a:ea typeface="Microsoft YaHei"/>
               </a:rPr>
-              <a:t>「质量代价究竟有多大」尚未被系统回答</a:t>
+              <a:t/>
             </a:r>
             <a:r>
               <a:rPr lang="zh-CN" sz="1275">
@@ -19542,7 +19542,7 @@
                 <a:latin typeface="Microsoft YaHei"/>
                 <a:ea typeface="Microsoft YaHei"/>
               </a:rPr>
-              <a:t>。</a:t>
+              <a:t/>
             </a:r>
             <a:endParaRPr/>
           </a:p>
@@ -19883,7 +19883,7 @@
                 <a:latin typeface="Microsoft YaHei"/>
                 <a:ea typeface="Microsoft YaHei"/>
               </a:rPr>
-              <a:t xml:space="preserve">① </a:t>
+              <a:t xml:space="preserve">① 前期基础扎实：后端 3.8 万行 / 前端 4 万行 / 27 插件 / 2,847 测试 / 已开源 → 可行性风险低</a:t>
             </a:r>
             <a:r>
               <a:rPr lang="zh-CN" sz="1050">
@@ -19893,7 +19893,7 @@
                 <a:latin typeface="Microsoft YaHei"/>
                 <a:ea typeface="Microsoft YaHei"/>
               </a:rPr>
-              <a:t>前期基础扎实</a:t>
+              <a:t/>
             </a:r>
             <a:r>
               <a:rPr lang="zh-CN" sz="1050">
@@ -19903,7 +19903,7 @@
                 <a:latin typeface="Microsoft YaHei"/>
                 <a:ea typeface="Microsoft YaHei"/>
               </a:rPr>
-              <a:t>：后端</a:t>
+              <a:t/>
             </a:r>
             <a:r>
               <a:rPr lang="en-US" sz="1050">
@@ -19913,7 +19913,7 @@
                 <a:latin typeface="Microsoft YaHei"/>
                 <a:ea typeface="Microsoft YaHei"/>
               </a:rPr>
-              <a:t xml:space="preserve"> 37,872 </a:t>
+              <a:t xml:space="preserve"/>
             </a:r>
             <a:r>
               <a:rPr lang="zh-CN" sz="1050">
@@ -19923,7 +19923,7 @@
                 <a:latin typeface="Microsoft YaHei"/>
                 <a:ea typeface="Microsoft YaHei"/>
               </a:rPr>
-              <a:t>行</a:t>
+              <a:t/>
             </a:r>
             <a:r>
               <a:rPr lang="en-US" sz="1050">
@@ -19933,7 +19933,7 @@
                 <a:latin typeface="Microsoft YaHei"/>
                 <a:ea typeface="Microsoft YaHei"/>
               </a:rPr>
-              <a:t xml:space="preserve"> / </a:t>
+              <a:t xml:space="preserve"/>
             </a:r>
             <a:r>
               <a:rPr lang="zh-CN" sz="1050">
@@ -19943,7 +19943,7 @@
                 <a:latin typeface="Microsoft YaHei"/>
                 <a:ea typeface="Microsoft YaHei"/>
               </a:rPr>
-              <a:t>前端</a:t>
+              <a:t/>
             </a:r>
             <a:r>
               <a:rPr lang="en-US" sz="1050">
@@ -19953,7 +19953,7 @@
                 <a:latin typeface="Microsoft YaHei"/>
                 <a:ea typeface="Microsoft YaHei"/>
               </a:rPr>
-              <a:t xml:space="preserve"> 40,169 </a:t>
+              <a:t xml:space="preserve"/>
             </a:r>
             <a:r>
               <a:rPr lang="zh-CN" sz="1050">
@@ -19963,7 +19963,7 @@
                 <a:latin typeface="Microsoft YaHei"/>
                 <a:ea typeface="Microsoft YaHei"/>
               </a:rPr>
-              <a:t>行</a:t>
+              <a:t/>
             </a:r>
             <a:r>
               <a:rPr lang="en-US" sz="1050">
@@ -19973,7 +19973,7 @@
                 <a:latin typeface="Microsoft YaHei"/>
                 <a:ea typeface="Microsoft YaHei"/>
               </a:rPr>
-              <a:t xml:space="preserve"> / 27 </a:t>
+              <a:t xml:space="preserve"/>
             </a:r>
             <a:r>
               <a:rPr lang="zh-CN" sz="1050">
@@ -19983,7 +19983,7 @@
                 <a:latin typeface="Microsoft YaHei"/>
                 <a:ea typeface="Microsoft YaHei"/>
               </a:rPr>
-              <a:t>插件</a:t>
+              <a:t/>
             </a:r>
             <a:r>
               <a:rPr lang="en-US" sz="1050">
@@ -19993,7 +19993,7 @@
                 <a:latin typeface="Microsoft YaHei"/>
                 <a:ea typeface="Microsoft YaHei"/>
               </a:rPr>
-              <a:t xml:space="preserve"> / 2,847 </a:t>
+              <a:t xml:space="preserve"/>
             </a:r>
             <a:r>
               <a:rPr lang="zh-CN" sz="1050">
@@ -20003,7 +20003,7 @@
                 <a:latin typeface="Microsoft YaHei"/>
                 <a:ea typeface="Microsoft YaHei"/>
               </a:rPr>
-              <a:t>测试</a:t>
+              <a:t/>
             </a:r>
             <a:r>
               <a:rPr lang="en-US" sz="1050">
@@ -20013,7 +20013,7 @@
                 <a:latin typeface="Microsoft YaHei"/>
                 <a:ea typeface="Microsoft YaHei"/>
               </a:rPr>
-              <a:t xml:space="preserve"> / CI </a:t>
+              <a:t xml:space="preserve"/>
             </a:r>
             <a:r>
               <a:rPr lang="zh-CN" sz="1050">
@@ -20023,7 +20023,7 @@
                 <a:latin typeface="Microsoft YaHei"/>
                 <a:ea typeface="Microsoft YaHei"/>
               </a:rPr>
-              <a:t>门禁</a:t>
+              <a:t/>
             </a:r>
             <a:r>
               <a:rPr lang="en-US" sz="1050">
@@ -20033,7 +20033,7 @@
                 <a:latin typeface="Microsoft YaHei"/>
                 <a:ea typeface="Microsoft YaHei"/>
               </a:rPr>
-              <a:t xml:space="preserve"> / </a:t>
+              <a:t xml:space="preserve"/>
             </a:r>
             <a:r>
               <a:rPr lang="zh-CN" sz="1050">
@@ -20043,7 +20043,7 @@
                 <a:latin typeface="Microsoft YaHei"/>
                 <a:ea typeface="Microsoft YaHei"/>
               </a:rPr>
-              <a:t>已开源</a:t>
+              <a:t/>
             </a:r>
             <a:r>
               <a:rPr lang="en-US" sz="1050">
@@ -20053,7 +20053,7 @@
                 <a:latin typeface="Microsoft YaHei"/>
                 <a:ea typeface="Microsoft YaHei"/>
               </a:rPr>
-              <a:t xml:space="preserve"> → </a:t>
+              <a:t xml:space="preserve"/>
             </a:r>
             <a:r>
               <a:rPr lang="zh-CN" sz="1050">
@@ -20063,7 +20063,7 @@
                 <a:latin typeface="Microsoft YaHei"/>
                 <a:ea typeface="Microsoft YaHei"/>
               </a:rPr>
-              <a:t>可行性风险低</a:t>
+              <a:t/>
             </a:r>
             <a:endParaRPr/>
           </a:p>
@@ -20139,7 +20139,7 @@
                 <a:latin typeface="Microsoft YaHei"/>
                 <a:ea typeface="Microsoft YaHei"/>
               </a:rPr>
-              <a:t xml:space="preserve">③ </a:t>
+              <a:t xml:space="preserve">③ 评测引擎与协议已就绪：1559 行 + 99 测试，立项后可直接进入数据采集</a:t>
             </a:r>
             <a:r>
               <a:rPr lang="zh-CN" sz="1050">
@@ -20149,7 +20149,7 @@
                 <a:latin typeface="Microsoft YaHei"/>
                 <a:ea typeface="Microsoft YaHei"/>
               </a:rPr>
-              <a:t>评测引擎与协议已就绪</a:t>
+              <a:t/>
             </a:r>
             <a:r>
               <a:rPr lang="zh-CN" sz="1050">
@@ -20159,7 +20159,7 @@
                 <a:latin typeface="Microsoft YaHei"/>
                 <a:ea typeface="Microsoft YaHei"/>
               </a:rPr>
-              <a:t>：</a:t>
+              <a:t/>
             </a:r>
             <a:r>
               <a:rPr lang="en-US" sz="1050">
@@ -20169,7 +20169,7 @@
                 <a:latin typeface="Microsoft YaHei"/>
                 <a:ea typeface="Microsoft YaHei"/>
               </a:rPr>
-              <a:t xml:space="preserve">1559 </a:t>
+              <a:t xml:space="preserve"/>
             </a:r>
             <a:r>
               <a:rPr lang="zh-CN" sz="1050">
@@ -20179,7 +20179,7 @@
                 <a:latin typeface="Microsoft YaHei"/>
                 <a:ea typeface="Microsoft YaHei"/>
               </a:rPr>
-              <a:t>行</a:t>
+              <a:t/>
             </a:r>
             <a:r>
               <a:rPr lang="en-US" sz="1050">
@@ -20189,7 +20189,7 @@
                 <a:latin typeface="Microsoft YaHei"/>
                 <a:ea typeface="Microsoft YaHei"/>
               </a:rPr>
-              <a:t xml:space="preserve"> + 99 </a:t>
+              <a:t xml:space="preserve"/>
             </a:r>
             <a:r>
               <a:rPr lang="zh-CN" sz="1050">
@@ -20199,7 +20199,7 @@
                 <a:latin typeface="Microsoft YaHei"/>
                 <a:ea typeface="Microsoft YaHei"/>
               </a:rPr>
-              <a:t>测试，立案后可直接进入数据采集</a:t>
+              <a:t/>
             </a:r>
             <a:endParaRPr/>
           </a:p>
@@ -20310,7 +20310,7 @@
                 <a:latin typeface="Microsoft YaHei"/>
                 <a:ea typeface="Microsoft YaHei"/>
               </a:rPr>
-              <a:t xml:space="preserve">① </a:t>
+              <a:t xml:space="preserve">① 主观听测（RQ3）尚无实施经验，组织与评分一致性控制需方法指导</a:t>
             </a:r>
             <a:r>
               <a:rPr lang="zh-CN" sz="1050">
@@ -20320,7 +20320,7 @@
                 <a:latin typeface="Microsoft YaHei"/>
                 <a:ea typeface="Microsoft YaHei"/>
               </a:rPr>
-              <a:t>主观听测（</a:t>
+              <a:t/>
             </a:r>
             <a:r>
               <a:rPr lang="en-US" sz="1050">
@@ -20330,7 +20330,7 @@
                 <a:latin typeface="Microsoft YaHei"/>
                 <a:ea typeface="Microsoft YaHei"/>
               </a:rPr>
-              <a:t>RQ3</a:t>
+              <a:t/>
             </a:r>
             <a:r>
               <a:rPr lang="zh-CN" sz="1050">
@@ -20340,7 +20340,7 @@
                 <a:latin typeface="Microsoft YaHei"/>
                 <a:ea typeface="Microsoft YaHei"/>
               </a:rPr>
-              <a:t>）团队尚无实施经验</a:t>
+              <a:t/>
             </a:r>
             <a:r>
               <a:rPr lang="zh-CN" sz="1050">
@@ -20350,7 +20350,7 @@
                 <a:latin typeface="Microsoft YaHei"/>
                 <a:ea typeface="Microsoft YaHei"/>
               </a:rPr>
-              <a:t>，</a:t>
+              <a:t/>
             </a:r>
             <a:r>
               <a:rPr lang="en-US" sz="1050">
@@ -20360,7 +20360,7 @@
                 <a:latin typeface="Microsoft YaHei"/>
                 <a:ea typeface="Microsoft YaHei"/>
               </a:rPr>
-              <a:t xml:space="preserve">MOS / ABX </a:t>
+              <a:t xml:space="preserve"/>
             </a:r>
             <a:r>
               <a:rPr lang="zh-CN" sz="1050">
@@ -20370,7 +20370,7 @@
                 <a:latin typeface="Microsoft YaHei"/>
                 <a:ea typeface="Microsoft YaHei"/>
               </a:rPr>
-              <a:t>的组织、被试管理、评分一致性控制都需方法指导</a:t>
+              <a:t/>
             </a:r>
             <a:endParaRPr/>
           </a:p>
@@ -20640,7 +20640,7 @@
                 <a:latin typeface="Microsoft YaHei"/>
                 <a:ea typeface="Microsoft YaHei"/>
               </a:rPr>
-              <a:t xml:space="preserve">① </a:t>
+              <a:t xml:space="preserve">① 先做小规模预实验跑通流程，请导师把关；复用已有盲听平台</a:t>
             </a:r>
             <a:r>
               <a:rPr lang="zh-CN" sz="1050">
@@ -20650,7 +20650,7 @@
                 <a:latin typeface="Microsoft YaHei"/>
                 <a:ea typeface="Microsoft YaHei"/>
               </a:rPr>
-              <a:t>立项后</a:t>
+              <a:t/>
             </a:r>
             <a:r>
               <a:rPr lang="zh-CN" sz="1050">
@@ -20660,7 +20660,7 @@
                 <a:latin typeface="Microsoft YaHei"/>
                 <a:ea typeface="Microsoft YaHei"/>
               </a:rPr>
-              <a:t>先做小规模预实验</a:t>
+              <a:t/>
             </a:r>
             <a:r>
               <a:rPr lang="zh-CN" sz="1050">
@@ -20670,7 +20670,7 @@
                 <a:latin typeface="Microsoft YaHei"/>
                 <a:ea typeface="Microsoft YaHei"/>
               </a:rPr>
-              <a:t>跑通流程；请老师把关听测设计与统计；复用已有盲听平台（随机化、不显示条件）</a:t>
+              <a:t/>
             </a:r>
             <a:endParaRPr/>
           </a:p>
@@ -20688,7 +20688,7 @@
                 <a:latin typeface="Microsoft YaHei"/>
                 <a:ea typeface="Microsoft YaHei"/>
               </a:rPr>
-              <a:t xml:space="preserve">② </a:t>
+              <a:t xml:space="preserve">② 10 月内启动招募；每人仅需录约 65 秒</a:t>
             </a:r>
             <a:r>
               <a:rPr lang="en-US" sz="1050">
@@ -20698,7 +20698,7 @@
                 <a:latin typeface="Microsoft YaHei"/>
                 <a:ea typeface="Microsoft YaHei"/>
               </a:rPr>
-              <a:t xml:space="preserve">2026 </a:t>
+              <a:t xml:space="preserve"/>
             </a:r>
             <a:r>
               <a:rPr lang="zh-CN" sz="1050">
@@ -20708,7 +20708,7 @@
                 <a:latin typeface="Microsoft YaHei"/>
                 <a:ea typeface="Microsoft YaHei"/>
               </a:rPr>
-              <a:t>年</a:t>
+              <a:t/>
             </a:r>
             <a:r>
               <a:rPr lang="en-US" sz="1050">
@@ -20718,7 +20718,7 @@
                 <a:latin typeface="Microsoft YaHei"/>
                 <a:ea typeface="Microsoft YaHei"/>
               </a:rPr>
-              <a:t xml:space="preserve"> 10 </a:t>
+              <a:t xml:space="preserve"/>
             </a:r>
             <a:r>
               <a:rPr lang="zh-CN" sz="1050">
@@ -20728,7 +20728,7 @@
                 <a:latin typeface="Microsoft YaHei"/>
                 <a:ea typeface="Microsoft YaHei"/>
               </a:rPr>
-              <a:t>月内即启动招募</a:t>
+              <a:t/>
             </a:r>
             <a:r>
               <a:rPr lang="zh-CN" sz="1050">
@@ -20738,7 +20738,7 @@
                 <a:latin typeface="Microsoft YaHei"/>
                 <a:ea typeface="Microsoft YaHei"/>
               </a:rPr>
-              <a:t>；每人实际仅需录约</a:t>
+              <a:t/>
             </a:r>
             <a:r>
               <a:rPr lang="en-US" sz="1050">
@@ -20748,7 +20748,7 @@
                 <a:latin typeface="Microsoft YaHei"/>
                 <a:ea typeface="Microsoft YaHei"/>
               </a:rPr>
-              <a:t xml:space="preserve"> 65 </a:t>
+              <a:t xml:space="preserve"/>
             </a:r>
             <a:r>
               <a:rPr lang="zh-CN" sz="1050">
@@ -20758,7 +20758,7 @@
                 <a:latin typeface="Microsoft YaHei"/>
                 <a:ea typeface="Microsoft YaHei"/>
               </a:rPr>
-              <a:t>秒，参与成本低</a:t>
+              <a:t/>
             </a:r>
             <a:endParaRPr/>
           </a:p>
@@ -20776,7 +20776,7 @@
                 <a:latin typeface="Microsoft YaHei"/>
                 <a:ea typeface="Microsoft YaHei"/>
               </a:rPr>
-              <a:t xml:space="preserve">③ </a:t>
+              <a:t xml:space="preserve">③ 立项后 2 个月完成统计自学；关键分析由导师复核</a:t>
             </a:r>
             <a:r>
               <a:rPr lang="zh-CN" sz="1050">
@@ -20786,7 +20786,7 @@
                 <a:latin typeface="Microsoft YaHei"/>
                 <a:ea typeface="Microsoft YaHei"/>
               </a:rPr>
-              <a:t>立项后</a:t>
+              <a:t/>
             </a:r>
             <a:r>
               <a:rPr lang="en-US" sz="1050">
@@ -20796,7 +20796,7 @@
                 <a:latin typeface="Microsoft YaHei"/>
                 <a:ea typeface="Microsoft YaHei"/>
               </a:rPr>
-              <a:t xml:space="preserve"> 2 </a:t>
+              <a:t xml:space="preserve"/>
             </a:r>
             <a:r>
               <a:rPr lang="zh-CN" sz="1050">
@@ -20806,7 +20806,7 @@
                 <a:latin typeface="Microsoft YaHei"/>
                 <a:ea typeface="Microsoft YaHei"/>
               </a:rPr>
-              <a:t>个月内完成统计方法自学；关键分析由指导老师复核</a:t>
+              <a:t/>
             </a:r>
             <a:endParaRPr/>
           </a:p>
@@ -21587,7 +21587,7 @@
                 <a:latin typeface="Microsoft YaHei"/>
                 <a:ea typeface="Microsoft YaHei"/>
               </a:rPr>
-              <a:t>以“减轻录课人群的用嗓负担”为应用定位，回答“本地离线、秒级参考音条件下的声音复现质量边界”，并给出面向普通用户的可操作结论。（用你的声音替你录课，最少录多久？）</a:t>
+              <a:t>以“减轻录课人群用嗓负担”为应用定位，回答“本地离线、秒级参考音下的复现质量边界”，给出可操作结论：要保存自己的声音，最少录多久？</a:t>
             </a:r>
             <a:endParaRPr/>
           </a:p>
@@ -23242,7 +23242,7 @@
             </a:pPr>
             <a:r>
               <a:rPr b="0"/>
-              <a:t>起点是</a:t>
+              <a:t>起点是人的困境：职业用嗓人群嗓音损伤真实且高发，声音失去不可逆</a:t>
             </a:r>
             <a:r>
               <a:rPr b="1">
@@ -23250,15 +23250,15 @@
                   <a:srgbClr val="0E3F8C"/>
                 </a:solidFill>
               </a:rPr>
-              <a:t>人的困境</a:t>
+              <a:t/>
             </a:r>
             <a:r>
               <a:rPr b="0"/>
-              <a:t>：录课等职业用嗓人群以嗓音为工具，嗓音损伤真实且高发，而声音一旦失去</a:t>
+              <a:t/>
             </a:r>
             <a:r>
               <a:rPr b="1"/>
-              <a:t>不可逆</a:t>
+              <a:t/>
             </a:r>
             <a:endParaRPr/>
           </a:p>
@@ -23379,7 +23379,7 @@
             </a:pPr>
             <a:r>
               <a:rPr b="0"/>
-              <a:t>但现有方案的</a:t>
+              <a:t>现有方案门槛高到用不上：录 50–200 句 / 仅 Apple / 必须联网</a:t>
             </a:r>
             <a:r>
               <a:rPr b="1">
@@ -23387,15 +23387,15 @@
                   <a:srgbClr val="D9534F"/>
                 </a:solidFill>
               </a:rPr>
-              <a:t>门槛高到用不上</a:t>
+              <a:t/>
             </a:r>
             <a:r>
               <a:rPr b="0"/>
-              <a:t>：要录 50–200 句 / 只支持 Apple 设备 / 必须联网——</a:t>
+              <a:t/>
             </a:r>
             <a:r>
               <a:rPr b="1"/>
-              <a:t>普通人根本没机会保存</a:t>
+              <a:t/>
             </a:r>
             <a:endParaRPr/>
           </a:p>
@@ -23511,7 +23511,7 @@
             </a:pPr>
             <a:r>
               <a:rPr b="0"/>
-              <a:t>所以要把门槛</a:t>
+              <a:t>把门槛降到"负担得起"：离线、不挑设备、尽量少录——"最少录多少"没人回答过</a:t>
             </a:r>
             <a:r>
               <a:rPr b="1">
@@ -23519,19 +23519,19 @@
                   <a:srgbClr val="0E3F8C"/>
                 </a:solidFill>
               </a:rPr>
-              <a:t>降到"负担得起"</a:t>
+              <a:t/>
             </a:r>
             <a:r>
               <a:rPr b="0"/>
-              <a:t>：离线、不挑设备、</a:t>
+              <a:t/>
             </a:r>
             <a:r>
               <a:rPr b="1"/>
-              <a:t>尽量少录</a:t>
+              <a:t/>
             </a:r>
             <a:r>
               <a:rPr b="0"/>
-              <a:t>——而"最少能录多少"没人系统回答过</a:t>
+              <a:t/>
             </a:r>
             <a:endParaRPr/>
           </a:p>
@@ -23647,7 +23647,7 @@
             </a:pPr>
             <a:r>
               <a:rPr b="0"/>
-              <a:t>回答它必须排除混淆因素 → </a:t>
+              <a:t>回答它必须控制变量：同一说话人、同一麦克风、同一房间，只改参考音时长</a:t>
             </a:r>
             <a:r>
               <a:rPr b="1">
@@ -23655,7 +23655,7 @@
                   <a:srgbClr val="0E3F8C"/>
                 </a:solidFill>
               </a:rPr>
-              <a:t>控制变量：同一说话人、同一麦克风、同一房间，只改变参考音时长</a:t>
+              <a:t/>
             </a:r>
             <a:endParaRPr/>
           </a:p>
@@ -23771,23 +23771,23 @@
             </a:pPr>
             <a:r>
               <a:rPr b="0"/>
-              <a:t>把答案</a:t>
+              <a:t>把答案固化进产品：录音时自动判断“够不够”——让用户敢用、知道何时可停</a:t>
             </a:r>
             <a:r>
               <a:rPr b="1"/>
-              <a:t>固化进产品</a:t>
+              <a:t/>
             </a:r>
             <a:r>
               <a:rPr b="0"/>
-              <a:t>：录音时自动判断</a:t>
+              <a:t/>
             </a:r>
             <a:r>
               <a:rPr b="1"/>
-              <a:t>"够不够"</a:t>
+              <a:t/>
             </a:r>
             <a:r>
               <a:rPr b="0"/>
-              <a:t>——让用户花得起、敢用、知道什么时候可以停</a:t>
+              <a:t/>
             </a:r>
             <a:endParaRPr/>
           </a:p>
@@ -23903,19 +23903,19 @@
                   <a:srgbClr val="0E3F8C"/>
                 </a:solidFill>
               </a:rPr>
-              <a:t>思路的落点</a:t>
+              <a:t>落点：交付的不是“更像的模型”，而是普通人负担得起、知道何时录够的保存流程。</a:t>
             </a:r>
             <a:r>
               <a:rPr b="0"/>
-              <a:t>：交付的不是"一个更像的克隆模型"，而是</a:t>
+              <a:t/>
             </a:r>
             <a:r>
               <a:rPr b="1"/>
-              <a:t>一个普通人负担得起、且知道自己什么时候录够了的保存流程</a:t>
+              <a:t/>
             </a:r>
             <a:r>
               <a:rPr b="0"/>
-              <a:t>。</a:t>
+              <a:t/>
             </a:r>
             <a:endParaRPr/>
           </a:p>

--- a/docs/大创申报-2026-10/大创申报PPT.pptx
+++ b/docs/大创申报-2026-10/大创申报PPT.pptx
@@ -7362,7 +7362,7 @@
                 </a:solidFill>
                 <a:latin typeface="微软雅黑"/>
               </a:rPr>
-              <a:t>工程体量：后端 37,872 行 · 前端 40,169 行 · 自动化测试 2,847 个（149 文件） · 能力插件 27 个 · CI 门禁与发布流程齐全 · 已在 GitHub 开源</a:t>
+              <a:t>工程体量：后端 39,627 行 · 前端 41,867 行 · 自动化测试 3,113 个（163 文件） · 能力插件 28 个 · CI 门禁与发布流程齐全 · 已在 GitHub 开源</a:t>
             </a:r>
           </a:p>
         </p:txBody>
@@ -19883,7 +19883,7 @@
                 <a:latin typeface="Microsoft YaHei"/>
                 <a:ea typeface="Microsoft YaHei"/>
               </a:rPr>
-              <a:t xml:space="preserve">① 前期基础扎实：后端 3.8 万行 / 前端 4 万行 / 27 插件 / 2,847 测试 / 已开源 → 可行性风险低</a:t>
+              <a:t xml:space="preserve">① 前期基础扎实：后端 4.0 万行 / 前端 4.2 万行 / 28 插件 / 3,113 测试 / 已开源 → 可行性风险低</a:t>
             </a:r>
             <a:r>
               <a:rPr lang="zh-CN" sz="1050">
@@ -20139,7 +20139,7 @@
                 <a:latin typeface="Microsoft YaHei"/>
                 <a:ea typeface="Microsoft YaHei"/>
               </a:rPr>
-              <a:t xml:space="preserve">③ 评测引擎与协议已就绪：1559 行 + 99 测试，立项后可直接进入数据采集</a:t>
+              <a:t xml:space="preserve">③ 评测引擎与协议已就绪：1,573 行 + 102 测试，立项后可直接进入数据采集</a:t>
             </a:r>
             <a:r>
               <a:rPr lang="zh-CN" sz="1050">
@@ -22743,7 +22743,7 @@
                           <a:latin typeface="Microsoft YaHei"/>
                           <a:ea typeface="Microsoft YaHei"/>
                         </a:rPr>
-                        <a:t>后端 37,872 行 · 前端 40,169 行 · 27 插件 · 2,847 测试</a:t>
+                        <a:t>后端 39,627 行 · 前端 41,867 行 · 28 插件 · 3,113 测试</a:t>
                       </a:r>
                       <a:endParaRPr/>
                     </a:p>
